--- a/ppt/ICU_Mortality_Prediction.pptx
+++ b/ppt/ICU_Mortality_Prediction.pptx
@@ -5,24 +5,28 @@
     <p:sldMasterId id="2147483648" r:id="rId1"/>
   </p:sldMasterIdLst>
   <p:notesMasterIdLst>
-    <p:notesMasterId r:id="rId17"/>
+    <p:notesMasterId r:id="rId21"/>
   </p:notesMasterIdLst>
   <p:sldIdLst>
     <p:sldId id="256" r:id="rId2"/>
     <p:sldId id="283" r:id="rId3"/>
     <p:sldId id="257" r:id="rId4"/>
     <p:sldId id="263" r:id="rId5"/>
-    <p:sldId id="285" r:id="rId6"/>
-    <p:sldId id="286" r:id="rId7"/>
-    <p:sldId id="288" r:id="rId8"/>
-    <p:sldId id="287" r:id="rId9"/>
-    <p:sldId id="290" r:id="rId10"/>
-    <p:sldId id="289" r:id="rId11"/>
-    <p:sldId id="291" r:id="rId12"/>
-    <p:sldId id="292" r:id="rId13"/>
-    <p:sldId id="295" r:id="rId14"/>
-    <p:sldId id="296" r:id="rId15"/>
-    <p:sldId id="294" r:id="rId16"/>
+    <p:sldId id="297" r:id="rId6"/>
+    <p:sldId id="298" r:id="rId7"/>
+    <p:sldId id="300" r:id="rId8"/>
+    <p:sldId id="301" r:id="rId9"/>
+    <p:sldId id="303" r:id="rId10"/>
+    <p:sldId id="304" r:id="rId11"/>
+    <p:sldId id="306" r:id="rId12"/>
+    <p:sldId id="305" r:id="rId13"/>
+    <p:sldId id="307" r:id="rId14"/>
+    <p:sldId id="308" r:id="rId15"/>
+    <p:sldId id="309" r:id="rId16"/>
+    <p:sldId id="310" r:id="rId17"/>
+    <p:sldId id="312" r:id="rId18"/>
+    <p:sldId id="311" r:id="rId19"/>
+    <p:sldId id="294" r:id="rId20"/>
   </p:sldIdLst>
   <p:sldSz cx="9144000" cy="6858000" type="screen4x3"/>
   <p:notesSz cx="6858000" cy="9144000"/>
@@ -672,90 +676,6 @@
     <p:extLst>
       <p:ext uri="{BB962C8B-B14F-4D97-AF65-F5344CB8AC3E}">
         <p14:creationId xmlns:p14="http://schemas.microsoft.com/office/powerpoint/2010/main" val="2959165213"/>
-      </p:ext>
-    </p:extLst>
-  </p:cSld>
-  <p:clrMapOvr>
-    <a:masterClrMapping/>
-  </p:clrMapOvr>
-</p:notes>
-</file>
-
-<file path=ppt/notesSlides/notesSlide3.xml><?xml version="1.0" encoding="utf-8"?>
-<p:notes xmlns:a="http://schemas.openxmlformats.org/drawingml/2006/main" xmlns:r="http://schemas.openxmlformats.org/officeDocument/2006/relationships" xmlns:p="http://schemas.openxmlformats.org/presentationml/2006/main">
-  <p:cSld>
-    <p:spTree>
-      <p:nvGrpSpPr>
-        <p:cNvPr id="1" name=""/>
-        <p:cNvGrpSpPr/>
-        <p:nvPr/>
-      </p:nvGrpSpPr>
-      <p:grpSpPr>
-        <a:xfrm>
-          <a:off x="0" y="0"/>
-          <a:ext cx="0" cy="0"/>
-          <a:chOff x="0" y="0"/>
-          <a:chExt cx="0" cy="0"/>
-        </a:xfrm>
-      </p:grpSpPr>
-      <p:sp>
-        <p:nvSpPr>
-          <p:cNvPr id="2" name="Slide Image Placeholder 1"/>
-          <p:cNvSpPr>
-            <a:spLocks noGrp="1" noRot="1" noChangeAspect="1"/>
-          </p:cNvSpPr>
-          <p:nvPr>
-            <p:ph type="sldImg"/>
-          </p:nvPr>
-        </p:nvSpPr>
-        <p:spPr/>
-      </p:sp>
-      <p:sp>
-        <p:nvSpPr>
-          <p:cNvPr id="3" name="Notes Placeholder 2"/>
-          <p:cNvSpPr>
-            <a:spLocks noGrp="1"/>
-          </p:cNvSpPr>
-          <p:nvPr>
-            <p:ph type="body" idx="1"/>
-          </p:nvPr>
-        </p:nvSpPr>
-        <p:spPr/>
-        <p:txBody>
-          <a:bodyPr/>
-          <a:lstStyle/>
-          <a:p>
-            <a:endParaRPr lang="en-US" dirty="0"/>
-          </a:p>
-        </p:txBody>
-      </p:sp>
-      <p:sp>
-        <p:nvSpPr>
-          <p:cNvPr id="4" name="Slide Number Placeholder 3"/>
-          <p:cNvSpPr>
-            <a:spLocks noGrp="1"/>
-          </p:cNvSpPr>
-          <p:nvPr>
-            <p:ph type="sldNum" sz="quarter" idx="5"/>
-          </p:nvPr>
-        </p:nvSpPr>
-        <p:spPr/>
-        <p:txBody>
-          <a:bodyPr/>
-          <a:lstStyle/>
-          <a:p>
-            <a:fld id="{44E3141F-2EC1-4965-A570-047C1376BF29}" type="slidenum">
-              <a:rPr lang="en-US" smtClean="0"/>
-              <a:t>8</a:t>
-            </a:fld>
-            <a:endParaRPr lang="en-US"/>
-          </a:p>
-        </p:txBody>
-      </p:sp>
-    </p:spTree>
-    <p:extLst>
-      <p:ext uri="{BB962C8B-B14F-4D97-AF65-F5344CB8AC3E}">
-        <p14:creationId xmlns:p14="http://schemas.microsoft.com/office/powerpoint/2010/main" val="618353094"/>
       </p:ext>
     </p:extLst>
   </p:cSld>
@@ -3749,7 +3669,7 @@
           <a:p>
             <a:r>
               <a:rPr lang="en-US" dirty="0"/>
-              <a:t>ICU Mortality Prediction</a:t>
+              <a:t>ICU Mortality Prediction Tutorial</a:t>
             </a:r>
             <a:endParaRPr dirty="0"/>
           </a:p>
@@ -3767,20 +3687,14 @@
         </p:nvSpPr>
         <p:spPr/>
         <p:txBody>
-          <a:bodyPr/>
-          <a:lstStyle/>
-          <a:p>
-            <a:r>
-              <a:rPr dirty="0"/>
-              <a:t>Insigh</a:t>
-            </a:r>
+          <a:bodyPr>
+            <a:normAutofit/>
+          </a:bodyPr>
+          <a:lstStyle/>
+          <a:p>
             <a:r>
               <a:rPr lang="en-US" dirty="0"/>
-              <a:t>ts and Comparison of application of NLPs to MIMIC III </a:t>
-            </a:r>
-            <a:r>
-              <a:rPr lang="en-US" dirty="0" err="1"/>
-              <a:t>noteevents</a:t>
+              <a:t>A step by step ML workflow to Predict ICU mortality using public ICU mortality dataset</a:t>
             </a:r>
             <a:endParaRPr dirty="0"/>
           </a:p>
@@ -3802,7 +3716,7 @@
         <p:cNvPr id="1" name="">
           <a:extLst>
             <a:ext uri="{FF2B5EF4-FFF2-40B4-BE49-F238E27FC236}">
-              <a16:creationId xmlns:a16="http://schemas.microsoft.com/office/drawing/2014/main" id="{AD06CD11-E212-D549-F6C0-EC0F817F9092}"/>
+              <a16:creationId xmlns:a16="http://schemas.microsoft.com/office/drawing/2014/main" id="{E23B69F4-DA4D-F90E-9B6C-DE74842EDB04}"/>
             </a:ext>
           </a:extLst>
         </p:cNvPr>
@@ -3822,7 +3736,7 @@
           <p:cNvPr id="2" name="Title 1">
             <a:extLst>
               <a:ext uri="{FF2B5EF4-FFF2-40B4-BE49-F238E27FC236}">
-                <a16:creationId xmlns:a16="http://schemas.microsoft.com/office/drawing/2014/main" id="{BB32E2B2-8BA0-28BD-13CC-DBA24BA56F43}"/>
+                <a16:creationId xmlns:a16="http://schemas.microsoft.com/office/drawing/2014/main" id="{2AEFD831-F7E3-7807-3DEB-65E1AA915B2A}"/>
               </a:ext>
             </a:extLst>
           </p:cNvPr>
@@ -3835,8 +3749,8 @@
         </p:nvSpPr>
         <p:spPr>
           <a:xfrm>
-            <a:off x="131887" y="327394"/>
-            <a:ext cx="8229600" cy="936810"/>
+            <a:off x="411172" y="46506"/>
+            <a:ext cx="8229600" cy="1099820"/>
           </a:xfrm>
         </p:spPr>
         <p:txBody>
@@ -3846,26 +3760,22 @@
           <a:lstStyle/>
           <a:p>
             <a:r>
-              <a:rPr lang="en-US" sz="4000" dirty="0" err="1"/>
-              <a:t>Medspacy</a:t>
+              <a:rPr lang="en-US" sz="4000" dirty="0"/>
+              <a:t>Codes I</a:t>
             </a:r>
             <a:br>
               <a:rPr lang="en-US" sz="4000" dirty="0"/>
             </a:br>
-            <a:r>
-              <a:rPr lang="en-US" sz="3100" dirty="0"/>
-              <a:t>t-SNE based on w2V </a:t>
-            </a:r>
             <a:endParaRPr sz="3100" dirty="0"/>
           </a:p>
         </p:txBody>
       </p:sp>
       <p:sp>
         <p:nvSpPr>
-          <p:cNvPr id="8" name="TextBox 7">
+          <p:cNvPr id="3" name="TextBox 2">
             <a:extLst>
               <a:ext uri="{FF2B5EF4-FFF2-40B4-BE49-F238E27FC236}">
-                <a16:creationId xmlns:a16="http://schemas.microsoft.com/office/drawing/2014/main" id="{16A990A6-FB9A-6294-8AC3-209F722D9FA2}"/>
+                <a16:creationId xmlns:a16="http://schemas.microsoft.com/office/drawing/2014/main" id="{4080569A-4657-A255-77CA-057D9B15A708}"/>
               </a:ext>
             </a:extLst>
           </p:cNvPr>
@@ -3874,8 +3784,8 @@
         </p:nvSpPr>
         <p:spPr>
           <a:xfrm>
-            <a:off x="368271" y="1411092"/>
-            <a:ext cx="8407457" cy="1938992"/>
+            <a:off x="1172089" y="1134052"/>
+            <a:ext cx="7189393" cy="6124754"/>
           </a:xfrm>
           <a:prstGeom prst="rect">
             <a:avLst/>
@@ -3888,95 +3798,188 @@
           </a:bodyPr>
           <a:lstStyle/>
           <a:p>
+            <a:pPr marL="342900" indent="-342900" fontAlgn="base">
+              <a:buFont typeface="Arial" panose="020B0604020202020204" pitchFamily="34" charset="0"/>
+              <a:buChar char="•"/>
+            </a:pPr>
+            <a:r>
+              <a:rPr lang="en-US" sz="2000" dirty="0"/>
+              <a:t>Virtual environment (.env)</a:t>
+            </a:r>
+          </a:p>
+          <a:p>
+            <a:pPr marL="742950" lvl="1" indent="-285750" fontAlgn="base">
+              <a:buFont typeface="Wingdings" panose="05000000000000000000" pitchFamily="2" charset="2"/>
+              <a:buChar char="Ø"/>
+            </a:pPr>
+            <a:r>
+              <a:rPr lang="en-US" dirty="0"/>
+              <a:t>Set up virtual environment with required packages for data analysis, ML, Charts.</a:t>
+            </a:r>
+          </a:p>
+          <a:p>
+            <a:pPr marL="1200150" lvl="2" indent="-285750" fontAlgn="base">
+              <a:buFont typeface="Wingdings" panose="05000000000000000000" pitchFamily="2" charset="2"/>
+              <a:buChar char="ü"/>
+            </a:pPr>
+            <a:r>
+              <a:rPr lang="en-US" dirty="0"/>
+              <a:t>Pandas, </a:t>
+            </a:r>
+            <a:r>
+              <a:rPr lang="en-US" dirty="0" err="1"/>
+              <a:t>sklearn</a:t>
+            </a:r>
+            <a:r>
+              <a:rPr lang="en-US" dirty="0"/>
+              <a:t>, matplotlib, </a:t>
+            </a:r>
+            <a:r>
+              <a:rPr lang="en-US" dirty="0" err="1"/>
+              <a:t>imblearn</a:t>
+            </a:r>
+            <a:r>
+              <a:rPr lang="en-US" dirty="0"/>
+              <a:t> and seaborn</a:t>
+            </a:r>
+          </a:p>
+          <a:p>
+            <a:pPr marL="742950" lvl="1" indent="-285750" fontAlgn="base">
+              <a:buFont typeface="Wingdings" panose="05000000000000000000" pitchFamily="2" charset="2"/>
+              <a:buChar char="Ø"/>
+            </a:pPr>
+            <a:endParaRPr lang="en-US" dirty="0"/>
+          </a:p>
+          <a:p>
+            <a:pPr marL="285750" indent="-285750" fontAlgn="base">
+              <a:buFont typeface="Arial" panose="020B0604020202020204" pitchFamily="34" charset="0"/>
+              <a:buChar char="•"/>
+            </a:pPr>
+            <a:r>
+              <a:rPr lang="en-US" dirty="0"/>
+              <a:t>EDA (icu_Data_analysis_and_cleansing.py)</a:t>
+            </a:r>
+          </a:p>
+          <a:p>
+            <a:pPr marL="1200150" lvl="2" indent="-285750" fontAlgn="base">
+              <a:buFont typeface="Wingdings" panose="05000000000000000000" pitchFamily="2" charset="2"/>
+              <a:buChar char="ü"/>
+            </a:pPr>
+            <a:r>
+              <a:rPr lang="en-US" dirty="0"/>
+              <a:t>Analyze the stats of features</a:t>
+            </a:r>
+          </a:p>
+          <a:p>
+            <a:pPr marL="1200150" lvl="2" indent="-285750" fontAlgn="base">
+              <a:buFont typeface="Wingdings" panose="05000000000000000000" pitchFamily="2" charset="2"/>
+              <a:buChar char="ü"/>
+            </a:pPr>
+            <a:r>
+              <a:rPr lang="en-US" dirty="0"/>
+              <a:t>Analyze correlations between features</a:t>
+            </a:r>
+          </a:p>
+          <a:p>
+            <a:pPr marL="1200150" lvl="2" indent="-285750" fontAlgn="base">
+              <a:buFont typeface="Wingdings" panose="05000000000000000000" pitchFamily="2" charset="2"/>
+              <a:buChar char="ü"/>
+            </a:pPr>
+            <a:r>
+              <a:rPr lang="en-US" dirty="0"/>
+              <a:t>Analyze the correlation between features and targets</a:t>
+            </a:r>
+          </a:p>
+          <a:p>
+            <a:pPr marL="1200150" lvl="2" indent="-285750" fontAlgn="base">
+              <a:buFont typeface="Wingdings" panose="05000000000000000000" pitchFamily="2" charset="2"/>
+              <a:buChar char="ü"/>
+            </a:pPr>
+            <a:r>
+              <a:rPr lang="en-US" dirty="0"/>
+              <a:t>Put the results in charts</a:t>
+            </a:r>
+          </a:p>
+          <a:p>
+            <a:pPr marL="1200150" lvl="2" indent="-285750" fontAlgn="base">
+              <a:buFont typeface="Wingdings" panose="05000000000000000000" pitchFamily="2" charset="2"/>
+              <a:buChar char="ü"/>
+            </a:pPr>
+            <a:r>
+              <a:rPr lang="en-US" dirty="0"/>
+              <a:t>Based on 30% missing rule to conduct data cleansing</a:t>
+            </a:r>
+          </a:p>
+          <a:p>
+            <a:pPr marL="1200150" lvl="2" indent="-285750" fontAlgn="base">
+              <a:buFont typeface="Wingdings" panose="05000000000000000000" pitchFamily="2" charset="2"/>
+              <a:buChar char="ü"/>
+            </a:pPr>
+            <a:r>
+              <a:rPr lang="en-US" dirty="0"/>
+              <a:t>Save the cleaned data for the ML</a:t>
+            </a:r>
+          </a:p>
+          <a:p>
+            <a:pPr fontAlgn="base"/>
+            <a:endParaRPr lang="en-US" dirty="0"/>
+          </a:p>
+          <a:p>
+            <a:pPr marL="742950" lvl="1" indent="-285750">
+              <a:buFont typeface="Arial" panose="020B0604020202020204" pitchFamily="34" charset="0"/>
+              <a:buChar char="•"/>
+            </a:pPr>
+            <a:endParaRPr lang="en-US" dirty="0"/>
+          </a:p>
+          <a:p>
+            <a:pPr marL="742950" lvl="1" indent="-285750">
+              <a:buFont typeface="Arial" panose="020B0604020202020204" pitchFamily="34" charset="0"/>
+              <a:buChar char="•"/>
+            </a:pPr>
+            <a:endParaRPr lang="en-US" sz="2000" dirty="0"/>
+          </a:p>
+          <a:p>
+            <a:pPr lvl="1"/>
+            <a:endParaRPr lang="en-US" sz="2000" dirty="0"/>
+          </a:p>
+          <a:p>
+            <a:pPr marL="800100" lvl="1" indent="-342900">
+              <a:buFont typeface="Arial" panose="020B0604020202020204" pitchFamily="34" charset="0"/>
+              <a:buChar char="•"/>
+            </a:pPr>
+            <a:endParaRPr lang="en-US" sz="2000" dirty="0"/>
+          </a:p>
+          <a:p>
+            <a:pPr lvl="1"/>
+            <a:endParaRPr lang="en-US" sz="2000" dirty="0"/>
+          </a:p>
+          <a:p>
             <a:pPr marL="285750" indent="-285750">
               <a:buFont typeface="Arial" panose="020B0604020202020204" pitchFamily="34" charset="0"/>
               <a:buChar char="•"/>
             </a:pPr>
-            <a:r>
-              <a:rPr lang="en-US" sz="2000" dirty="0"/>
-              <a:t>Three entity types are generated</a:t>
-            </a:r>
-          </a:p>
-          <a:p>
-            <a:pPr marL="342900" indent="-342900">
-              <a:buFont typeface="Arial" panose="020B0604020202020204" pitchFamily="34" charset="0"/>
-              <a:buChar char="•"/>
-            </a:pPr>
-            <a:r>
-              <a:rPr lang="en-US" sz="2000" dirty="0"/>
-              <a:t>Very small datapoints, it is bit hard to get the t-SNE, but with those three parameters, can still show when more local for Perp =10, </a:t>
-            </a:r>
-            <a:r>
-              <a:rPr lang="en-US" sz="2000" dirty="0" err="1"/>
-              <a:t>lr</a:t>
-            </a:r>
-            <a:r>
-              <a:rPr lang="en-US" sz="2000" dirty="0"/>
-              <a:t>=200; broader for Perp =50, </a:t>
-            </a:r>
-            <a:r>
-              <a:rPr lang="en-US" sz="2000" dirty="0" err="1"/>
-              <a:t>lr</a:t>
-            </a:r>
-            <a:r>
-              <a:rPr lang="en-US" sz="2000" dirty="0"/>
-              <a:t>=500 and moderate for Perp =30, </a:t>
-            </a:r>
-            <a:r>
-              <a:rPr lang="en-US" sz="2000" dirty="0" err="1"/>
-              <a:t>lr</a:t>
-            </a:r>
-            <a:r>
-              <a:rPr lang="en-US" sz="2000" dirty="0"/>
-              <a:t>=Auto</a:t>
-            </a:r>
+            <a:endParaRPr lang="en-US" sz="2000" dirty="0"/>
+          </a:p>
+          <a:p>
+            <a:pPr marL="742950" lvl="1" indent="-285750">
+              <a:buFont typeface="Arial" panose="020B0604020202020204" pitchFamily="34" charset="0"/>
+              <a:buChar char="•"/>
+            </a:pPr>
+            <a:endParaRPr lang="en-US" sz="2000" dirty="0"/>
           </a:p>
           <a:p>
             <a:pPr marL="285750" indent="-285750">
               <a:buFont typeface="Arial" panose="020B0604020202020204" pitchFamily="34" charset="0"/>
               <a:buChar char="•"/>
             </a:pPr>
-            <a:endParaRPr lang="en-US" sz="2000" dirty="0"/>
-          </a:p>
-          <a:p>
-            <a:endParaRPr lang="en-US" sz="2000" dirty="0"/>
-          </a:p>
-        </p:txBody>
-      </p:sp>
-      <p:pic>
-        <p:nvPicPr>
-          <p:cNvPr id="4" name="Picture 3">
-            <a:extLst>
-              <a:ext uri="{FF2B5EF4-FFF2-40B4-BE49-F238E27FC236}">
-                <a16:creationId xmlns:a16="http://schemas.microsoft.com/office/drawing/2014/main" id="{3476D116-819C-2B14-D4EC-F901BC826293}"/>
-              </a:ext>
-            </a:extLst>
-          </p:cNvPr>
-          <p:cNvPicPr>
-            <a:picLocks noChangeAspect="1"/>
-          </p:cNvPicPr>
-          <p:nvPr/>
-        </p:nvPicPr>
-        <p:blipFill>
-          <a:blip r:embed="rId2"/>
-          <a:stretch>
-            <a:fillRect/>
-          </a:stretch>
-        </p:blipFill>
-        <p:spPr>
-          <a:xfrm>
-            <a:off x="368270" y="3134189"/>
-            <a:ext cx="8407458" cy="2475754"/>
-          </a:xfrm>
-          <a:prstGeom prst="rect">
-            <a:avLst/>
-          </a:prstGeom>
-        </p:spPr>
-      </p:pic>
+            <a:endParaRPr lang="en-US" dirty="0"/>
+          </a:p>
+        </p:txBody>
+      </p:sp>
     </p:spTree>
     <p:extLst>
       <p:ext uri="{BB962C8B-B14F-4D97-AF65-F5344CB8AC3E}">
-        <p14:creationId xmlns:p14="http://schemas.microsoft.com/office/powerpoint/2010/main" val="2341151501"/>
+        <p14:creationId xmlns:p14="http://schemas.microsoft.com/office/powerpoint/2010/main" val="3782805123"/>
       </p:ext>
     </p:extLst>
   </p:cSld>
@@ -3994,7 +3997,7 @@
         <p:cNvPr id="1" name="">
           <a:extLst>
             <a:ext uri="{FF2B5EF4-FFF2-40B4-BE49-F238E27FC236}">
-              <a16:creationId xmlns:a16="http://schemas.microsoft.com/office/drawing/2014/main" id="{B5C161CC-F5ED-CEA9-BD6B-EDAB1E1313F0}"/>
+              <a16:creationId xmlns:a16="http://schemas.microsoft.com/office/drawing/2014/main" id="{95FEAF69-7CF8-651F-B39F-F8BC5B208DB6}"/>
             </a:ext>
           </a:extLst>
         </p:cNvPr>
@@ -4014,7 +4017,7 @@
           <p:cNvPr id="2" name="Title 1">
             <a:extLst>
               <a:ext uri="{FF2B5EF4-FFF2-40B4-BE49-F238E27FC236}">
-                <a16:creationId xmlns:a16="http://schemas.microsoft.com/office/drawing/2014/main" id="{567EC713-7690-3D8F-4BD5-26DD02460CF2}"/>
+                <a16:creationId xmlns:a16="http://schemas.microsoft.com/office/drawing/2014/main" id="{E8B3E330-E40A-3C3A-BC80-8A25734943BB}"/>
               </a:ext>
             </a:extLst>
           </p:cNvPr>
@@ -4027,8 +4030,8 @@
         </p:nvSpPr>
         <p:spPr>
           <a:xfrm>
-            <a:off x="131887" y="327394"/>
-            <a:ext cx="8229600" cy="936810"/>
+            <a:off x="411172" y="46506"/>
+            <a:ext cx="8229600" cy="1099820"/>
           </a:xfrm>
         </p:spPr>
         <p:txBody>
@@ -4039,25 +4042,21 @@
           <a:p>
             <a:r>
               <a:rPr lang="en-US" sz="4000" dirty="0"/>
-              <a:t>Comparison between NLPs</a:t>
+              <a:t>Codes II</a:t>
             </a:r>
             <a:br>
               <a:rPr lang="en-US" sz="4000" dirty="0"/>
             </a:br>
-            <a:r>
-              <a:rPr lang="en-US" sz="3100" dirty="0"/>
-              <a:t>Dataset – build unified entity table</a:t>
-            </a:r>
             <a:endParaRPr sz="3100" dirty="0"/>
           </a:p>
         </p:txBody>
       </p:sp>
       <p:sp>
         <p:nvSpPr>
-          <p:cNvPr id="8" name="TextBox 7">
+          <p:cNvPr id="3" name="TextBox 2">
             <a:extLst>
               <a:ext uri="{FF2B5EF4-FFF2-40B4-BE49-F238E27FC236}">
-                <a16:creationId xmlns:a16="http://schemas.microsoft.com/office/drawing/2014/main" id="{D6B09B47-00C7-EBF6-E219-DD747D1520AF}"/>
+                <a16:creationId xmlns:a16="http://schemas.microsoft.com/office/drawing/2014/main" id="{07FC06B8-CDB7-F84D-BDF7-9C9039FE78E6}"/>
               </a:ext>
             </a:extLst>
           </p:cNvPr>
@@ -4066,8 +4065,8 @@
         </p:nvSpPr>
         <p:spPr>
           <a:xfrm>
-            <a:off x="368271" y="1411092"/>
-            <a:ext cx="8407457" cy="1323439"/>
+            <a:off x="1052820" y="835878"/>
+            <a:ext cx="7189393" cy="7509748"/>
           </a:xfrm>
           <a:prstGeom prst="rect">
             <a:avLst/>
@@ -4080,69 +4079,230 @@
           </a:bodyPr>
           <a:lstStyle/>
           <a:p>
+            <a:pPr marL="342900" indent="-342900" fontAlgn="base">
+              <a:buFont typeface="Arial" panose="020B0604020202020204" pitchFamily="34" charset="0"/>
+              <a:buChar char="•"/>
+            </a:pPr>
             <a:r>
               <a:rPr lang="en-US" sz="2000" dirty="0"/>
-              <a:t>Selected sample data from spacy, </a:t>
-            </a:r>
-            <a:r>
-              <a:rPr lang="en-US" sz="2000" dirty="0" err="1"/>
-              <a:t>scispacy</a:t>
-            </a:r>
-            <a:r>
-              <a:rPr lang="en-US" sz="2000" dirty="0"/>
+              <a:t>Simple logistical regression model (icu_mortality_logreg.py)</a:t>
+            </a:r>
+          </a:p>
+          <a:p>
+            <a:pPr marL="742950" lvl="1" indent="-285750" fontAlgn="base">
+              <a:buFont typeface="Wingdings" panose="05000000000000000000" pitchFamily="2" charset="2"/>
+              <a:buChar char="Ø"/>
+            </a:pPr>
+            <a:r>
+              <a:rPr lang="en-US" dirty="0"/>
+              <a:t>All features are used, original dataset</a:t>
+            </a:r>
+          </a:p>
+          <a:p>
+            <a:pPr marL="1200150" lvl="2" indent="-285750" fontAlgn="base">
+              <a:buFont typeface="Wingdings" panose="05000000000000000000" pitchFamily="2" charset="2"/>
+              <a:buChar char="ü"/>
+            </a:pPr>
+            <a:r>
+              <a:rPr lang="en-US" dirty="0"/>
+              <a:t>Even though there is high correlation between </a:t>
+            </a:r>
+            <a:r>
+              <a:rPr lang="en-US" dirty="0" err="1"/>
+              <a:t>heart_rate_max</a:t>
+            </a:r>
+            <a:r>
+              <a:rPr lang="en-US" dirty="0"/>
+              <a:t>, </a:t>
+            </a:r>
+            <a:r>
+              <a:rPr lang="en-US" dirty="0" err="1"/>
+              <a:t>heart_rate_min</a:t>
+            </a:r>
+            <a:r>
+              <a:rPr lang="en-US" dirty="0"/>
               <a:t> and </a:t>
             </a:r>
             <a:r>
-              <a:rPr lang="en-US" sz="2000" dirty="0" err="1"/>
-              <a:t>medspacy</a:t>
-            </a:r>
-            <a:r>
-              <a:rPr lang="en-US" sz="2000" dirty="0"/>
-              <a:t> and create one unified dataset and labeled with corresponding source</a:t>
-            </a:r>
-          </a:p>
-          <a:p>
+              <a:rPr lang="en-US" dirty="0" err="1"/>
+              <a:t>heart_rate_mean</a:t>
+            </a:r>
+            <a:r>
+              <a:rPr lang="en-US" dirty="0"/>
+              <a:t>, no action to remove any of them</a:t>
+            </a:r>
+          </a:p>
+          <a:p>
+            <a:pPr marL="742950" lvl="1" indent="-285750" fontAlgn="base">
+              <a:buFont typeface="Wingdings" panose="05000000000000000000" pitchFamily="2" charset="2"/>
+              <a:buChar char="Ø"/>
+            </a:pPr>
+            <a:r>
+              <a:rPr lang="en-US" dirty="0"/>
+              <a:t>Even though there is imbalance dataset between survive (o) and not survive(0), no action is taken</a:t>
+            </a:r>
+          </a:p>
+          <a:p>
+            <a:pPr marL="742950" lvl="1" indent="-285750" fontAlgn="base">
+              <a:buFont typeface="Wingdings" panose="05000000000000000000" pitchFamily="2" charset="2"/>
+              <a:buChar char="Ø"/>
+            </a:pPr>
+            <a:r>
+              <a:rPr lang="en-US" dirty="0"/>
+              <a:t>Key Parameters:</a:t>
+            </a:r>
+          </a:p>
+          <a:p>
+            <a:pPr marL="1200150" lvl="2" indent="-285750" fontAlgn="base">
+              <a:buFont typeface="Wingdings" panose="05000000000000000000" pitchFamily="2" charset="2"/>
+              <a:buChar char="ü"/>
+            </a:pPr>
+            <a:r>
+              <a:rPr lang="en-US" dirty="0"/>
+              <a:t>Test data size 0.2</a:t>
+            </a:r>
+          </a:p>
+          <a:p>
+            <a:pPr marL="1200150" lvl="2" indent="-285750" fontAlgn="base">
+              <a:buFont typeface="Wingdings" panose="05000000000000000000" pitchFamily="2" charset="2"/>
+              <a:buChar char="ü"/>
+            </a:pPr>
+            <a:r>
+              <a:rPr lang="en-US" dirty="0" err="1"/>
+              <a:t>Max_iter</a:t>
+            </a:r>
+            <a:r>
+              <a:rPr lang="en-US" dirty="0"/>
+              <a:t> =1000</a:t>
+            </a:r>
+          </a:p>
+          <a:p>
+            <a:pPr marL="1200150" lvl="2" indent="-285750" fontAlgn="base">
+              <a:buFont typeface="Wingdings" panose="05000000000000000000" pitchFamily="2" charset="2"/>
+              <a:buChar char="ü"/>
+            </a:pPr>
+            <a:r>
+              <a:rPr lang="en-US" dirty="0" err="1"/>
+              <a:t>Threhold</a:t>
+            </a:r>
+            <a:r>
+              <a:rPr lang="en-US" dirty="0"/>
+              <a:t> = 0.5</a:t>
+            </a:r>
+          </a:p>
+          <a:p>
+            <a:pPr marL="742950" lvl="1" indent="-285750" fontAlgn="base">
+              <a:buFont typeface="Wingdings" panose="05000000000000000000" pitchFamily="2" charset="2"/>
+              <a:buChar char="Ø"/>
+            </a:pPr>
+            <a:r>
+              <a:rPr lang="en-US" dirty="0"/>
+              <a:t>Key functions:</a:t>
+            </a:r>
+          </a:p>
+          <a:p>
+            <a:pPr marL="1200150" lvl="2" indent="-285750" fontAlgn="base">
+              <a:buFont typeface="Wingdings" panose="05000000000000000000" pitchFamily="2" charset="2"/>
+              <a:buChar char="Ø"/>
+            </a:pPr>
+            <a:r>
+              <a:rPr lang="en-US" dirty="0"/>
+              <a:t>Call the </a:t>
+            </a:r>
+            <a:r>
+              <a:rPr lang="en-US" dirty="0" err="1"/>
+              <a:t>logisticregression</a:t>
+            </a:r>
+            <a:r>
+              <a:rPr lang="en-US" dirty="0"/>
+              <a:t> model, train the model with </a:t>
+            </a:r>
+            <a:r>
+              <a:rPr lang="en-US" dirty="0" err="1"/>
+              <a:t>max_iter</a:t>
+            </a:r>
+            <a:r>
+              <a:rPr lang="en-US" dirty="0"/>
+              <a:t>, weight </a:t>
+            </a:r>
+          </a:p>
+          <a:p>
+            <a:pPr marL="1200150" lvl="2" indent="-285750" fontAlgn="base">
+              <a:buFont typeface="Wingdings" panose="05000000000000000000" pitchFamily="2" charset="2"/>
+              <a:buChar char="Ø"/>
+            </a:pPr>
+            <a:r>
+              <a:rPr lang="en-US" dirty="0"/>
+              <a:t>Generate accuracy, confusion matrix and classification report for </a:t>
+            </a:r>
+          </a:p>
+          <a:p>
+            <a:pPr marL="1200150" lvl="2" indent="-285750" fontAlgn="base">
+              <a:buFont typeface="Wingdings" panose="05000000000000000000" pitchFamily="2" charset="2"/>
+              <a:buChar char="ü"/>
+            </a:pPr>
+            <a:endParaRPr lang="en-US" dirty="0"/>
+          </a:p>
+          <a:p>
+            <a:pPr fontAlgn="base"/>
+            <a:endParaRPr lang="en-US" dirty="0"/>
+          </a:p>
+          <a:p>
+            <a:pPr marL="742950" lvl="1" indent="-285750">
+              <a:buFont typeface="Arial" panose="020B0604020202020204" pitchFamily="34" charset="0"/>
+              <a:buChar char="•"/>
+            </a:pPr>
+            <a:endParaRPr lang="en-US" dirty="0"/>
+          </a:p>
+          <a:p>
+            <a:pPr marL="742950" lvl="1" indent="-285750">
+              <a:buFont typeface="Arial" panose="020B0604020202020204" pitchFamily="34" charset="0"/>
+              <a:buChar char="•"/>
+            </a:pPr>
             <a:endParaRPr lang="en-US" sz="2000" dirty="0"/>
           </a:p>
           <a:p>
+            <a:pPr lvl="1"/>
             <a:endParaRPr lang="en-US" sz="2000" dirty="0"/>
           </a:p>
-        </p:txBody>
-      </p:sp>
-      <p:pic>
-        <p:nvPicPr>
-          <p:cNvPr id="5" name="Picture 4">
-            <a:extLst>
-              <a:ext uri="{FF2B5EF4-FFF2-40B4-BE49-F238E27FC236}">
-                <a16:creationId xmlns:a16="http://schemas.microsoft.com/office/drawing/2014/main" id="{677C5EC1-D508-11C5-AC93-D8458D69DE7B}"/>
-              </a:ext>
-            </a:extLst>
-          </p:cNvPr>
-          <p:cNvPicPr>
-            <a:picLocks noChangeAspect="1"/>
-          </p:cNvPicPr>
-          <p:nvPr/>
-        </p:nvPicPr>
-        <p:blipFill>
-          <a:blip r:embed="rId2"/>
-          <a:stretch>
-            <a:fillRect/>
-          </a:stretch>
-        </p:blipFill>
-        <p:spPr>
-          <a:xfrm>
-            <a:off x="409361" y="2374985"/>
-            <a:ext cx="8325278" cy="3152798"/>
-          </a:xfrm>
-          <a:prstGeom prst="rect">
-            <a:avLst/>
-          </a:prstGeom>
-        </p:spPr>
-      </p:pic>
+          <a:p>
+            <a:pPr marL="800100" lvl="1" indent="-342900">
+              <a:buFont typeface="Arial" panose="020B0604020202020204" pitchFamily="34" charset="0"/>
+              <a:buChar char="•"/>
+            </a:pPr>
+            <a:endParaRPr lang="en-US" sz="2000" dirty="0"/>
+          </a:p>
+          <a:p>
+            <a:pPr lvl="1"/>
+            <a:endParaRPr lang="en-US" sz="2000" dirty="0"/>
+          </a:p>
+          <a:p>
+            <a:pPr marL="285750" indent="-285750">
+              <a:buFont typeface="Arial" panose="020B0604020202020204" pitchFamily="34" charset="0"/>
+              <a:buChar char="•"/>
+            </a:pPr>
+            <a:endParaRPr lang="en-US" sz="2000" dirty="0"/>
+          </a:p>
+          <a:p>
+            <a:pPr marL="742950" lvl="1" indent="-285750">
+              <a:buFont typeface="Arial" panose="020B0604020202020204" pitchFamily="34" charset="0"/>
+              <a:buChar char="•"/>
+            </a:pPr>
+            <a:endParaRPr lang="en-US" sz="2000" dirty="0"/>
+          </a:p>
+          <a:p>
+            <a:pPr marL="285750" indent="-285750">
+              <a:buFont typeface="Arial" panose="020B0604020202020204" pitchFamily="34" charset="0"/>
+              <a:buChar char="•"/>
+            </a:pPr>
+            <a:endParaRPr lang="en-US" dirty="0"/>
+          </a:p>
+        </p:txBody>
+      </p:sp>
     </p:spTree>
     <p:extLst>
       <p:ext uri="{BB962C8B-B14F-4D97-AF65-F5344CB8AC3E}">
-        <p14:creationId xmlns:p14="http://schemas.microsoft.com/office/powerpoint/2010/main" val="2888935885"/>
+        <p14:creationId xmlns:p14="http://schemas.microsoft.com/office/powerpoint/2010/main" val="2896370817"/>
       </p:ext>
     </p:extLst>
   </p:cSld>
@@ -4160,7 +4320,7 @@
         <p:cNvPr id="1" name="">
           <a:extLst>
             <a:ext uri="{FF2B5EF4-FFF2-40B4-BE49-F238E27FC236}">
-              <a16:creationId xmlns:a16="http://schemas.microsoft.com/office/drawing/2014/main" id="{2C59DE3A-420B-6379-B4D4-555819D5955F}"/>
+              <a16:creationId xmlns:a16="http://schemas.microsoft.com/office/drawing/2014/main" id="{A0CEFAB7-C1A3-3262-B4E7-7ADCE093277B}"/>
             </a:ext>
           </a:extLst>
         </p:cNvPr>
@@ -4180,7 +4340,7 @@
           <p:cNvPr id="2" name="Title 1">
             <a:extLst>
               <a:ext uri="{FF2B5EF4-FFF2-40B4-BE49-F238E27FC236}">
-                <a16:creationId xmlns:a16="http://schemas.microsoft.com/office/drawing/2014/main" id="{97A81572-5120-4AB3-016A-452533F274CA}"/>
+                <a16:creationId xmlns:a16="http://schemas.microsoft.com/office/drawing/2014/main" id="{056AFA63-DBB7-EF02-9B50-4D3278B2E570}"/>
               </a:ext>
             </a:extLst>
           </p:cNvPr>
@@ -4193,8 +4353,8 @@
         </p:nvSpPr>
         <p:spPr>
           <a:xfrm>
-            <a:off x="131887" y="327394"/>
-            <a:ext cx="8229600" cy="936810"/>
+            <a:off x="411172" y="46506"/>
+            <a:ext cx="8229600" cy="1099820"/>
           </a:xfrm>
         </p:spPr>
         <p:txBody>
@@ -4205,25 +4365,21 @@
           <a:p>
             <a:r>
               <a:rPr lang="en-US" sz="4000" dirty="0"/>
-              <a:t>Comparison between NLPs</a:t>
+              <a:t>Codes III</a:t>
             </a:r>
             <a:br>
               <a:rPr lang="en-US" sz="4000" dirty="0"/>
             </a:br>
-            <a:r>
-              <a:rPr lang="en-US" sz="3100" dirty="0"/>
-              <a:t>t-SNE based on w2V</a:t>
-            </a:r>
             <a:endParaRPr sz="3100" dirty="0"/>
           </a:p>
         </p:txBody>
       </p:sp>
       <p:sp>
         <p:nvSpPr>
-          <p:cNvPr id="8" name="TextBox 7">
+          <p:cNvPr id="3" name="TextBox 2">
             <a:extLst>
               <a:ext uri="{FF2B5EF4-FFF2-40B4-BE49-F238E27FC236}">
-                <a16:creationId xmlns:a16="http://schemas.microsoft.com/office/drawing/2014/main" id="{5FA27527-9729-4497-5C56-30E8F16A4742}"/>
+                <a16:creationId xmlns:a16="http://schemas.microsoft.com/office/drawing/2014/main" id="{83CB4287-6E2D-883A-0933-D0B090C748A6}"/>
               </a:ext>
             </a:extLst>
           </p:cNvPr>
@@ -4232,8 +4388,8 @@
         </p:nvSpPr>
         <p:spPr>
           <a:xfrm>
-            <a:off x="368271" y="1411092"/>
-            <a:ext cx="8407457" cy="1631216"/>
+            <a:off x="1052820" y="835878"/>
+            <a:ext cx="7189393" cy="6678751"/>
           </a:xfrm>
           <a:prstGeom prst="rect">
             <a:avLst/>
@@ -4246,87 +4402,210 @@
           </a:bodyPr>
           <a:lstStyle/>
           <a:p>
-            <a:pPr marL="342900" indent="-342900">
+            <a:pPr marL="342900" indent="-342900" fontAlgn="base">
               <a:buFont typeface="Arial" panose="020B0604020202020204" pitchFamily="34" charset="0"/>
               <a:buChar char="•"/>
             </a:pPr>
             <a:r>
               <a:rPr lang="en-US" sz="2000" dirty="0"/>
-              <a:t>Legend is based on the NLPs</a:t>
-            </a:r>
-          </a:p>
-          <a:p>
-            <a:pPr marL="342900" indent="-342900">
-              <a:buFont typeface="Arial" panose="020B0604020202020204" pitchFamily="34" charset="0"/>
-              <a:buChar char="•"/>
-            </a:pPr>
-            <a:r>
-              <a:rPr lang="en-US" sz="2000" dirty="0"/>
-              <a:t>All mixed together</a:t>
-            </a:r>
-          </a:p>
-          <a:p>
-            <a:pPr marL="342900" indent="-342900">
-              <a:buFont typeface="Arial" panose="020B0604020202020204" pitchFamily="34" charset="0"/>
-              <a:buChar char="•"/>
-            </a:pPr>
-            <a:r>
-              <a:rPr lang="en-US" sz="2000" dirty="0"/>
-              <a:t>Parameter perp and </a:t>
-            </a:r>
-            <a:r>
-              <a:rPr lang="en-US" sz="2000" dirty="0" err="1"/>
-              <a:t>lr</a:t>
-            </a:r>
-            <a:r>
-              <a:rPr lang="en-US" sz="2000" dirty="0"/>
-              <a:t> changes shape only, but no impact to the point separation, strong </a:t>
-            </a:r>
-            <a:r>
-              <a:rPr lang="en-US" sz="2000" dirty="0" err="1"/>
-              <a:t>loverlap</a:t>
-            </a:r>
+              <a:t>Balanced model (icu_mortality_balanced_models.py)</a:t>
+            </a:r>
+          </a:p>
+          <a:p>
+            <a:pPr marL="742950" lvl="1" indent="-285750" fontAlgn="base">
+              <a:buFont typeface="Wingdings" panose="05000000000000000000" pitchFamily="2" charset="2"/>
+              <a:buChar char="Ø"/>
+            </a:pPr>
+            <a:r>
+              <a:rPr lang="en-US" dirty="0"/>
+              <a:t>Cleaned dataset</a:t>
+            </a:r>
+          </a:p>
+          <a:p>
+            <a:pPr marL="1200150" lvl="2" indent="-285750" fontAlgn="base">
+              <a:buFont typeface="Wingdings" panose="05000000000000000000" pitchFamily="2" charset="2"/>
+              <a:buChar char="ü"/>
+            </a:pPr>
+            <a:r>
+              <a:rPr lang="en-US" dirty="0" err="1"/>
+              <a:t>heart_rate_max</a:t>
+            </a:r>
+            <a:r>
+              <a:rPr lang="en-US" dirty="0"/>
+              <a:t>, </a:t>
+            </a:r>
+            <a:r>
+              <a:rPr lang="en-US" dirty="0" err="1"/>
+              <a:t>heart_rate_min</a:t>
+            </a:r>
+            <a:r>
+              <a:rPr lang="en-US" dirty="0"/>
+              <a:t> are dropped for ML training and test</a:t>
+            </a:r>
+          </a:p>
+          <a:p>
+            <a:pPr marL="742950" lvl="1" indent="-285750" fontAlgn="base">
+              <a:buFont typeface="Wingdings" panose="05000000000000000000" pitchFamily="2" charset="2"/>
+              <a:buChar char="Ø"/>
+            </a:pPr>
+            <a:r>
+              <a:rPr lang="en-US" dirty="0"/>
+              <a:t>imbalance dataset between survive (o) and not survive(0) is handled through </a:t>
+            </a:r>
+            <a:r>
+              <a:rPr lang="en-US" dirty="0" err="1"/>
+              <a:t>class_weight</a:t>
+            </a:r>
+            <a:endParaRPr lang="en-US" dirty="0"/>
+          </a:p>
+          <a:p>
+            <a:pPr marL="742950" lvl="1" indent="-285750" fontAlgn="base">
+              <a:buFont typeface="Wingdings" panose="05000000000000000000" pitchFamily="2" charset="2"/>
+              <a:buChar char="Ø"/>
+            </a:pPr>
+            <a:r>
+              <a:rPr lang="en-US" dirty="0"/>
+              <a:t>Key Parameters:</a:t>
+            </a:r>
+          </a:p>
+          <a:p>
+            <a:pPr marL="1200150" lvl="2" indent="-285750" fontAlgn="base">
+              <a:buFont typeface="Wingdings" panose="05000000000000000000" pitchFamily="2" charset="2"/>
+              <a:buChar char="ü"/>
+            </a:pPr>
+            <a:r>
+              <a:rPr lang="en-US" dirty="0"/>
+              <a:t>Test data size = 0.2</a:t>
+            </a:r>
+          </a:p>
+          <a:p>
+            <a:pPr marL="1200150" lvl="2" indent="-285750" fontAlgn="base">
+              <a:buFont typeface="Wingdings" panose="05000000000000000000" pitchFamily="2" charset="2"/>
+              <a:buChar char="ü"/>
+            </a:pPr>
+            <a:r>
+              <a:rPr lang="en-US" dirty="0" err="1"/>
+              <a:t>Max_iter</a:t>
+            </a:r>
+            <a:r>
+              <a:rPr lang="en-US" dirty="0"/>
+              <a:t> =1000</a:t>
+            </a:r>
+          </a:p>
+          <a:p>
+            <a:pPr marL="1200150" lvl="2" indent="-285750" fontAlgn="base">
+              <a:buFont typeface="Wingdings" panose="05000000000000000000" pitchFamily="2" charset="2"/>
+              <a:buChar char="ü"/>
+            </a:pPr>
+            <a:r>
+              <a:rPr lang="en-US" dirty="0" err="1"/>
+              <a:t>Threhold</a:t>
+            </a:r>
+            <a:r>
+              <a:rPr lang="en-US" dirty="0"/>
+              <a:t> = 0.5</a:t>
+            </a:r>
+          </a:p>
+          <a:p>
+            <a:pPr marL="1200150" lvl="2" indent="-285750" fontAlgn="base">
+              <a:buFont typeface="Wingdings" panose="05000000000000000000" pitchFamily="2" charset="2"/>
+              <a:buChar char="ü"/>
+            </a:pPr>
+            <a:r>
+              <a:rPr lang="en-US" dirty="0" err="1"/>
+              <a:t>Class_weight</a:t>
+            </a:r>
+            <a:r>
+              <a:rPr lang="en-US" dirty="0"/>
+              <a:t> = balanced</a:t>
+            </a:r>
+          </a:p>
+          <a:p>
+            <a:pPr marL="742950" lvl="1" indent="-285750" fontAlgn="base">
+              <a:buFont typeface="Wingdings" panose="05000000000000000000" pitchFamily="2" charset="2"/>
+              <a:buChar char="Ø"/>
+            </a:pPr>
+            <a:r>
+              <a:rPr lang="en-US" dirty="0"/>
+              <a:t>Key functions:</a:t>
+            </a:r>
+          </a:p>
+          <a:p>
+            <a:pPr marL="1200150" lvl="2" indent="-285750" fontAlgn="base">
+              <a:buFont typeface="Wingdings" panose="05000000000000000000" pitchFamily="2" charset="2"/>
+              <a:buChar char="Ø"/>
+            </a:pPr>
+            <a:r>
+              <a:rPr lang="en-US" dirty="0"/>
+              <a:t>Train the logistic regression and random forest model with the key parameters</a:t>
+            </a:r>
+          </a:p>
+          <a:p>
+            <a:pPr marL="1200150" lvl="2" indent="-285750" fontAlgn="base">
+              <a:buFont typeface="Wingdings" panose="05000000000000000000" pitchFamily="2" charset="2"/>
+              <a:buChar char="Ø"/>
+            </a:pPr>
+            <a:r>
+              <a:rPr lang="en-US" dirty="0"/>
+              <a:t>Generate accuracy, confusion matrix and classification reports</a:t>
+            </a:r>
+          </a:p>
+          <a:p>
+            <a:pPr marL="742950" lvl="1" indent="-285750">
+              <a:buFont typeface="Arial" panose="020B0604020202020204" pitchFamily="34" charset="0"/>
+              <a:buChar char="•"/>
+            </a:pPr>
+            <a:endParaRPr lang="en-US" dirty="0"/>
+          </a:p>
+          <a:p>
+            <a:pPr marL="742950" lvl="1" indent="-285750">
+              <a:buFont typeface="Arial" panose="020B0604020202020204" pitchFamily="34" charset="0"/>
+              <a:buChar char="•"/>
+            </a:pPr>
             <a:endParaRPr lang="en-US" sz="2000" dirty="0"/>
           </a:p>
           <a:p>
+            <a:pPr lvl="1"/>
             <a:endParaRPr lang="en-US" sz="2000" dirty="0"/>
           </a:p>
-        </p:txBody>
-      </p:sp>
-      <p:pic>
-        <p:nvPicPr>
-          <p:cNvPr id="4" name="Picture 3">
-            <a:extLst>
-              <a:ext uri="{FF2B5EF4-FFF2-40B4-BE49-F238E27FC236}">
-                <a16:creationId xmlns:a16="http://schemas.microsoft.com/office/drawing/2014/main" id="{0BE46D45-1701-7BFB-878F-90580B61F69C}"/>
-              </a:ext>
-            </a:extLst>
-          </p:cNvPr>
-          <p:cNvPicPr>
-            <a:picLocks noChangeAspect="1"/>
-          </p:cNvPicPr>
-          <p:nvPr/>
-        </p:nvPicPr>
-        <p:blipFill>
-          <a:blip r:embed="rId2"/>
-          <a:stretch>
-            <a:fillRect/>
-          </a:stretch>
-        </p:blipFill>
-        <p:spPr>
-          <a:xfrm>
-            <a:off x="49096" y="3068544"/>
-            <a:ext cx="9144000" cy="2819736"/>
-          </a:xfrm>
-          <a:prstGeom prst="rect">
-            <a:avLst/>
-          </a:prstGeom>
-        </p:spPr>
-      </p:pic>
+          <a:p>
+            <a:pPr marL="800100" lvl="1" indent="-342900">
+              <a:buFont typeface="Arial" panose="020B0604020202020204" pitchFamily="34" charset="0"/>
+              <a:buChar char="•"/>
+            </a:pPr>
+            <a:endParaRPr lang="en-US" sz="2000" dirty="0"/>
+          </a:p>
+          <a:p>
+            <a:pPr lvl="1"/>
+            <a:endParaRPr lang="en-US" sz="2000" dirty="0"/>
+          </a:p>
+          <a:p>
+            <a:pPr marL="285750" indent="-285750">
+              <a:buFont typeface="Arial" panose="020B0604020202020204" pitchFamily="34" charset="0"/>
+              <a:buChar char="•"/>
+            </a:pPr>
+            <a:endParaRPr lang="en-US" sz="2000" dirty="0"/>
+          </a:p>
+          <a:p>
+            <a:pPr marL="742950" lvl="1" indent="-285750">
+              <a:buFont typeface="Arial" panose="020B0604020202020204" pitchFamily="34" charset="0"/>
+              <a:buChar char="•"/>
+            </a:pPr>
+            <a:endParaRPr lang="en-US" sz="2000" dirty="0"/>
+          </a:p>
+          <a:p>
+            <a:pPr marL="285750" indent="-285750">
+              <a:buFont typeface="Arial" panose="020B0604020202020204" pitchFamily="34" charset="0"/>
+              <a:buChar char="•"/>
+            </a:pPr>
+            <a:endParaRPr lang="en-US" dirty="0"/>
+          </a:p>
+        </p:txBody>
+      </p:sp>
     </p:spTree>
     <p:extLst>
       <p:ext uri="{BB962C8B-B14F-4D97-AF65-F5344CB8AC3E}">
-        <p14:creationId xmlns:p14="http://schemas.microsoft.com/office/powerpoint/2010/main" val="3105816276"/>
+        <p14:creationId xmlns:p14="http://schemas.microsoft.com/office/powerpoint/2010/main" val="1383562621"/>
       </p:ext>
     </p:extLst>
   </p:cSld>
@@ -4344,7 +4623,7 @@
         <p:cNvPr id="1" name="">
           <a:extLst>
             <a:ext uri="{FF2B5EF4-FFF2-40B4-BE49-F238E27FC236}">
-              <a16:creationId xmlns:a16="http://schemas.microsoft.com/office/drawing/2014/main" id="{5A955C51-BAA8-B7B0-9912-DE563CE23A9E}"/>
+              <a16:creationId xmlns:a16="http://schemas.microsoft.com/office/drawing/2014/main" id="{F200927D-6E5E-5AD7-78CC-9470BC49C74A}"/>
             </a:ext>
           </a:extLst>
         </p:cNvPr>
@@ -4364,7 +4643,7 @@
           <p:cNvPr id="2" name="Title 1">
             <a:extLst>
               <a:ext uri="{FF2B5EF4-FFF2-40B4-BE49-F238E27FC236}">
-                <a16:creationId xmlns:a16="http://schemas.microsoft.com/office/drawing/2014/main" id="{10E5E2DE-6AD2-57BE-457B-58E38DBFE4C2}"/>
+                <a16:creationId xmlns:a16="http://schemas.microsoft.com/office/drawing/2014/main" id="{2A5A1437-807C-2487-8E95-A741C40E7A0A}"/>
               </a:ext>
             </a:extLst>
           </p:cNvPr>
@@ -4377,8 +4656,8 @@
         </p:nvSpPr>
         <p:spPr>
           <a:xfrm>
-            <a:off x="131887" y="327394"/>
-            <a:ext cx="8229600" cy="936810"/>
+            <a:off x="411172" y="46506"/>
+            <a:ext cx="8229600" cy="1099820"/>
           </a:xfrm>
         </p:spPr>
         <p:txBody>
@@ -4389,25 +4668,21 @@
           <a:p>
             <a:r>
               <a:rPr lang="en-US" sz="4000" dirty="0"/>
-              <a:t>Comparison between NLPs</a:t>
+              <a:t>Result Analysis (Evaluation) I</a:t>
             </a:r>
             <a:br>
               <a:rPr lang="en-US" sz="4000" dirty="0"/>
             </a:br>
-            <a:r>
-              <a:rPr lang="en-US" sz="3100" dirty="0"/>
-              <a:t>UMAP</a:t>
-            </a:r>
             <a:endParaRPr sz="3100" dirty="0"/>
           </a:p>
         </p:txBody>
       </p:sp>
       <p:sp>
         <p:nvSpPr>
-          <p:cNvPr id="8" name="TextBox 7">
+          <p:cNvPr id="3" name="TextBox 2">
             <a:extLst>
               <a:ext uri="{FF2B5EF4-FFF2-40B4-BE49-F238E27FC236}">
-                <a16:creationId xmlns:a16="http://schemas.microsoft.com/office/drawing/2014/main" id="{C6204839-78F4-E929-BFC7-8A1EF57F4CDB}"/>
+                <a16:creationId xmlns:a16="http://schemas.microsoft.com/office/drawing/2014/main" id="{39993CF5-D1D3-18DA-E29E-DA3A25F5A388}"/>
               </a:ext>
             </a:extLst>
           </p:cNvPr>
@@ -4416,8 +4691,8 @@
         </p:nvSpPr>
         <p:spPr>
           <a:xfrm>
-            <a:off x="368271" y="1411092"/>
-            <a:ext cx="8407457" cy="707886"/>
+            <a:off x="1052820" y="835878"/>
+            <a:ext cx="7189393" cy="3908762"/>
           </a:xfrm>
           <a:prstGeom prst="rect">
             <a:avLst/>
@@ -4430,33 +4705,97 @@
           </a:bodyPr>
           <a:lstStyle/>
           <a:p>
-            <a:pPr marL="342900" indent="-342900">
+            <a:pPr marL="342900" indent="-342900" fontAlgn="base">
               <a:buFont typeface="Arial" panose="020B0604020202020204" pitchFamily="34" charset="0"/>
               <a:buChar char="•"/>
             </a:pPr>
             <a:r>
               <a:rPr lang="en-US" sz="2000" dirty="0"/>
-              <a:t>UMAP produces a high-density core and low-density perimeter</a:t>
-            </a:r>
-          </a:p>
-          <a:p>
-            <a:pPr marL="342900" indent="-342900">
-              <a:buFont typeface="Arial" panose="020B0604020202020204" pitchFamily="34" charset="0"/>
-              <a:buChar char="•"/>
-            </a:pPr>
-            <a:r>
-              <a:rPr lang="en-US" sz="2000" dirty="0"/>
-              <a:t>Show similarity extraction between those NLPs</a:t>
-            </a:r>
+              <a:t>Simple logistical regression model (icu_mortality_logreg.py)</a:t>
+            </a:r>
+          </a:p>
+          <a:p>
+            <a:pPr marL="742950" lvl="1" indent="-285750" fontAlgn="base">
+              <a:buFont typeface="Wingdings" panose="05000000000000000000" pitchFamily="2" charset="2"/>
+              <a:buChar char="Ø"/>
+            </a:pPr>
+            <a:r>
+              <a:rPr lang="en-US" dirty="0"/>
+              <a:t>Accuracy: 76.7%</a:t>
+            </a:r>
+          </a:p>
+          <a:p>
+            <a:pPr marL="742950" lvl="1" indent="-285750" fontAlgn="base">
+              <a:buFont typeface="Wingdings" panose="05000000000000000000" pitchFamily="2" charset="2"/>
+              <a:buChar char="Ø"/>
+            </a:pPr>
+            <a:r>
+              <a:rPr lang="en-US" dirty="0"/>
+              <a:t>Confusion Matrix: we can see the survivor prediction is high, but the non survivor prediction is poor. </a:t>
+            </a:r>
+          </a:p>
+          <a:p>
+            <a:pPr fontAlgn="base"/>
+            <a:endParaRPr lang="en-US" dirty="0"/>
+          </a:p>
+          <a:p>
+            <a:pPr marL="742950" lvl="1" indent="-285750">
+              <a:buFont typeface="Arial" panose="020B0604020202020204" pitchFamily="34" charset="0"/>
+              <a:buChar char="•"/>
+            </a:pPr>
+            <a:endParaRPr lang="en-US" dirty="0"/>
+          </a:p>
+          <a:p>
+            <a:pPr marL="742950" lvl="1" indent="-285750">
+              <a:buFont typeface="Arial" panose="020B0604020202020204" pitchFamily="34" charset="0"/>
+              <a:buChar char="•"/>
+            </a:pPr>
+            <a:endParaRPr lang="en-US" sz="2000" dirty="0"/>
+          </a:p>
+          <a:p>
+            <a:pPr lvl="1"/>
+            <a:endParaRPr lang="en-US" sz="2000" dirty="0"/>
+          </a:p>
+          <a:p>
+            <a:pPr marL="800100" lvl="1" indent="-342900">
+              <a:buFont typeface="Arial" panose="020B0604020202020204" pitchFamily="34" charset="0"/>
+              <a:buChar char="•"/>
+            </a:pPr>
+            <a:endParaRPr lang="en-US" sz="2000" dirty="0"/>
+          </a:p>
+          <a:p>
+            <a:pPr lvl="1"/>
+            <a:endParaRPr lang="en-US" sz="2000" dirty="0"/>
+          </a:p>
+          <a:p>
+            <a:pPr marL="285750" indent="-285750">
+              <a:buFont typeface="Arial" panose="020B0604020202020204" pitchFamily="34" charset="0"/>
+              <a:buChar char="•"/>
+            </a:pPr>
+            <a:endParaRPr lang="en-US" sz="2000" dirty="0"/>
+          </a:p>
+          <a:p>
+            <a:pPr marL="742950" lvl="1" indent="-285750">
+              <a:buFont typeface="Arial" panose="020B0604020202020204" pitchFamily="34" charset="0"/>
+              <a:buChar char="•"/>
+            </a:pPr>
+            <a:endParaRPr lang="en-US" sz="2000" dirty="0"/>
+          </a:p>
+          <a:p>
+            <a:pPr marL="285750" indent="-285750">
+              <a:buFont typeface="Arial" panose="020B0604020202020204" pitchFamily="34" charset="0"/>
+              <a:buChar char="•"/>
+            </a:pPr>
+            <a:endParaRPr lang="en-US" dirty="0"/>
           </a:p>
         </p:txBody>
       </p:sp>
       <p:pic>
         <p:nvPicPr>
-          <p:cNvPr id="5" name="Picture 4">
+          <p:cNvPr id="7" name="Picture 6">
             <a:extLst>
               <a:ext uri="{FF2B5EF4-FFF2-40B4-BE49-F238E27FC236}">
-                <a16:creationId xmlns:a16="http://schemas.microsoft.com/office/drawing/2014/main" id="{909BC4CF-202F-2F3F-1FC4-2E4B587C9014}"/>
+                <a16:creationId xmlns:a16="http://schemas.microsoft.com/office/drawing/2014/main" id="{18CB4844-EEA8-214D-1BF2-03714E554762}"/>
               </a:ext>
             </a:extLst>
           </p:cNvPr>
@@ -4473,8 +4812,8 @@
         </p:blipFill>
         <p:spPr>
           <a:xfrm>
-            <a:off x="715270" y="2317611"/>
-            <a:ext cx="5467350" cy="4058641"/>
+            <a:off x="2140225" y="2071224"/>
+            <a:ext cx="2756984" cy="2386834"/>
           </a:xfrm>
           <a:prstGeom prst="rect">
             <a:avLst/>
@@ -4484,7 +4823,7 @@
     </p:spTree>
     <p:extLst>
       <p:ext uri="{BB962C8B-B14F-4D97-AF65-F5344CB8AC3E}">
-        <p14:creationId xmlns:p14="http://schemas.microsoft.com/office/powerpoint/2010/main" val="153137759"/>
+        <p14:creationId xmlns:p14="http://schemas.microsoft.com/office/powerpoint/2010/main" val="1129635008"/>
       </p:ext>
     </p:extLst>
   </p:cSld>
@@ -4502,7 +4841,7 @@
         <p:cNvPr id="1" name="">
           <a:extLst>
             <a:ext uri="{FF2B5EF4-FFF2-40B4-BE49-F238E27FC236}">
-              <a16:creationId xmlns:a16="http://schemas.microsoft.com/office/drawing/2014/main" id="{9343533A-F5ED-82BF-A727-3DDC2E400434}"/>
+              <a16:creationId xmlns:a16="http://schemas.microsoft.com/office/drawing/2014/main" id="{CA0B3AE0-148C-C105-BA51-180B7645D53D}"/>
             </a:ext>
           </a:extLst>
         </p:cNvPr>
@@ -4522,7 +4861,7 @@
           <p:cNvPr id="2" name="Title 1">
             <a:extLst>
               <a:ext uri="{FF2B5EF4-FFF2-40B4-BE49-F238E27FC236}">
-                <a16:creationId xmlns:a16="http://schemas.microsoft.com/office/drawing/2014/main" id="{C96A3761-B67C-2C26-81F2-AB6827A41FD6}"/>
+                <a16:creationId xmlns:a16="http://schemas.microsoft.com/office/drawing/2014/main" id="{B08AC1DE-40A1-F048-4B05-506A83B8F16B}"/>
               </a:ext>
             </a:extLst>
           </p:cNvPr>
@@ -4535,30 +4874,33 @@
         </p:nvSpPr>
         <p:spPr>
           <a:xfrm>
-            <a:off x="131887" y="327394"/>
-            <a:ext cx="8229600" cy="936810"/>
+            <a:off x="411172" y="46506"/>
+            <a:ext cx="8229600" cy="1099820"/>
           </a:xfrm>
         </p:spPr>
         <p:txBody>
           <a:bodyPr>
-            <a:normAutofit/>
+            <a:normAutofit fontScale="90000"/>
           </a:bodyPr>
           <a:lstStyle/>
           <a:p>
             <a:r>
-              <a:rPr lang="en-US" sz="4000" dirty="0" err="1"/>
-              <a:t>ClinicalBERT</a:t>
-            </a:r>
+              <a:rPr lang="en-US" sz="4000" dirty="0"/>
+              <a:t>Result Analysis (Evaluation) II</a:t>
+            </a:r>
+            <a:br>
+              <a:rPr lang="en-US" sz="4000" dirty="0"/>
+            </a:br>
             <a:endParaRPr sz="3100" dirty="0"/>
           </a:p>
         </p:txBody>
       </p:sp>
       <p:sp>
         <p:nvSpPr>
-          <p:cNvPr id="8" name="TextBox 7">
+          <p:cNvPr id="3" name="TextBox 2">
             <a:extLst>
               <a:ext uri="{FF2B5EF4-FFF2-40B4-BE49-F238E27FC236}">
-                <a16:creationId xmlns:a16="http://schemas.microsoft.com/office/drawing/2014/main" id="{BF3BB3D6-3F98-E03F-9343-C36D25766D04}"/>
+                <a16:creationId xmlns:a16="http://schemas.microsoft.com/office/drawing/2014/main" id="{36AF432D-6247-3B3F-F7F7-10084B2F23A5}"/>
               </a:ext>
             </a:extLst>
           </p:cNvPr>
@@ -4567,8 +4909,8 @@
         </p:nvSpPr>
         <p:spPr>
           <a:xfrm>
-            <a:off x="368271" y="1103683"/>
-            <a:ext cx="8407457" cy="2862322"/>
+            <a:off x="1052820" y="841953"/>
+            <a:ext cx="7189393" cy="5047536"/>
           </a:xfrm>
           <a:prstGeom prst="rect">
             <a:avLst/>
@@ -4581,100 +4923,462 @@
           </a:bodyPr>
           <a:lstStyle/>
           <a:p>
-            <a:pPr marL="342900" indent="-342900">
-              <a:lnSpc>
-                <a:spcPct val="150000"/>
-              </a:lnSpc>
+            <a:pPr marL="342900" indent="-342900" fontAlgn="base">
               <a:buFont typeface="Arial" panose="020B0604020202020204" pitchFamily="34" charset="0"/>
               <a:buChar char="•"/>
             </a:pPr>
             <a:r>
               <a:rPr lang="en-US" sz="2000" dirty="0"/>
-              <a:t>Model: </a:t>
-            </a:r>
-            <a:r>
-              <a:rPr lang="en-US" sz="2000" dirty="0" err="1"/>
-              <a:t>emilyalsentzer</a:t>
-            </a:r>
+              <a:t>Simple logistical regression model (icu_mortality_logreg.py)</a:t>
+            </a:r>
+          </a:p>
+          <a:p>
+            <a:pPr marL="742950" lvl="1" indent="-285750" fontAlgn="base">
+              <a:buFont typeface="Wingdings" panose="05000000000000000000" pitchFamily="2" charset="2"/>
+              <a:buChar char="Ø"/>
+            </a:pPr>
+            <a:r>
+              <a:rPr lang="en-US" dirty="0"/>
+              <a:t>Detail classification Results:</a:t>
+            </a:r>
+          </a:p>
+          <a:p>
+            <a:pPr marL="1200150" lvl="2" indent="-285750" fontAlgn="base">
+              <a:buFont typeface="Wingdings" panose="05000000000000000000" pitchFamily="2" charset="2"/>
+              <a:buChar char="ü"/>
+            </a:pPr>
+            <a:r>
+              <a:rPr lang="en-US" dirty="0"/>
+              <a:t>For survivor (0):  works well </a:t>
+            </a:r>
+          </a:p>
+          <a:p>
+            <a:pPr marL="1657350" lvl="3" indent="-285750" fontAlgn="base">
+              <a:buFont typeface="Wingdings" panose="05000000000000000000" pitchFamily="2" charset="2"/>
+              <a:buChar char="v"/>
+            </a:pPr>
+            <a:r>
+              <a:rPr lang="en-US" sz="1600" dirty="0"/>
+              <a:t>of all predictions, 77% were correct</a:t>
+            </a:r>
+          </a:p>
+          <a:p>
+            <a:pPr marL="1657350" lvl="3" indent="-285750" fontAlgn="base">
+              <a:buFont typeface="Wingdings" panose="05000000000000000000" pitchFamily="2" charset="2"/>
+              <a:buChar char="v"/>
+            </a:pPr>
+            <a:r>
+              <a:rPr lang="en-US" sz="1600" dirty="0"/>
+              <a:t>Of all actual class, 99.6% were correctly identified</a:t>
+            </a:r>
+          </a:p>
+          <a:p>
+            <a:pPr marL="1657350" lvl="3" indent="-285750" fontAlgn="base">
+              <a:buFont typeface="Wingdings" panose="05000000000000000000" pitchFamily="2" charset="2"/>
+              <a:buChar char="v"/>
+            </a:pPr>
+            <a:r>
+              <a:rPr lang="en-US" sz="1600" dirty="0"/>
+              <a:t>Harmonic mean of precision and recall is 87%</a:t>
+            </a:r>
+          </a:p>
+          <a:p>
+            <a:pPr marL="1657350" lvl="3" indent="-285750" fontAlgn="base">
+              <a:buFont typeface="Wingdings" panose="05000000000000000000" pitchFamily="2" charset="2"/>
+              <a:buChar char="v"/>
+            </a:pPr>
+            <a:r>
+              <a:rPr lang="en-US" sz="1600" dirty="0"/>
+              <a:t>2297 number of true samples</a:t>
+            </a:r>
+          </a:p>
+          <a:p>
+            <a:pPr marL="1257300" lvl="2" indent="-342900">
+              <a:buFont typeface="Wingdings" panose="05000000000000000000" pitchFamily="2" charset="2"/>
+              <a:buChar char="ü"/>
+            </a:pPr>
             <a:r>
               <a:rPr lang="en-US" sz="2000" dirty="0"/>
-              <a:t>/</a:t>
-            </a:r>
-            <a:r>
-              <a:rPr lang="en-US" sz="2000" dirty="0" err="1"/>
-              <a:t>Bio_ClinicalBERT</a:t>
-            </a:r>
+              <a:t>   For non survivor (1):  works poor</a:t>
+            </a:r>
+          </a:p>
+          <a:p>
+            <a:pPr marL="1657350" lvl="3" indent="-285750" fontAlgn="base">
+              <a:buFont typeface="Wingdings" panose="05000000000000000000" pitchFamily="2" charset="2"/>
+              <a:buChar char="v"/>
+            </a:pPr>
+            <a:r>
+              <a:rPr lang="en-US" sz="1600" dirty="0"/>
+              <a:t>of all predictions, 57% were correct</a:t>
+            </a:r>
+          </a:p>
+          <a:p>
+            <a:pPr marL="1657350" lvl="3" indent="-285750" fontAlgn="base">
+              <a:buFont typeface="Wingdings" panose="05000000000000000000" pitchFamily="2" charset="2"/>
+              <a:buChar char="v"/>
+            </a:pPr>
+            <a:r>
+              <a:rPr lang="en-US" sz="1600" dirty="0"/>
+              <a:t>Of all actual class, 1.7% were correctly identified</a:t>
+            </a:r>
+          </a:p>
+          <a:p>
+            <a:pPr marL="1657350" lvl="3" indent="-285750" fontAlgn="base">
+              <a:buFont typeface="Wingdings" panose="05000000000000000000" pitchFamily="2" charset="2"/>
+              <a:buChar char="v"/>
+            </a:pPr>
+            <a:r>
+              <a:rPr lang="en-US" sz="1600" dirty="0"/>
+              <a:t>Harmonic mean of precision and recall is 3%</a:t>
+            </a:r>
+          </a:p>
+          <a:p>
+            <a:pPr marL="1657350" lvl="3" indent="-285750" fontAlgn="base">
+              <a:buFont typeface="Wingdings" panose="05000000000000000000" pitchFamily="2" charset="2"/>
+              <a:buChar char="v"/>
+            </a:pPr>
+            <a:r>
+              <a:rPr lang="en-US" sz="1600" dirty="0"/>
+              <a:t>703 number of true samples</a:t>
+            </a:r>
+          </a:p>
+          <a:p>
+            <a:pPr marL="1257300" lvl="2" indent="-342900">
+              <a:buFont typeface="Wingdings" panose="05000000000000000000" pitchFamily="2" charset="2"/>
+              <a:buChar char="ü"/>
+            </a:pPr>
             <a:endParaRPr lang="en-US" sz="2000" dirty="0"/>
           </a:p>
           <a:p>
-            <a:pPr marL="342900" indent="-342900">
-              <a:lnSpc>
-                <a:spcPct val="150000"/>
-              </a:lnSpc>
-              <a:buFont typeface="Arial" panose="020B0604020202020204" pitchFamily="34" charset="0"/>
-              <a:buChar char="•"/>
-            </a:pPr>
-            <a:r>
-              <a:rPr lang="en-US" sz="2000" dirty="0" err="1"/>
-              <a:t>ClinicalBERT</a:t>
-            </a:r>
-            <a:r>
-              <a:rPr lang="en-US" sz="2000" dirty="0"/>
-              <a:t> Embedding K-mean cluster</a:t>
-            </a:r>
+            <a:pPr marL="1257300" lvl="2" indent="-342900">
+              <a:buFont typeface="Wingdings" panose="05000000000000000000" pitchFamily="2" charset="2"/>
+              <a:buChar char="ü"/>
+            </a:pPr>
+            <a:endParaRPr lang="en-US" sz="2000" dirty="0"/>
           </a:p>
           <a:p>
             <a:pPr marL="800100" lvl="1" indent="-342900">
               <a:buFont typeface="Arial" panose="020B0604020202020204" pitchFamily="34" charset="0"/>
               <a:buChar char="•"/>
             </a:pPr>
-            <a:r>
-              <a:rPr lang="en-US" sz="2000" dirty="0"/>
-              <a:t>Most coherent cluster: red (3)</a:t>
-            </a:r>
-          </a:p>
-          <a:p>
-            <a:pPr marL="800100" lvl="1" indent="-342900">
-              <a:buFont typeface="Arial" panose="020B0604020202020204" pitchFamily="34" charset="0"/>
-              <a:buChar char="•"/>
-            </a:pPr>
-            <a:r>
-              <a:rPr lang="en-US" sz="2000" dirty="0"/>
-              <a:t>Green one spread out the most (2)</a:t>
-            </a:r>
-          </a:p>
-          <a:p>
-            <a:pPr marL="800100" lvl="1" indent="-342900">
-              <a:buFont typeface="Arial" panose="020B0604020202020204" pitchFamily="34" charset="0"/>
-              <a:buChar char="•"/>
-            </a:pPr>
-            <a:r>
-              <a:rPr lang="en-US" sz="2000" dirty="0"/>
-              <a:t>Purple one is the smallest one near the edge (4) – maybe represent rare case</a:t>
-            </a:r>
-          </a:p>
-          <a:p>
-            <a:pPr marL="800100" lvl="1" indent="-342900">
-              <a:buFont typeface="Arial" panose="020B0604020202020204" pitchFamily="34" charset="0"/>
-              <a:buChar char="•"/>
-            </a:pPr>
             <a:endParaRPr lang="en-US" sz="2000" dirty="0"/>
           </a:p>
           <a:p>
-            <a:pPr marL="342900" indent="-342900">
-              <a:buFont typeface="Arial" panose="020B0604020202020204" pitchFamily="34" charset="0"/>
-              <a:buChar char="•"/>
-            </a:pPr>
+            <a:pPr lvl="1"/>
             <a:endParaRPr lang="en-US" sz="2000" dirty="0"/>
           </a:p>
-        </p:txBody>
-      </p:sp>
+          <a:p>
+            <a:pPr marL="742950" lvl="1" indent="-285750">
+              <a:buFont typeface="Arial" panose="020B0604020202020204" pitchFamily="34" charset="0"/>
+              <a:buChar char="•"/>
+            </a:pPr>
+            <a:endParaRPr lang="en-US" sz="2000" dirty="0"/>
+          </a:p>
+          <a:p>
+            <a:pPr marL="285750" indent="-285750">
+              <a:buFont typeface="Arial" panose="020B0604020202020204" pitchFamily="34" charset="0"/>
+              <a:buChar char="•"/>
+            </a:pPr>
+            <a:endParaRPr lang="en-US" dirty="0"/>
+          </a:p>
+        </p:txBody>
+      </p:sp>
+      <p:graphicFrame>
+        <p:nvGraphicFramePr>
+          <p:cNvPr id="6" name="Object 5">
+            <a:extLst>
+              <a:ext uri="{FF2B5EF4-FFF2-40B4-BE49-F238E27FC236}">
+                <a16:creationId xmlns:a16="http://schemas.microsoft.com/office/drawing/2014/main" id="{048532FC-C1D5-72ED-3E48-AD69418AE546}"/>
+              </a:ext>
+            </a:extLst>
+          </p:cNvPr>
+          <p:cNvGraphicFramePr>
+            <a:graphicFrameLocks noChangeAspect="1"/>
+          </p:cNvGraphicFramePr>
+          <p:nvPr>
+            <p:extLst>
+              <p:ext uri="{D42A27DB-BD31-4B8C-83A1-F6EECF244321}">
+                <p14:modId xmlns:p14="http://schemas.microsoft.com/office/powerpoint/2010/main" val="573881777"/>
+              </p:ext>
+            </p:extLst>
+          </p:nvPr>
+        </p:nvGraphicFramePr>
+        <p:xfrm>
+          <a:off x="5671930" y="5786236"/>
+          <a:ext cx="1174750" cy="527050"/>
+        </p:xfrm>
+        <a:graphic>
+          <a:graphicData uri="http://schemas.openxmlformats.org/presentationml/2006/ole">
+            <mc:AlternateContent xmlns:mc="http://schemas.openxmlformats.org/markup-compatibility/2006">
+              <mc:Choice xmlns:v="urn:schemas-microsoft-com:vml" Requires="v">
+                <p:oleObj name="Packager Shell Object" showAsIcon="1" r:id="rId2" imgW="1174780" imgH="526902" progId="Package">
+                  <p:embed/>
+                </p:oleObj>
+              </mc:Choice>
+              <mc:Fallback>
+                <p:oleObj name="Packager Shell Object" showAsIcon="1" r:id="rId2" imgW="1174780" imgH="526902" progId="Package">
+                  <p:embed/>
+                  <p:pic>
+                    <p:nvPicPr>
+                      <p:cNvPr id="0" name=""/>
+                      <p:cNvPicPr/>
+                      <p:nvPr/>
+                    </p:nvPicPr>
+                    <p:blipFill>
+                      <a:blip r:embed="rId3"/>
+                      <a:stretch>
+                        <a:fillRect/>
+                      </a:stretch>
+                    </p:blipFill>
+                    <p:spPr>
+                      <a:xfrm>
+                        <a:off x="5671930" y="5786236"/>
+                        <a:ext cx="1174750" cy="527050"/>
+                      </a:xfrm>
+                      <a:prstGeom prst="rect">
+                        <a:avLst/>
+                      </a:prstGeom>
+                    </p:spPr>
+                  </p:pic>
+                </p:oleObj>
+              </mc:Fallback>
+            </mc:AlternateContent>
+          </a:graphicData>
+        </a:graphic>
+      </p:graphicFrame>
       <p:pic>
         <p:nvPicPr>
-          <p:cNvPr id="4" name="Picture 3">
+          <p:cNvPr id="11" name="Picture 10">
             <a:extLst>
               <a:ext uri="{FF2B5EF4-FFF2-40B4-BE49-F238E27FC236}">
-                <a16:creationId xmlns:a16="http://schemas.microsoft.com/office/drawing/2014/main" id="{4CB33913-65B9-02E1-FB65-385C7D9F48BF}"/>
+                <a16:creationId xmlns:a16="http://schemas.microsoft.com/office/drawing/2014/main" id="{5AAF3130-D09C-2999-E329-8569D9ECE9B6}"/>
+              </a:ext>
+            </a:extLst>
+          </p:cNvPr>
+          <p:cNvPicPr>
+            <a:picLocks noChangeAspect="1"/>
+          </p:cNvPicPr>
+          <p:nvPr/>
+        </p:nvPicPr>
+        <p:blipFill>
+          <a:blip r:embed="rId4"/>
+          <a:stretch>
+            <a:fillRect/>
+          </a:stretch>
+        </p:blipFill>
+        <p:spPr>
+          <a:xfrm>
+            <a:off x="6924119" y="3139377"/>
+            <a:ext cx="1959742" cy="3070655"/>
+          </a:xfrm>
+          <a:prstGeom prst="rect">
+            <a:avLst/>
+          </a:prstGeom>
+        </p:spPr>
+      </p:pic>
+      <p:sp>
+        <p:nvSpPr>
+          <p:cNvPr id="13" name="TextBox 12">
+            <a:extLst>
+              <a:ext uri="{FF2B5EF4-FFF2-40B4-BE49-F238E27FC236}">
+                <a16:creationId xmlns:a16="http://schemas.microsoft.com/office/drawing/2014/main" id="{C3A3459E-1F8D-C1E4-6F67-3B217FA4DF4A}"/>
+              </a:ext>
+            </a:extLst>
+          </p:cNvPr>
+          <p:cNvSpPr txBox="1"/>
+          <p:nvPr/>
+        </p:nvSpPr>
+        <p:spPr>
+          <a:xfrm>
+            <a:off x="1099930" y="4149437"/>
+            <a:ext cx="4572000" cy="1200329"/>
+          </a:xfrm>
+          <a:prstGeom prst="rect">
+            <a:avLst/>
+          </a:prstGeom>
+          <a:noFill/>
+        </p:spPr>
+        <p:txBody>
+          <a:bodyPr wrap="square">
+            <a:spAutoFit/>
+          </a:bodyPr>
+          <a:lstStyle/>
+          <a:p>
+            <a:pPr marL="742950" lvl="1" indent="-285750" fontAlgn="base">
+              <a:buFont typeface="Wingdings" panose="05000000000000000000" pitchFamily="2" charset="2"/>
+              <a:buChar char="Ø"/>
+            </a:pPr>
+            <a:r>
+              <a:rPr lang="en-US" dirty="0"/>
+              <a:t>Conclusion: this simple model is very good at identify class 0 but poorly at identify class 1, suggest imbalance class may contribute to the model bias</a:t>
+            </a:r>
+          </a:p>
+        </p:txBody>
+      </p:sp>
+    </p:spTree>
+    <p:extLst>
+      <p:ext uri="{BB962C8B-B14F-4D97-AF65-F5344CB8AC3E}">
+        <p14:creationId xmlns:p14="http://schemas.microsoft.com/office/powerpoint/2010/main" val="1129343592"/>
+      </p:ext>
+    </p:extLst>
+  </p:cSld>
+  <p:clrMapOvr>
+    <a:masterClrMapping/>
+  </p:clrMapOvr>
+</p:sld>
+</file>
+
+<file path=ppt/slides/slide15.xml><?xml version="1.0" encoding="utf-8"?>
+<p:sld xmlns:a="http://schemas.openxmlformats.org/drawingml/2006/main" xmlns:r="http://schemas.openxmlformats.org/officeDocument/2006/relationships" xmlns:p="http://schemas.openxmlformats.org/presentationml/2006/main">
+  <p:cSld>
+    <p:spTree>
+      <p:nvGrpSpPr>
+        <p:cNvPr id="1" name="">
+          <a:extLst>
+            <a:ext uri="{FF2B5EF4-FFF2-40B4-BE49-F238E27FC236}">
+              <a16:creationId xmlns:a16="http://schemas.microsoft.com/office/drawing/2014/main" id="{9F6D7F14-3742-E58D-49BE-4C46B092E1B7}"/>
+            </a:ext>
+          </a:extLst>
+        </p:cNvPr>
+        <p:cNvGrpSpPr/>
+        <p:nvPr/>
+      </p:nvGrpSpPr>
+      <p:grpSpPr>
+        <a:xfrm>
+          <a:off x="0" y="0"/>
+          <a:ext cx="0" cy="0"/>
+          <a:chOff x="0" y="0"/>
+          <a:chExt cx="0" cy="0"/>
+        </a:xfrm>
+      </p:grpSpPr>
+      <p:sp>
+        <p:nvSpPr>
+          <p:cNvPr id="2" name="Title 1">
+            <a:extLst>
+              <a:ext uri="{FF2B5EF4-FFF2-40B4-BE49-F238E27FC236}">
+                <a16:creationId xmlns:a16="http://schemas.microsoft.com/office/drawing/2014/main" id="{A88EDC4B-5702-D77B-FF30-915DF962401B}"/>
+              </a:ext>
+            </a:extLst>
+          </p:cNvPr>
+          <p:cNvSpPr>
+            <a:spLocks noGrp="1"/>
+          </p:cNvSpPr>
+          <p:nvPr>
+            <p:ph type="title"/>
+          </p:nvPr>
+        </p:nvSpPr>
+        <p:spPr>
+          <a:xfrm>
+            <a:off x="411172" y="46506"/>
+            <a:ext cx="8229600" cy="1099820"/>
+          </a:xfrm>
+        </p:spPr>
+        <p:txBody>
+          <a:bodyPr>
+            <a:normAutofit fontScale="90000"/>
+          </a:bodyPr>
+          <a:lstStyle/>
+          <a:p>
+            <a:r>
+              <a:rPr lang="en-US" sz="4000" dirty="0"/>
+              <a:t>Result Analysis (Evaluation) III</a:t>
+            </a:r>
+            <a:br>
+              <a:rPr lang="en-US" sz="4000" dirty="0"/>
+            </a:br>
+            <a:endParaRPr sz="3100" dirty="0"/>
+          </a:p>
+        </p:txBody>
+      </p:sp>
+      <p:sp>
+        <p:nvSpPr>
+          <p:cNvPr id="3" name="TextBox 2">
+            <a:extLst>
+              <a:ext uri="{FF2B5EF4-FFF2-40B4-BE49-F238E27FC236}">
+                <a16:creationId xmlns:a16="http://schemas.microsoft.com/office/drawing/2014/main" id="{B4D433F3-2858-6C47-8F34-D15EBA425141}"/>
+              </a:ext>
+            </a:extLst>
+          </p:cNvPr>
+          <p:cNvSpPr txBox="1"/>
+          <p:nvPr/>
+        </p:nvSpPr>
+        <p:spPr>
+          <a:xfrm>
+            <a:off x="1052820" y="841953"/>
+            <a:ext cx="7189393" cy="1815882"/>
+          </a:xfrm>
+          <a:prstGeom prst="rect">
+            <a:avLst/>
+          </a:prstGeom>
+          <a:noFill/>
+        </p:spPr>
+        <p:txBody>
+          <a:bodyPr wrap="square" rtlCol="0">
+            <a:spAutoFit/>
+          </a:bodyPr>
+          <a:lstStyle/>
+          <a:p>
+            <a:pPr marL="342900" indent="-342900" fontAlgn="base">
+              <a:buFont typeface="Arial" panose="020B0604020202020204" pitchFamily="34" charset="0"/>
+              <a:buChar char="•"/>
+            </a:pPr>
+            <a:r>
+              <a:rPr lang="en-US" sz="2000" dirty="0"/>
+              <a:t>Balanced models (icu_mortality_balanced_models.py)</a:t>
+            </a:r>
+          </a:p>
+          <a:p>
+            <a:pPr marL="742950" lvl="1" indent="-285750" fontAlgn="base">
+              <a:buFont typeface="Wingdings" panose="05000000000000000000" pitchFamily="2" charset="2"/>
+              <a:buChar char="Ø"/>
+            </a:pPr>
+            <a:r>
+              <a:rPr lang="en-US" dirty="0"/>
+              <a:t>Balanced Logistic regression model:</a:t>
+            </a:r>
+          </a:p>
+          <a:p>
+            <a:pPr marL="1200150" lvl="2" indent="-285750" fontAlgn="base">
+              <a:buFont typeface="Wingdings" panose="05000000000000000000" pitchFamily="2" charset="2"/>
+              <a:buChar char="Ø"/>
+            </a:pPr>
+            <a:r>
+              <a:rPr lang="en-US" dirty="0"/>
+              <a:t>Accuracy: 57.8%</a:t>
+            </a:r>
+          </a:p>
+          <a:p>
+            <a:pPr marL="1200150" lvl="2" indent="-285750" fontAlgn="base">
+              <a:buFont typeface="Wingdings" panose="05000000000000000000" pitchFamily="2" charset="2"/>
+              <a:buChar char="ü"/>
+            </a:pPr>
+            <a:r>
+              <a:rPr lang="en-US" dirty="0"/>
+              <a:t>Confusion matrix</a:t>
+            </a:r>
+          </a:p>
+          <a:p>
+            <a:pPr marL="742950" lvl="1" indent="-285750">
+              <a:buFont typeface="Arial" panose="020B0604020202020204" pitchFamily="34" charset="0"/>
+              <a:buChar char="•"/>
+            </a:pPr>
+            <a:endParaRPr lang="en-US" sz="2000" dirty="0"/>
+          </a:p>
+          <a:p>
+            <a:pPr marL="285750" indent="-285750">
+              <a:buFont typeface="Arial" panose="020B0604020202020204" pitchFamily="34" charset="0"/>
+              <a:buChar char="•"/>
+            </a:pPr>
+            <a:endParaRPr lang="en-US" dirty="0"/>
+          </a:p>
+        </p:txBody>
+      </p:sp>
+      <p:pic>
+        <p:nvPicPr>
+          <p:cNvPr id="5" name="Picture 4">
+            <a:extLst>
+              <a:ext uri="{FF2B5EF4-FFF2-40B4-BE49-F238E27FC236}">
+                <a16:creationId xmlns:a16="http://schemas.microsoft.com/office/drawing/2014/main" id="{4C8FF8A4-83FA-1A83-B9E0-14891CA4D004}"/>
               </a:ext>
             </a:extLst>
           </p:cNvPr>
@@ -4691,8 +5395,665 @@
         </p:blipFill>
         <p:spPr>
           <a:xfrm>
-            <a:off x="2019043" y="3197332"/>
-            <a:ext cx="4995447" cy="3415192"/>
+            <a:off x="2360806" y="3732874"/>
+            <a:ext cx="3205666" cy="2809460"/>
+          </a:xfrm>
+          <a:prstGeom prst="rect">
+            <a:avLst/>
+          </a:prstGeom>
+        </p:spPr>
+      </p:pic>
+      <p:sp>
+        <p:nvSpPr>
+          <p:cNvPr id="8" name="TextBox 7">
+            <a:extLst>
+              <a:ext uri="{FF2B5EF4-FFF2-40B4-BE49-F238E27FC236}">
+                <a16:creationId xmlns:a16="http://schemas.microsoft.com/office/drawing/2014/main" id="{A9D184E5-9E25-31C1-568C-D33886B87EF5}"/>
+              </a:ext>
+            </a:extLst>
+          </p:cNvPr>
+          <p:cNvSpPr txBox="1"/>
+          <p:nvPr/>
+        </p:nvSpPr>
+        <p:spPr>
+          <a:xfrm>
+            <a:off x="1052820" y="2084360"/>
+            <a:ext cx="4572000" cy="1200329"/>
+          </a:xfrm>
+          <a:prstGeom prst="rect">
+            <a:avLst/>
+          </a:prstGeom>
+          <a:noFill/>
+        </p:spPr>
+        <p:txBody>
+          <a:bodyPr wrap="square">
+            <a:spAutoFit/>
+          </a:bodyPr>
+          <a:lstStyle/>
+          <a:p>
+            <a:pPr marL="1657350" lvl="3" indent="-285750" fontAlgn="base">
+              <a:buFont typeface="Wingdings" panose="05000000000000000000" pitchFamily="2" charset="2"/>
+              <a:buChar char="v"/>
+            </a:pPr>
+            <a:r>
+              <a:rPr lang="en-US" sz="1800" dirty="0"/>
+              <a:t>Survivor prediction </a:t>
+            </a:r>
+            <a:r>
+              <a:rPr lang="en-US" dirty="0"/>
+              <a:t>accuracy is reduced</a:t>
+            </a:r>
+            <a:endParaRPr lang="en-US" sz="1800" dirty="0"/>
+          </a:p>
+          <a:p>
+            <a:pPr marL="1657350" lvl="3" indent="-285750" fontAlgn="base">
+              <a:buFont typeface="Wingdings" panose="05000000000000000000" pitchFamily="2" charset="2"/>
+              <a:buChar char="v"/>
+            </a:pPr>
+            <a:r>
+              <a:rPr lang="en-US" dirty="0"/>
+              <a:t>Non survivor prediction accuracy is improved</a:t>
+            </a:r>
+            <a:endParaRPr lang="en-US" sz="1800" dirty="0"/>
+          </a:p>
+        </p:txBody>
+      </p:sp>
+    </p:spTree>
+    <p:extLst>
+      <p:ext uri="{BB962C8B-B14F-4D97-AF65-F5344CB8AC3E}">
+        <p14:creationId xmlns:p14="http://schemas.microsoft.com/office/powerpoint/2010/main" val="2600008806"/>
+      </p:ext>
+    </p:extLst>
+  </p:cSld>
+  <p:clrMapOvr>
+    <a:masterClrMapping/>
+  </p:clrMapOvr>
+</p:sld>
+</file>
+
+<file path=ppt/slides/slide16.xml><?xml version="1.0" encoding="utf-8"?>
+<p:sld xmlns:a="http://schemas.openxmlformats.org/drawingml/2006/main" xmlns:r="http://schemas.openxmlformats.org/officeDocument/2006/relationships" xmlns:p="http://schemas.openxmlformats.org/presentationml/2006/main">
+  <p:cSld>
+    <p:spTree>
+      <p:nvGrpSpPr>
+        <p:cNvPr id="1" name="">
+          <a:extLst>
+            <a:ext uri="{FF2B5EF4-FFF2-40B4-BE49-F238E27FC236}">
+              <a16:creationId xmlns:a16="http://schemas.microsoft.com/office/drawing/2014/main" id="{78E75B1D-EDA3-921C-B7D7-3A3308863131}"/>
+            </a:ext>
+          </a:extLst>
+        </p:cNvPr>
+        <p:cNvGrpSpPr/>
+        <p:nvPr/>
+      </p:nvGrpSpPr>
+      <p:grpSpPr>
+        <a:xfrm>
+          <a:off x="0" y="0"/>
+          <a:ext cx="0" cy="0"/>
+          <a:chOff x="0" y="0"/>
+          <a:chExt cx="0" cy="0"/>
+        </a:xfrm>
+      </p:grpSpPr>
+      <p:sp>
+        <p:nvSpPr>
+          <p:cNvPr id="2" name="Title 1">
+            <a:extLst>
+              <a:ext uri="{FF2B5EF4-FFF2-40B4-BE49-F238E27FC236}">
+                <a16:creationId xmlns:a16="http://schemas.microsoft.com/office/drawing/2014/main" id="{4AF83BF8-9782-E512-0C3A-9BFA9D3A185A}"/>
+              </a:ext>
+            </a:extLst>
+          </p:cNvPr>
+          <p:cNvSpPr>
+            <a:spLocks noGrp="1"/>
+          </p:cNvSpPr>
+          <p:nvPr>
+            <p:ph type="title"/>
+          </p:nvPr>
+        </p:nvSpPr>
+        <p:spPr>
+          <a:xfrm>
+            <a:off x="411172" y="46506"/>
+            <a:ext cx="8229600" cy="1099820"/>
+          </a:xfrm>
+        </p:spPr>
+        <p:txBody>
+          <a:bodyPr>
+            <a:normAutofit fontScale="90000"/>
+          </a:bodyPr>
+          <a:lstStyle/>
+          <a:p>
+            <a:r>
+              <a:rPr lang="en-US" sz="4000" dirty="0"/>
+              <a:t>Result Analysis (Evaluation) IV</a:t>
+            </a:r>
+            <a:br>
+              <a:rPr lang="en-US" sz="4000" dirty="0"/>
+            </a:br>
+            <a:endParaRPr sz="3100" dirty="0"/>
+          </a:p>
+        </p:txBody>
+      </p:sp>
+      <p:sp>
+        <p:nvSpPr>
+          <p:cNvPr id="3" name="TextBox 2">
+            <a:extLst>
+              <a:ext uri="{FF2B5EF4-FFF2-40B4-BE49-F238E27FC236}">
+                <a16:creationId xmlns:a16="http://schemas.microsoft.com/office/drawing/2014/main" id="{87870821-66DF-F0FE-284E-2CAA2804131D}"/>
+              </a:ext>
+            </a:extLst>
+          </p:cNvPr>
+          <p:cNvSpPr txBox="1"/>
+          <p:nvPr/>
+        </p:nvSpPr>
+        <p:spPr>
+          <a:xfrm>
+            <a:off x="411172" y="841953"/>
+            <a:ext cx="7831041" cy="1538883"/>
+          </a:xfrm>
+          <a:prstGeom prst="rect">
+            <a:avLst/>
+          </a:prstGeom>
+          <a:noFill/>
+        </p:spPr>
+        <p:txBody>
+          <a:bodyPr wrap="square" rtlCol="0">
+            <a:spAutoFit/>
+          </a:bodyPr>
+          <a:lstStyle/>
+          <a:p>
+            <a:pPr marL="342900" indent="-342900" fontAlgn="base">
+              <a:buFont typeface="Arial" panose="020B0604020202020204" pitchFamily="34" charset="0"/>
+              <a:buChar char="•"/>
+            </a:pPr>
+            <a:r>
+              <a:rPr lang="en-US" sz="2000" dirty="0"/>
+              <a:t>Balanced models (icu_mortality_balanced_models.py)</a:t>
+            </a:r>
+          </a:p>
+          <a:p>
+            <a:pPr marL="742950" lvl="1" indent="-285750" fontAlgn="base">
+              <a:buFont typeface="Wingdings" panose="05000000000000000000" pitchFamily="2" charset="2"/>
+              <a:buChar char="Ø"/>
+            </a:pPr>
+            <a:r>
+              <a:rPr lang="en-US" dirty="0"/>
+              <a:t>Balanced Logistic regression model:</a:t>
+            </a:r>
+          </a:p>
+          <a:p>
+            <a:pPr marL="1200150" lvl="2" indent="-285750" fontAlgn="base">
+              <a:buFont typeface="Wingdings" panose="05000000000000000000" pitchFamily="2" charset="2"/>
+              <a:buChar char="Ø"/>
+            </a:pPr>
+            <a:r>
+              <a:rPr lang="en-US" dirty="0"/>
+              <a:t>Detail classification Results:</a:t>
+            </a:r>
+          </a:p>
+          <a:p>
+            <a:pPr marL="742950" lvl="1" indent="-285750">
+              <a:buFont typeface="Arial" panose="020B0604020202020204" pitchFamily="34" charset="0"/>
+              <a:buChar char="•"/>
+            </a:pPr>
+            <a:endParaRPr lang="en-US" sz="2000" dirty="0"/>
+          </a:p>
+          <a:p>
+            <a:pPr marL="285750" indent="-285750">
+              <a:buFont typeface="Arial" panose="020B0604020202020204" pitchFamily="34" charset="0"/>
+              <a:buChar char="•"/>
+            </a:pPr>
+            <a:endParaRPr lang="en-US" dirty="0"/>
+          </a:p>
+        </p:txBody>
+      </p:sp>
+      <p:sp>
+        <p:nvSpPr>
+          <p:cNvPr id="8" name="TextBox 7">
+            <a:extLst>
+              <a:ext uri="{FF2B5EF4-FFF2-40B4-BE49-F238E27FC236}">
+                <a16:creationId xmlns:a16="http://schemas.microsoft.com/office/drawing/2014/main" id="{C92EE907-A527-061E-0EC4-546D4C048B24}"/>
+              </a:ext>
+            </a:extLst>
+          </p:cNvPr>
+          <p:cNvSpPr txBox="1"/>
+          <p:nvPr/>
+        </p:nvSpPr>
+        <p:spPr>
+          <a:xfrm>
+            <a:off x="72887" y="1749533"/>
+            <a:ext cx="6281530" cy="3847207"/>
+          </a:xfrm>
+          <a:prstGeom prst="rect">
+            <a:avLst/>
+          </a:prstGeom>
+          <a:noFill/>
+        </p:spPr>
+        <p:txBody>
+          <a:bodyPr wrap="square">
+            <a:spAutoFit/>
+          </a:bodyPr>
+          <a:lstStyle/>
+          <a:p>
+            <a:pPr marL="1657350" lvl="3" indent="-285750" fontAlgn="base">
+              <a:buFont typeface="Wingdings" panose="05000000000000000000" pitchFamily="2" charset="2"/>
+              <a:buChar char="v"/>
+            </a:pPr>
+            <a:r>
+              <a:rPr lang="en-US" sz="1800" dirty="0"/>
+              <a:t>Survivor (0)</a:t>
+            </a:r>
+          </a:p>
+          <a:p>
+            <a:pPr marL="2114550" lvl="4" indent="-285750" fontAlgn="base">
+              <a:buFont typeface="Wingdings" panose="05000000000000000000" pitchFamily="2" charset="2"/>
+              <a:buChar char="q"/>
+            </a:pPr>
+            <a:r>
+              <a:rPr lang="en-US" sz="1600" dirty="0"/>
+              <a:t>Of all the prediction precision: 77.8% were correct </a:t>
+            </a:r>
+          </a:p>
+          <a:p>
+            <a:pPr marL="2114550" lvl="4" indent="-285750" fontAlgn="base">
+              <a:buFont typeface="Wingdings" panose="05000000000000000000" pitchFamily="2" charset="2"/>
+              <a:buChar char="q"/>
+            </a:pPr>
+            <a:r>
+              <a:rPr lang="en-US" sz="1600" dirty="0"/>
+              <a:t>Of all the actual class, 62.7% were correctly identified</a:t>
+            </a:r>
+          </a:p>
+          <a:p>
+            <a:pPr marL="2114550" lvl="4" indent="-285750" fontAlgn="base">
+              <a:buFont typeface="Wingdings" panose="05000000000000000000" pitchFamily="2" charset="2"/>
+              <a:buChar char="q"/>
+            </a:pPr>
+            <a:r>
+              <a:rPr lang="en-US" sz="1600" dirty="0"/>
+              <a:t>Harmonic mean of precision and recall is 69%</a:t>
+            </a:r>
+          </a:p>
+          <a:p>
+            <a:pPr marL="2114550" lvl="4" indent="-285750" fontAlgn="base">
+              <a:buFont typeface="Wingdings" panose="05000000000000000000" pitchFamily="2" charset="2"/>
+              <a:buChar char="q"/>
+            </a:pPr>
+            <a:r>
+              <a:rPr lang="en-US" sz="1600" dirty="0"/>
+              <a:t>2297 number of true samples</a:t>
+            </a:r>
+          </a:p>
+          <a:p>
+            <a:pPr marL="2114550" lvl="4" indent="-285750" fontAlgn="base">
+              <a:buFont typeface="Wingdings" panose="05000000000000000000" pitchFamily="2" charset="2"/>
+              <a:buChar char="q"/>
+            </a:pPr>
+            <a:endParaRPr lang="en-US" sz="1600" dirty="0"/>
+          </a:p>
+          <a:p>
+            <a:pPr marL="1657350" lvl="3" indent="-285750" fontAlgn="base">
+              <a:buFont typeface="Wingdings" panose="05000000000000000000" pitchFamily="2" charset="2"/>
+              <a:buChar char="v"/>
+            </a:pPr>
+            <a:r>
+              <a:rPr lang="en-US" dirty="0"/>
+              <a:t>Non Survivor (1)</a:t>
+            </a:r>
+          </a:p>
+          <a:p>
+            <a:pPr marL="2114550" lvl="4" indent="-285750" fontAlgn="base">
+              <a:buFont typeface="Wingdings" panose="05000000000000000000" pitchFamily="2" charset="2"/>
+              <a:buChar char="q"/>
+            </a:pPr>
+            <a:r>
+              <a:rPr lang="en-US" sz="1600" dirty="0"/>
+              <a:t>Of all the prediction precision: 25% were correct </a:t>
+            </a:r>
+          </a:p>
+          <a:p>
+            <a:pPr marL="2114550" lvl="4" indent="-285750" fontAlgn="base">
+              <a:buFont typeface="Wingdings" panose="05000000000000000000" pitchFamily="2" charset="2"/>
+              <a:buChar char="q"/>
+            </a:pPr>
+            <a:r>
+              <a:rPr lang="en-US" sz="1600" dirty="0"/>
+              <a:t>Of all the actual class, 41.7% were correctly identified</a:t>
+            </a:r>
+          </a:p>
+          <a:p>
+            <a:pPr marL="2114550" lvl="4" indent="-285750" fontAlgn="base">
+              <a:buFont typeface="Wingdings" panose="05000000000000000000" pitchFamily="2" charset="2"/>
+              <a:buChar char="q"/>
+            </a:pPr>
+            <a:r>
+              <a:rPr lang="en-US" sz="1600" dirty="0"/>
+              <a:t>Harmonic mean of precision and recall is 31.6%</a:t>
+            </a:r>
+          </a:p>
+          <a:p>
+            <a:pPr marL="2114550" lvl="4" indent="-285750" fontAlgn="base">
+              <a:buFont typeface="Wingdings" panose="05000000000000000000" pitchFamily="2" charset="2"/>
+              <a:buChar char="q"/>
+            </a:pPr>
+            <a:r>
+              <a:rPr lang="en-US" sz="1600" dirty="0"/>
+              <a:t>703 number of true samples</a:t>
+            </a:r>
+          </a:p>
+        </p:txBody>
+      </p:sp>
+      <p:pic>
+        <p:nvPicPr>
+          <p:cNvPr id="6" name="Picture 5">
+            <a:extLst>
+              <a:ext uri="{FF2B5EF4-FFF2-40B4-BE49-F238E27FC236}">
+                <a16:creationId xmlns:a16="http://schemas.microsoft.com/office/drawing/2014/main" id="{89DAE634-04E5-C164-E981-F7B2BA0D558D}"/>
+              </a:ext>
+            </a:extLst>
+          </p:cNvPr>
+          <p:cNvPicPr>
+            <a:picLocks noChangeAspect="1"/>
+          </p:cNvPicPr>
+          <p:nvPr/>
+        </p:nvPicPr>
+        <p:blipFill>
+          <a:blip r:embed="rId2"/>
+          <a:stretch>
+            <a:fillRect/>
+          </a:stretch>
+        </p:blipFill>
+        <p:spPr>
+          <a:xfrm>
+            <a:off x="6354417" y="1611394"/>
+            <a:ext cx="2491958" cy="3478281"/>
+          </a:xfrm>
+          <a:prstGeom prst="rect">
+            <a:avLst/>
+          </a:prstGeom>
+        </p:spPr>
+      </p:pic>
+      <p:sp>
+        <p:nvSpPr>
+          <p:cNvPr id="11" name="TextBox 10">
+            <a:extLst>
+              <a:ext uri="{FF2B5EF4-FFF2-40B4-BE49-F238E27FC236}">
+                <a16:creationId xmlns:a16="http://schemas.microsoft.com/office/drawing/2014/main" id="{40E8D392-B4EE-31A7-831E-9B2C2F610ECF}"/>
+              </a:ext>
+            </a:extLst>
+          </p:cNvPr>
+          <p:cNvSpPr txBox="1"/>
+          <p:nvPr/>
+        </p:nvSpPr>
+        <p:spPr>
+          <a:xfrm>
+            <a:off x="579686" y="5489715"/>
+            <a:ext cx="6397584" cy="1200329"/>
+          </a:xfrm>
+          <a:prstGeom prst="rect">
+            <a:avLst/>
+          </a:prstGeom>
+          <a:noFill/>
+        </p:spPr>
+        <p:txBody>
+          <a:bodyPr wrap="square">
+            <a:spAutoFit/>
+          </a:bodyPr>
+          <a:lstStyle/>
+          <a:p>
+            <a:pPr marL="742950" lvl="1" indent="-285750" fontAlgn="base">
+              <a:buFont typeface="Wingdings" panose="05000000000000000000" pitchFamily="2" charset="2"/>
+              <a:buChar char="Ø"/>
+            </a:pPr>
+            <a:r>
+              <a:rPr lang="en-US" dirty="0"/>
+              <a:t>Conclusion: balanced logistic regression model improves the non survivor prediction performance, reduced the model biased, hence the </a:t>
+            </a:r>
+            <a:r>
+              <a:rPr lang="en-US" dirty="0" err="1"/>
+              <a:t>class_weight</a:t>
+            </a:r>
+            <a:r>
+              <a:rPr lang="en-US" dirty="0"/>
+              <a:t> balanced parameter works as expected.</a:t>
+            </a:r>
+          </a:p>
+        </p:txBody>
+      </p:sp>
+    </p:spTree>
+    <p:extLst>
+      <p:ext uri="{BB962C8B-B14F-4D97-AF65-F5344CB8AC3E}">
+        <p14:creationId xmlns:p14="http://schemas.microsoft.com/office/powerpoint/2010/main" val="2248958373"/>
+      </p:ext>
+    </p:extLst>
+  </p:cSld>
+  <p:clrMapOvr>
+    <a:masterClrMapping/>
+  </p:clrMapOvr>
+</p:sld>
+</file>
+
+<file path=ppt/slides/slide17.xml><?xml version="1.0" encoding="utf-8"?>
+<p:sld xmlns:a="http://schemas.openxmlformats.org/drawingml/2006/main" xmlns:r="http://schemas.openxmlformats.org/officeDocument/2006/relationships" xmlns:p="http://schemas.openxmlformats.org/presentationml/2006/main">
+  <p:cSld>
+    <p:spTree>
+      <p:nvGrpSpPr>
+        <p:cNvPr id="1" name="">
+          <a:extLst>
+            <a:ext uri="{FF2B5EF4-FFF2-40B4-BE49-F238E27FC236}">
+              <a16:creationId xmlns:a16="http://schemas.microsoft.com/office/drawing/2014/main" id="{12F9AE16-6167-BCB3-0F6B-374D720D2DE3}"/>
+            </a:ext>
+          </a:extLst>
+        </p:cNvPr>
+        <p:cNvGrpSpPr/>
+        <p:nvPr/>
+      </p:nvGrpSpPr>
+      <p:grpSpPr>
+        <a:xfrm>
+          <a:off x="0" y="0"/>
+          <a:ext cx="0" cy="0"/>
+          <a:chOff x="0" y="0"/>
+          <a:chExt cx="0" cy="0"/>
+        </a:xfrm>
+      </p:grpSpPr>
+      <p:sp>
+        <p:nvSpPr>
+          <p:cNvPr id="2" name="Title 1">
+            <a:extLst>
+              <a:ext uri="{FF2B5EF4-FFF2-40B4-BE49-F238E27FC236}">
+                <a16:creationId xmlns:a16="http://schemas.microsoft.com/office/drawing/2014/main" id="{07232365-E8D8-A50E-4A83-4CD5B160E47E}"/>
+              </a:ext>
+            </a:extLst>
+          </p:cNvPr>
+          <p:cNvSpPr>
+            <a:spLocks noGrp="1"/>
+          </p:cNvSpPr>
+          <p:nvPr>
+            <p:ph type="title"/>
+          </p:nvPr>
+        </p:nvSpPr>
+        <p:spPr>
+          <a:xfrm>
+            <a:off x="411172" y="46506"/>
+            <a:ext cx="8229600" cy="1099820"/>
+          </a:xfrm>
+        </p:spPr>
+        <p:txBody>
+          <a:bodyPr>
+            <a:normAutofit fontScale="90000"/>
+          </a:bodyPr>
+          <a:lstStyle/>
+          <a:p>
+            <a:r>
+              <a:rPr lang="en-US" sz="4000" dirty="0"/>
+              <a:t>Result Analysis (Evaluation) V</a:t>
+            </a:r>
+            <a:br>
+              <a:rPr lang="en-US" sz="4000" dirty="0"/>
+            </a:br>
+            <a:endParaRPr sz="3100" dirty="0"/>
+          </a:p>
+        </p:txBody>
+      </p:sp>
+      <p:sp>
+        <p:nvSpPr>
+          <p:cNvPr id="3" name="TextBox 2">
+            <a:extLst>
+              <a:ext uri="{FF2B5EF4-FFF2-40B4-BE49-F238E27FC236}">
+                <a16:creationId xmlns:a16="http://schemas.microsoft.com/office/drawing/2014/main" id="{8F2C683A-CDD9-EBFA-5CB3-1B6A3D9F55A3}"/>
+              </a:ext>
+            </a:extLst>
+          </p:cNvPr>
+          <p:cNvSpPr txBox="1"/>
+          <p:nvPr/>
+        </p:nvSpPr>
+        <p:spPr>
+          <a:xfrm>
+            <a:off x="1052820" y="841953"/>
+            <a:ext cx="7189393" cy="1815882"/>
+          </a:xfrm>
+          <a:prstGeom prst="rect">
+            <a:avLst/>
+          </a:prstGeom>
+          <a:noFill/>
+        </p:spPr>
+        <p:txBody>
+          <a:bodyPr wrap="square" rtlCol="0">
+            <a:spAutoFit/>
+          </a:bodyPr>
+          <a:lstStyle/>
+          <a:p>
+            <a:pPr marL="342900" indent="-342900" fontAlgn="base">
+              <a:buFont typeface="Arial" panose="020B0604020202020204" pitchFamily="34" charset="0"/>
+              <a:buChar char="•"/>
+            </a:pPr>
+            <a:r>
+              <a:rPr lang="en-US" sz="2000" dirty="0"/>
+              <a:t>Balanced models (icu_mortality_balanced_models.py)</a:t>
+            </a:r>
+          </a:p>
+          <a:p>
+            <a:pPr marL="742950" lvl="1" indent="-285750" fontAlgn="base">
+              <a:buFont typeface="Wingdings" panose="05000000000000000000" pitchFamily="2" charset="2"/>
+              <a:buChar char="Ø"/>
+            </a:pPr>
+            <a:r>
+              <a:rPr lang="en-US" dirty="0"/>
+              <a:t>Balanced Random forest model:</a:t>
+            </a:r>
+          </a:p>
+          <a:p>
+            <a:pPr marL="1200150" lvl="2" indent="-285750" fontAlgn="base">
+              <a:buFont typeface="Wingdings" panose="05000000000000000000" pitchFamily="2" charset="2"/>
+              <a:buChar char="Ø"/>
+            </a:pPr>
+            <a:r>
+              <a:rPr lang="en-US" dirty="0"/>
+              <a:t>Accuracy: 69.3%</a:t>
+            </a:r>
+          </a:p>
+          <a:p>
+            <a:pPr marL="1200150" lvl="2" indent="-285750" fontAlgn="base">
+              <a:buFont typeface="Wingdings" panose="05000000000000000000" pitchFamily="2" charset="2"/>
+              <a:buChar char="ü"/>
+            </a:pPr>
+            <a:r>
+              <a:rPr lang="en-US" dirty="0"/>
+              <a:t>Confusion matrix</a:t>
+            </a:r>
+          </a:p>
+          <a:p>
+            <a:pPr marL="742950" lvl="1" indent="-285750">
+              <a:buFont typeface="Arial" panose="020B0604020202020204" pitchFamily="34" charset="0"/>
+              <a:buChar char="•"/>
+            </a:pPr>
+            <a:endParaRPr lang="en-US" sz="2000" dirty="0"/>
+          </a:p>
+          <a:p>
+            <a:pPr marL="285750" indent="-285750">
+              <a:buFont typeface="Arial" panose="020B0604020202020204" pitchFamily="34" charset="0"/>
+              <a:buChar char="•"/>
+            </a:pPr>
+            <a:endParaRPr lang="en-US" dirty="0"/>
+          </a:p>
+        </p:txBody>
+      </p:sp>
+      <p:sp>
+        <p:nvSpPr>
+          <p:cNvPr id="8" name="TextBox 7">
+            <a:extLst>
+              <a:ext uri="{FF2B5EF4-FFF2-40B4-BE49-F238E27FC236}">
+                <a16:creationId xmlns:a16="http://schemas.microsoft.com/office/drawing/2014/main" id="{CC11FC31-6BCC-15D1-EDBB-1E968C583A6D}"/>
+              </a:ext>
+            </a:extLst>
+          </p:cNvPr>
+          <p:cNvSpPr txBox="1"/>
+          <p:nvPr/>
+        </p:nvSpPr>
+        <p:spPr>
+          <a:xfrm>
+            <a:off x="901787" y="2009596"/>
+            <a:ext cx="7420578" cy="1200329"/>
+          </a:xfrm>
+          <a:prstGeom prst="rect">
+            <a:avLst/>
+          </a:prstGeom>
+          <a:noFill/>
+        </p:spPr>
+        <p:txBody>
+          <a:bodyPr wrap="square">
+            <a:spAutoFit/>
+          </a:bodyPr>
+          <a:lstStyle/>
+          <a:p>
+            <a:pPr marL="1657350" lvl="3" indent="-285750" fontAlgn="base">
+              <a:buFont typeface="Wingdings" panose="05000000000000000000" pitchFamily="2" charset="2"/>
+              <a:buChar char="v"/>
+            </a:pPr>
+            <a:r>
+              <a:rPr lang="en-US" sz="1800" dirty="0"/>
+              <a:t>Survivor prediction </a:t>
+            </a:r>
+            <a:r>
+              <a:rPr lang="en-US" dirty="0"/>
+              <a:t>accuracy is improved compare with balanced logistic regression model</a:t>
+            </a:r>
+          </a:p>
+          <a:p>
+            <a:pPr marL="1657350" lvl="3" indent="-285750" fontAlgn="base">
+              <a:buFont typeface="Wingdings" panose="05000000000000000000" pitchFamily="2" charset="2"/>
+              <a:buChar char="v"/>
+            </a:pPr>
+            <a:r>
+              <a:rPr lang="en-US" sz="1800" dirty="0"/>
+              <a:t>Non-Survivor prediction accuracy is reduced compare with balanced logistic regression model</a:t>
+            </a:r>
+          </a:p>
+        </p:txBody>
+      </p:sp>
+      <p:pic>
+        <p:nvPicPr>
+          <p:cNvPr id="6" name="Picture 5">
+            <a:extLst>
+              <a:ext uri="{FF2B5EF4-FFF2-40B4-BE49-F238E27FC236}">
+                <a16:creationId xmlns:a16="http://schemas.microsoft.com/office/drawing/2014/main" id="{8CF7BA88-2433-C507-3073-AA9681B7EDFB}"/>
+              </a:ext>
+            </a:extLst>
+          </p:cNvPr>
+          <p:cNvPicPr>
+            <a:picLocks noChangeAspect="1"/>
+          </p:cNvPicPr>
+          <p:nvPr/>
+        </p:nvPicPr>
+        <p:blipFill>
+          <a:blip r:embed="rId2"/>
+          <a:stretch>
+            <a:fillRect/>
+          </a:stretch>
+        </p:blipFill>
+        <p:spPr>
+          <a:xfrm>
+            <a:off x="2767803" y="3209925"/>
+            <a:ext cx="4162425" cy="3648075"/>
           </a:xfrm>
           <a:prstGeom prst="rect">
             <a:avLst/>
@@ -4702,7 +6063,7 @@
     </p:spTree>
     <p:extLst>
       <p:ext uri="{BB962C8B-B14F-4D97-AF65-F5344CB8AC3E}">
-        <p14:creationId xmlns:p14="http://schemas.microsoft.com/office/powerpoint/2010/main" val="3378009342"/>
+        <p14:creationId xmlns:p14="http://schemas.microsoft.com/office/powerpoint/2010/main" val="1317450521"/>
       </p:ext>
     </p:extLst>
   </p:cSld>
@@ -4712,7 +6073,442 @@
 </p:sld>
 </file>
 
-<file path=ppt/slides/slide15.xml><?xml version="1.0" encoding="utf-8"?>
+<file path=ppt/slides/slide18.xml><?xml version="1.0" encoding="utf-8"?>
+<p:sld xmlns:a="http://schemas.openxmlformats.org/drawingml/2006/main" xmlns:r="http://schemas.openxmlformats.org/officeDocument/2006/relationships" xmlns:p="http://schemas.openxmlformats.org/presentationml/2006/main">
+  <p:cSld>
+    <p:spTree>
+      <p:nvGrpSpPr>
+        <p:cNvPr id="1" name="">
+          <a:extLst>
+            <a:ext uri="{FF2B5EF4-FFF2-40B4-BE49-F238E27FC236}">
+              <a16:creationId xmlns:a16="http://schemas.microsoft.com/office/drawing/2014/main" id="{F578DC03-5463-E9D6-0AB6-9F61EA5340A8}"/>
+            </a:ext>
+          </a:extLst>
+        </p:cNvPr>
+        <p:cNvGrpSpPr/>
+        <p:nvPr/>
+      </p:nvGrpSpPr>
+      <p:grpSpPr>
+        <a:xfrm>
+          <a:off x="0" y="0"/>
+          <a:ext cx="0" cy="0"/>
+          <a:chOff x="0" y="0"/>
+          <a:chExt cx="0" cy="0"/>
+        </a:xfrm>
+      </p:grpSpPr>
+      <p:sp>
+        <p:nvSpPr>
+          <p:cNvPr id="2" name="Title 1">
+            <a:extLst>
+              <a:ext uri="{FF2B5EF4-FFF2-40B4-BE49-F238E27FC236}">
+                <a16:creationId xmlns:a16="http://schemas.microsoft.com/office/drawing/2014/main" id="{44656BAF-1B68-DE2D-A0F9-ECDF2D6CCF2F}"/>
+              </a:ext>
+            </a:extLst>
+          </p:cNvPr>
+          <p:cNvSpPr>
+            <a:spLocks noGrp="1"/>
+          </p:cNvSpPr>
+          <p:nvPr>
+            <p:ph type="title"/>
+          </p:nvPr>
+        </p:nvSpPr>
+        <p:spPr>
+          <a:xfrm>
+            <a:off x="411172" y="46506"/>
+            <a:ext cx="8229600" cy="1099820"/>
+          </a:xfrm>
+        </p:spPr>
+        <p:txBody>
+          <a:bodyPr>
+            <a:normAutofit fontScale="90000"/>
+          </a:bodyPr>
+          <a:lstStyle/>
+          <a:p>
+            <a:r>
+              <a:rPr lang="en-US" sz="4000" dirty="0"/>
+              <a:t>Result Analysis (Evaluation) VI</a:t>
+            </a:r>
+            <a:br>
+              <a:rPr lang="en-US" sz="4000" dirty="0"/>
+            </a:br>
+            <a:endParaRPr sz="3100" dirty="0"/>
+          </a:p>
+        </p:txBody>
+      </p:sp>
+      <p:sp>
+        <p:nvSpPr>
+          <p:cNvPr id="3" name="TextBox 2">
+            <a:extLst>
+              <a:ext uri="{FF2B5EF4-FFF2-40B4-BE49-F238E27FC236}">
+                <a16:creationId xmlns:a16="http://schemas.microsoft.com/office/drawing/2014/main" id="{95D784A6-CC5D-FD64-EF97-6BE95329DDF6}"/>
+              </a:ext>
+            </a:extLst>
+          </p:cNvPr>
+          <p:cNvSpPr txBox="1"/>
+          <p:nvPr/>
+        </p:nvSpPr>
+        <p:spPr>
+          <a:xfrm>
+            <a:off x="411172" y="841953"/>
+            <a:ext cx="7831041" cy="1538883"/>
+          </a:xfrm>
+          <a:prstGeom prst="rect">
+            <a:avLst/>
+          </a:prstGeom>
+          <a:noFill/>
+        </p:spPr>
+        <p:txBody>
+          <a:bodyPr wrap="square" rtlCol="0">
+            <a:spAutoFit/>
+          </a:bodyPr>
+          <a:lstStyle/>
+          <a:p>
+            <a:pPr marL="342900" indent="-342900" fontAlgn="base">
+              <a:buFont typeface="Arial" panose="020B0604020202020204" pitchFamily="34" charset="0"/>
+              <a:buChar char="•"/>
+            </a:pPr>
+            <a:r>
+              <a:rPr lang="en-US" sz="2000" dirty="0"/>
+              <a:t>Balanced models (icu_mortality_balanced_models.py)</a:t>
+            </a:r>
+          </a:p>
+          <a:p>
+            <a:pPr marL="742950" lvl="1" indent="-285750" fontAlgn="base">
+              <a:buFont typeface="Wingdings" panose="05000000000000000000" pitchFamily="2" charset="2"/>
+              <a:buChar char="Ø"/>
+            </a:pPr>
+            <a:r>
+              <a:rPr lang="en-US" dirty="0"/>
+              <a:t>Balanced Random forest model:</a:t>
+            </a:r>
+          </a:p>
+          <a:p>
+            <a:pPr marL="1200150" lvl="2" indent="-285750" fontAlgn="base">
+              <a:buFont typeface="Wingdings" panose="05000000000000000000" pitchFamily="2" charset="2"/>
+              <a:buChar char="Ø"/>
+            </a:pPr>
+            <a:r>
+              <a:rPr lang="en-US" dirty="0"/>
+              <a:t>Detail classification Results:</a:t>
+            </a:r>
+          </a:p>
+          <a:p>
+            <a:pPr marL="742950" lvl="1" indent="-285750">
+              <a:buFont typeface="Arial" panose="020B0604020202020204" pitchFamily="34" charset="0"/>
+              <a:buChar char="•"/>
+            </a:pPr>
+            <a:endParaRPr lang="en-US" sz="2000" dirty="0"/>
+          </a:p>
+          <a:p>
+            <a:pPr marL="285750" indent="-285750">
+              <a:buFont typeface="Arial" panose="020B0604020202020204" pitchFamily="34" charset="0"/>
+              <a:buChar char="•"/>
+            </a:pPr>
+            <a:endParaRPr lang="en-US" dirty="0"/>
+          </a:p>
+        </p:txBody>
+      </p:sp>
+      <p:sp>
+        <p:nvSpPr>
+          <p:cNvPr id="8" name="TextBox 7">
+            <a:extLst>
+              <a:ext uri="{FF2B5EF4-FFF2-40B4-BE49-F238E27FC236}">
+                <a16:creationId xmlns:a16="http://schemas.microsoft.com/office/drawing/2014/main" id="{98674621-CC82-B86F-7C65-A5311993A04D}"/>
+              </a:ext>
+            </a:extLst>
+          </p:cNvPr>
+          <p:cNvSpPr txBox="1"/>
+          <p:nvPr/>
+        </p:nvSpPr>
+        <p:spPr>
+          <a:xfrm>
+            <a:off x="72887" y="1749533"/>
+            <a:ext cx="6281530" cy="3847207"/>
+          </a:xfrm>
+          <a:prstGeom prst="rect">
+            <a:avLst/>
+          </a:prstGeom>
+          <a:noFill/>
+        </p:spPr>
+        <p:txBody>
+          <a:bodyPr wrap="square">
+            <a:spAutoFit/>
+          </a:bodyPr>
+          <a:lstStyle/>
+          <a:p>
+            <a:pPr marL="1657350" lvl="3" indent="-285750" fontAlgn="base">
+              <a:buFont typeface="Wingdings" panose="05000000000000000000" pitchFamily="2" charset="2"/>
+              <a:buChar char="v"/>
+            </a:pPr>
+            <a:r>
+              <a:rPr lang="en-US" sz="1800" dirty="0"/>
+              <a:t>Survivor (0)</a:t>
+            </a:r>
+          </a:p>
+          <a:p>
+            <a:pPr marL="2114550" lvl="4" indent="-285750" fontAlgn="base">
+              <a:buFont typeface="Wingdings" panose="05000000000000000000" pitchFamily="2" charset="2"/>
+              <a:buChar char="q"/>
+            </a:pPr>
+            <a:r>
+              <a:rPr lang="en-US" sz="1600" dirty="0"/>
+              <a:t>Of all the prediction precision: 76.8% were correct </a:t>
+            </a:r>
+          </a:p>
+          <a:p>
+            <a:pPr marL="2114550" lvl="4" indent="-285750" fontAlgn="base">
+              <a:buFont typeface="Wingdings" panose="05000000000000000000" pitchFamily="2" charset="2"/>
+              <a:buChar char="q"/>
+            </a:pPr>
+            <a:r>
+              <a:rPr lang="en-US" sz="1600" dirty="0"/>
+              <a:t>Of all the actual class, 85.9% were correctly identified</a:t>
+            </a:r>
+          </a:p>
+          <a:p>
+            <a:pPr marL="2114550" lvl="4" indent="-285750" fontAlgn="base">
+              <a:buFont typeface="Wingdings" panose="05000000000000000000" pitchFamily="2" charset="2"/>
+              <a:buChar char="q"/>
+            </a:pPr>
+            <a:r>
+              <a:rPr lang="en-US" sz="1600" dirty="0"/>
+              <a:t>Harmonic mean of precision and recall is 81%</a:t>
+            </a:r>
+          </a:p>
+          <a:p>
+            <a:pPr marL="2114550" lvl="4" indent="-285750" fontAlgn="base">
+              <a:buFont typeface="Wingdings" panose="05000000000000000000" pitchFamily="2" charset="2"/>
+              <a:buChar char="q"/>
+            </a:pPr>
+            <a:r>
+              <a:rPr lang="en-US" sz="1600" dirty="0"/>
+              <a:t>2297 number of true samples</a:t>
+            </a:r>
+          </a:p>
+          <a:p>
+            <a:pPr marL="2114550" lvl="4" indent="-285750" fontAlgn="base">
+              <a:buFont typeface="Wingdings" panose="05000000000000000000" pitchFamily="2" charset="2"/>
+              <a:buChar char="q"/>
+            </a:pPr>
+            <a:endParaRPr lang="en-US" sz="1600" dirty="0"/>
+          </a:p>
+          <a:p>
+            <a:pPr marL="1657350" lvl="3" indent="-285750" fontAlgn="base">
+              <a:buFont typeface="Wingdings" panose="05000000000000000000" pitchFamily="2" charset="2"/>
+              <a:buChar char="v"/>
+            </a:pPr>
+            <a:r>
+              <a:rPr lang="en-US" dirty="0"/>
+              <a:t>Non Survivor (1)</a:t>
+            </a:r>
+          </a:p>
+          <a:p>
+            <a:pPr marL="2114550" lvl="4" indent="-285750" fontAlgn="base">
+              <a:buFont typeface="Wingdings" panose="05000000000000000000" pitchFamily="2" charset="2"/>
+              <a:buChar char="q"/>
+            </a:pPr>
+            <a:r>
+              <a:rPr lang="en-US" sz="1600" dirty="0"/>
+              <a:t>Of all the prediction precision: 24% were correct </a:t>
+            </a:r>
+          </a:p>
+          <a:p>
+            <a:pPr marL="2114550" lvl="4" indent="-285750" fontAlgn="base">
+              <a:buFont typeface="Wingdings" panose="05000000000000000000" pitchFamily="2" charset="2"/>
+              <a:buChar char="q"/>
+            </a:pPr>
+            <a:r>
+              <a:rPr lang="en-US" sz="1600" dirty="0"/>
+              <a:t>Of all the actual class, 15% were correctly identified</a:t>
+            </a:r>
+          </a:p>
+          <a:p>
+            <a:pPr marL="2114550" lvl="4" indent="-285750" fontAlgn="base">
+              <a:buFont typeface="Wingdings" panose="05000000000000000000" pitchFamily="2" charset="2"/>
+              <a:buChar char="q"/>
+            </a:pPr>
+            <a:r>
+              <a:rPr lang="en-US" sz="1600" dirty="0"/>
+              <a:t>Harmonic mean of precision and recall is 18.5%</a:t>
+            </a:r>
+          </a:p>
+          <a:p>
+            <a:pPr marL="2114550" lvl="4" indent="-285750" fontAlgn="base">
+              <a:buFont typeface="Wingdings" panose="05000000000000000000" pitchFamily="2" charset="2"/>
+              <a:buChar char="q"/>
+            </a:pPr>
+            <a:r>
+              <a:rPr lang="en-US" sz="1600" dirty="0"/>
+              <a:t>703 number of true samples</a:t>
+            </a:r>
+          </a:p>
+        </p:txBody>
+      </p:sp>
+      <p:sp>
+        <p:nvSpPr>
+          <p:cNvPr id="11" name="TextBox 10">
+            <a:extLst>
+              <a:ext uri="{FF2B5EF4-FFF2-40B4-BE49-F238E27FC236}">
+                <a16:creationId xmlns:a16="http://schemas.microsoft.com/office/drawing/2014/main" id="{7A375AFD-87ED-73ED-9DAC-3762432FDDE0}"/>
+              </a:ext>
+            </a:extLst>
+          </p:cNvPr>
+          <p:cNvSpPr txBox="1"/>
+          <p:nvPr/>
+        </p:nvSpPr>
+        <p:spPr>
+          <a:xfrm>
+            <a:off x="579686" y="5489715"/>
+            <a:ext cx="8352280" cy="923330"/>
+          </a:xfrm>
+          <a:prstGeom prst="rect">
+            <a:avLst/>
+          </a:prstGeom>
+          <a:noFill/>
+        </p:spPr>
+        <p:txBody>
+          <a:bodyPr wrap="square">
+            <a:spAutoFit/>
+          </a:bodyPr>
+          <a:lstStyle/>
+          <a:p>
+            <a:pPr marL="742950" lvl="1" indent="-285750" fontAlgn="base">
+              <a:buFont typeface="Wingdings" panose="05000000000000000000" pitchFamily="2" charset="2"/>
+              <a:buChar char="Ø"/>
+            </a:pPr>
+            <a:r>
+              <a:rPr lang="en-US" dirty="0"/>
+              <a:t>Conclusion: compare to balanced logistic regression model, the balanced random forest model improves the overall accuracy but still bias towards the survivor class prediction. And all the code is located at </a:t>
+            </a:r>
+            <a:r>
+              <a:rPr lang="en-US" dirty="0" err="1">
+                <a:hlinkClick r:id="rId2"/>
+              </a:rPr>
+              <a:t>SpotsMom</a:t>
+            </a:r>
+            <a:r>
+              <a:rPr lang="en-US" dirty="0">
+                <a:hlinkClick r:id="rId2"/>
+              </a:rPr>
+              <a:t>/AI</a:t>
+            </a:r>
+            <a:r>
+              <a:rPr lang="en-US">
+                <a:hlinkClick r:id="rId2"/>
+              </a:rPr>
+              <a:t>_380H</a:t>
+            </a:r>
+            <a:endParaRPr lang="en-US" dirty="0"/>
+          </a:p>
+        </p:txBody>
+      </p:sp>
+      <p:pic>
+        <p:nvPicPr>
+          <p:cNvPr id="5" name="Picture 4">
+            <a:extLst>
+              <a:ext uri="{FF2B5EF4-FFF2-40B4-BE49-F238E27FC236}">
+                <a16:creationId xmlns:a16="http://schemas.microsoft.com/office/drawing/2014/main" id="{D852A778-A6B5-F745-2FFA-F132F97087EF}"/>
+              </a:ext>
+            </a:extLst>
+          </p:cNvPr>
+          <p:cNvPicPr>
+            <a:picLocks noChangeAspect="1"/>
+          </p:cNvPicPr>
+          <p:nvPr/>
+        </p:nvPicPr>
+        <p:blipFill>
+          <a:blip r:embed="rId3"/>
+          <a:stretch>
+            <a:fillRect/>
+          </a:stretch>
+        </p:blipFill>
+        <p:spPr>
+          <a:xfrm>
+            <a:off x="6215270" y="1216860"/>
+            <a:ext cx="2716696" cy="3673192"/>
+          </a:xfrm>
+          <a:prstGeom prst="rect">
+            <a:avLst/>
+          </a:prstGeom>
+        </p:spPr>
+      </p:pic>
+      <p:graphicFrame>
+        <p:nvGraphicFramePr>
+          <p:cNvPr id="7" name="Object 6">
+            <a:extLst>
+              <a:ext uri="{FF2B5EF4-FFF2-40B4-BE49-F238E27FC236}">
+                <a16:creationId xmlns:a16="http://schemas.microsoft.com/office/drawing/2014/main" id="{CB222B74-C2F2-3D98-D94F-39A86296B3EA}"/>
+              </a:ext>
+            </a:extLst>
+          </p:cNvPr>
+          <p:cNvGraphicFramePr>
+            <a:graphicFrameLocks noChangeAspect="1"/>
+          </p:cNvGraphicFramePr>
+          <p:nvPr>
+            <p:extLst>
+              <p:ext uri="{D42A27DB-BD31-4B8C-83A1-F6EECF244321}">
+                <p14:modId xmlns:p14="http://schemas.microsoft.com/office/powerpoint/2010/main" val="2992857998"/>
+              </p:ext>
+            </p:extLst>
+          </p:nvPr>
+        </p:nvGraphicFramePr>
+        <p:xfrm>
+          <a:off x="7059129" y="5054643"/>
+          <a:ext cx="1784350" cy="527050"/>
+        </p:xfrm>
+        <a:graphic>
+          <a:graphicData uri="http://schemas.openxmlformats.org/presentationml/2006/ole">
+            <mc:AlternateContent xmlns:mc="http://schemas.openxmlformats.org/markup-compatibility/2006">
+              <mc:Choice xmlns:v="urn:schemas-microsoft-com:vml" Requires="v">
+                <p:oleObj name="Packager Shell Object" showAsIcon="1" r:id="rId4" imgW="1784380" imgH="526902" progId="Package">
+                  <p:embed/>
+                </p:oleObj>
+              </mc:Choice>
+              <mc:Fallback>
+                <p:oleObj name="Packager Shell Object" showAsIcon="1" r:id="rId4" imgW="1784380" imgH="526902" progId="Package">
+                  <p:embed/>
+                  <p:pic>
+                    <p:nvPicPr>
+                      <p:cNvPr id="0" name=""/>
+                      <p:cNvPicPr/>
+                      <p:nvPr/>
+                    </p:nvPicPr>
+                    <p:blipFill>
+                      <a:blip r:embed="rId5"/>
+                      <a:stretch>
+                        <a:fillRect/>
+                      </a:stretch>
+                    </p:blipFill>
+                    <p:spPr>
+                      <a:xfrm>
+                        <a:off x="7059129" y="5054643"/>
+                        <a:ext cx="1784350" cy="527050"/>
+                      </a:xfrm>
+                      <a:prstGeom prst="rect">
+                        <a:avLst/>
+                      </a:prstGeom>
+                    </p:spPr>
+                  </p:pic>
+                </p:oleObj>
+              </mc:Fallback>
+            </mc:AlternateContent>
+          </a:graphicData>
+        </a:graphic>
+      </p:graphicFrame>
+    </p:spTree>
+    <p:extLst>
+      <p:ext uri="{BB962C8B-B14F-4D97-AF65-F5344CB8AC3E}">
+        <p14:creationId xmlns:p14="http://schemas.microsoft.com/office/powerpoint/2010/main" val="3065657389"/>
+      </p:ext>
+    </p:extLst>
+  </p:cSld>
+  <p:clrMapOvr>
+    <a:masterClrMapping/>
+  </p:clrMapOvr>
+</p:sld>
+</file>
+
+<file path=ppt/slides/slide19.xml><?xml version="1.0" encoding="utf-8"?>
 <p:sld xmlns:a="http://schemas.openxmlformats.org/drawingml/2006/main" xmlns:r="http://schemas.openxmlformats.org/officeDocument/2006/relationships" xmlns:p="http://schemas.openxmlformats.org/presentationml/2006/main">
   <p:cSld>
     <p:spTree>
@@ -4808,7 +6604,7 @@
             </a:pPr>
             <a:r>
               <a:rPr lang="en-US" sz="2000" dirty="0"/>
-              <a:t>A very good learning experience, covers multiple NLPs</a:t>
+              <a:t>ML is powerful too in the clinic risk factor identify and prediction</a:t>
             </a:r>
           </a:p>
           <a:p>
@@ -4818,43 +6614,27 @@
             </a:pPr>
             <a:r>
               <a:rPr lang="en-US" sz="2000" dirty="0"/>
-              <a:t>Struggle with the </a:t>
-            </a:r>
-            <a:r>
-              <a:rPr lang="en-US" sz="2000" dirty="0" err="1"/>
-              <a:t>Colab</a:t>
-            </a:r>
+              <a:t>Data play a key role for the performance of ML </a:t>
+            </a:r>
+          </a:p>
+          <a:p>
+            <a:pPr marL="342900" indent="-342900">
+              <a:buFont typeface="Arial" panose="020B0604020202020204" pitchFamily="34" charset="0"/>
+              <a:buChar char="•"/>
+            </a:pPr>
             <a:r>
               <a:rPr lang="en-US" sz="2000" dirty="0"/>
-              <a:t>, </a:t>
-            </a:r>
-            <a:r>
-              <a:rPr lang="en-US" sz="2000" dirty="0" err="1"/>
-              <a:t>eventuall</a:t>
-            </a:r>
+              <a:t>Even though parameters and different models can be applied to reduce the bias, but there always a trade off between class prediction</a:t>
+            </a:r>
+          </a:p>
+          <a:p>
+            <a:pPr marL="342900" indent="-342900">
+              <a:buFont typeface="Arial" panose="020B0604020202020204" pitchFamily="34" charset="0"/>
+              <a:buChar char="•"/>
+            </a:pPr>
             <a:r>
               <a:rPr lang="en-US" sz="2000" dirty="0"/>
-              <a:t> gave up and did coding locally</a:t>
-            </a:r>
-          </a:p>
-          <a:p>
-            <a:pPr marL="342900" indent="-342900">
-              <a:buFont typeface="Arial" panose="020B0604020202020204" pitchFamily="34" charset="0"/>
-              <a:buChar char="•"/>
-            </a:pPr>
-            <a:r>
-              <a:rPr lang="en-US" sz="2000" dirty="0"/>
-              <a:t>Comparison is the hardest part, given the distribution, what driven the pattern is worth more analysis and research</a:t>
-            </a:r>
-          </a:p>
-          <a:p>
-            <a:pPr marL="342900" indent="-342900">
-              <a:buFont typeface="Arial" panose="020B0604020202020204" pitchFamily="34" charset="0"/>
-              <a:buChar char="•"/>
-            </a:pPr>
-            <a:r>
-              <a:rPr lang="en-US" sz="2000" dirty="0"/>
-              <a:t>Next step is to continue explore with more/different note data to analyze impact of the NLP to the MIMIC clinical data.</a:t>
+              <a:t>Next step: would suggest to get more synthesized data to improve the data quality and try to run the same model to validate the performance</a:t>
             </a:r>
           </a:p>
           <a:p>
@@ -4916,7 +6696,7 @@
         </p:nvSpPr>
         <p:spPr>
           <a:xfrm>
-            <a:off x="411060" y="434030"/>
+            <a:off x="411060" y="219238"/>
             <a:ext cx="8229600" cy="692094"/>
           </a:xfrm>
         </p:spPr>
@@ -4952,13 +6732,13 @@
         </p:nvSpPr>
         <p:spPr>
           <a:xfrm>
-            <a:off x="457200" y="1741155"/>
-            <a:ext cx="8229600" cy="3254291"/>
+            <a:off x="457200" y="1070893"/>
+            <a:ext cx="8229600" cy="4728490"/>
           </a:xfrm>
         </p:spPr>
         <p:txBody>
           <a:bodyPr>
-            <a:normAutofit lnSpcReduction="10000"/>
+            <a:normAutofit fontScale="77500" lnSpcReduction="20000"/>
           </a:bodyPr>
           <a:lstStyle/>
           <a:p>
@@ -4970,53 +6750,121 @@
           <a:p>
             <a:r>
               <a:rPr lang="en-US" sz="2400" dirty="0"/>
-              <a:t>NLPs Details Analysis</a:t>
+              <a:t>Exploratory Data Analysis</a:t>
             </a:r>
           </a:p>
           <a:p>
             <a:pPr lvl="1"/>
             <a:r>
               <a:rPr lang="en-US" sz="2000" dirty="0"/>
-              <a:t>spacy</a:t>
+              <a:t>Dataset extraction</a:t>
             </a:r>
           </a:p>
           <a:p>
             <a:pPr lvl="1"/>
             <a:r>
+              <a:rPr lang="en-US" sz="2000" dirty="0"/>
+              <a:t>Data Analysis</a:t>
+            </a:r>
+          </a:p>
+          <a:p>
+            <a:pPr lvl="1"/>
+            <a:r>
+              <a:rPr lang="en-US" sz="2000" dirty="0"/>
+              <a:t>Data Cleansing</a:t>
+            </a:r>
+          </a:p>
+          <a:p>
+            <a:r>
+              <a:rPr lang="en-US" sz="2400" dirty="0"/>
+              <a:t>Machine Learning Models</a:t>
+            </a:r>
+          </a:p>
+          <a:p>
+            <a:pPr lvl="1"/>
+            <a:r>
+              <a:rPr lang="en-US" sz="2000" dirty="0"/>
+              <a:t>Logistic Regression Model and </a:t>
+            </a:r>
+          </a:p>
+          <a:p>
+            <a:pPr lvl="1"/>
+            <a:r>
+              <a:rPr lang="en-US" sz="2000" dirty="0"/>
+              <a:t>Random Forest Model</a:t>
+            </a:r>
+          </a:p>
+          <a:p>
+            <a:r>
+              <a:rPr lang="en-US" sz="2400" dirty="0"/>
+              <a:t>Codes</a:t>
+            </a:r>
+          </a:p>
+          <a:p>
+            <a:pPr lvl="1"/>
+            <a:r>
+              <a:rPr lang="en-US" sz="2000" dirty="0"/>
+              <a:t>.</a:t>
+            </a:r>
+            <a:r>
               <a:rPr lang="en-US" sz="2000" dirty="0" err="1"/>
-              <a:t>scispacy</a:t>
-            </a:r>
+              <a:t>venv</a:t>
+            </a:r>
+            <a:endParaRPr lang="en-US" sz="2000" dirty="0"/>
+          </a:p>
+          <a:p>
+            <a:pPr lvl="1"/>
             <a:r>
               <a:rPr lang="en-US" sz="2000" dirty="0"/>
-              <a:t> and bc5cdr</a:t>
+              <a:t>icu_data_analysis_and_cleansing.py</a:t>
             </a:r>
           </a:p>
           <a:p>
             <a:pPr lvl="1"/>
             <a:r>
-              <a:rPr lang="en-US" sz="2000" dirty="0" err="1"/>
-              <a:t>medspacy</a:t>
-            </a:r>
+              <a:rPr lang="en-US" sz="2000" dirty="0"/>
+              <a:t>icu_mortality_logreg.py</a:t>
+            </a:r>
+          </a:p>
+          <a:p>
+            <a:pPr lvl="1"/>
+            <a:r>
+              <a:rPr lang="en-US" sz="2000" dirty="0"/>
+              <a:t>icu_mortality_balanced_models.py</a:t>
+            </a:r>
+          </a:p>
+          <a:p>
+            <a:pPr lvl="1"/>
             <a:endParaRPr lang="en-US" sz="2000" dirty="0"/>
           </a:p>
           <a:p>
             <a:r>
               <a:rPr lang="en-US" sz="2400" dirty="0"/>
-              <a:t>Comparison between the above NLPs</a:t>
-            </a:r>
-          </a:p>
-          <a:p>
-            <a:r>
-              <a:rPr lang="en-US" sz="2400" dirty="0" err="1"/>
-              <a:t>ClinicalBERT</a:t>
-            </a:r>
-            <a:endParaRPr lang="en-US" sz="2400" dirty="0"/>
+              <a:t>Result Analysis (Evaluation)</a:t>
+            </a:r>
+          </a:p>
+          <a:p>
+            <a:pPr lvl="1"/>
+            <a:r>
+              <a:rPr lang="en-US" sz="2000" dirty="0"/>
+              <a:t>Logistic Regression Model with Original Dataset</a:t>
+            </a:r>
+          </a:p>
+          <a:p>
+            <a:pPr lvl="1"/>
+            <a:r>
+              <a:rPr lang="en-US" sz="2000" dirty="0"/>
+              <a:t>Balanced Logistic Regression Model and Random Forest Model with Cleansing Dataset</a:t>
+            </a:r>
           </a:p>
           <a:p>
             <a:r>
               <a:rPr lang="en-US" sz="2400" dirty="0"/>
               <a:t>Conclusion</a:t>
             </a:r>
+          </a:p>
+          <a:p>
+            <a:endParaRPr lang="en-US" sz="2400" dirty="0"/>
           </a:p>
           <a:p>
             <a:endParaRPr sz="2400" dirty="0"/>
@@ -5065,7 +6913,7 @@
         </p:nvSpPr>
         <p:spPr>
           <a:xfrm>
-            <a:off x="411060" y="434030"/>
+            <a:off x="411060" y="182416"/>
             <a:ext cx="8229600" cy="692094"/>
           </a:xfrm>
         </p:spPr>
@@ -5097,8 +6945,8 @@
         </p:nvSpPr>
         <p:spPr>
           <a:xfrm>
-            <a:off x="718019" y="1300645"/>
-            <a:ext cx="7444075" cy="4339650"/>
+            <a:off x="954290" y="899059"/>
+            <a:ext cx="7235420" cy="6217087"/>
           </a:xfrm>
           <a:prstGeom prst="rect">
             <a:avLst/>
@@ -5117,15 +6965,27 @@
             </a:pPr>
             <a:r>
               <a:rPr lang="en-US" sz="2000" dirty="0"/>
-              <a:t>Dataset: Filtered out </a:t>
-            </a:r>
-            <a:r>
-              <a:rPr lang="en-US" sz="2000" dirty="0" err="1"/>
-              <a:t>dischargesummary</a:t>
-            </a:r>
+              <a:t>Purpose: </a:t>
+            </a:r>
+          </a:p>
+          <a:p>
+            <a:pPr marL="742950" lvl="1" indent="-285750">
+              <a:buFont typeface="Arial" panose="020B0604020202020204" pitchFamily="34" charset="0"/>
+              <a:buChar char="•"/>
+            </a:pPr>
             <a:r>
               <a:rPr lang="en-US" sz="2000" dirty="0"/>
-              <a:t> event for ICD_CODE =430</a:t>
+              <a:t>Build a supervised ML classifier with ICU dataset to predict mortality</a:t>
+            </a:r>
+          </a:p>
+          <a:p>
+            <a:pPr marL="742950" lvl="1" indent="-285750">
+              <a:buFont typeface="Arial" panose="020B0604020202020204" pitchFamily="34" charset="0"/>
+              <a:buChar char="•"/>
+            </a:pPr>
+            <a:r>
+              <a:rPr lang="en-US" sz="2000" dirty="0"/>
+              <a:t>Demonstrate the pipeline: data extraction -&gt; cleaning -&gt; modeling -&gt; evaluation</a:t>
             </a:r>
           </a:p>
           <a:p>
@@ -5133,9 +6993,77 @@
               <a:buFont typeface="Arial" panose="020B0604020202020204" pitchFamily="34" charset="0"/>
               <a:buChar char="•"/>
             </a:pPr>
+            <a:r>
+              <a:rPr lang="en-US" sz="2000" dirty="0"/>
+              <a:t>Background:</a:t>
+            </a:r>
+          </a:p>
+          <a:p>
+            <a:pPr lvl="1"/>
+            <a:r>
+              <a:rPr lang="en-US" sz="2000" dirty="0"/>
+              <a:t>Mortality prediction plays a critical role in the intensive care unit (ICU) due to rapid changes in patient’s condition. Through reliable tools to identify risk factors, early intervention can be applied effectively</a:t>
+            </a:r>
+          </a:p>
+          <a:p>
+            <a:pPr marL="342900" indent="-342900">
+              <a:buFont typeface="Arial" panose="020B0604020202020204" pitchFamily="34" charset="0"/>
+              <a:buChar char="•"/>
+            </a:pPr>
+            <a:r>
+              <a:rPr lang="en-US" sz="2000" dirty="0"/>
+              <a:t>ML for ICU predictive risk model:</a:t>
+            </a:r>
+          </a:p>
+          <a:p>
+            <a:pPr marL="800100" lvl="1" indent="-342900">
+              <a:buFont typeface="Arial" panose="020B0604020202020204" pitchFamily="34" charset="0"/>
+              <a:buChar char="•"/>
+            </a:pPr>
+            <a:r>
+              <a:rPr lang="en-US" sz="2000" dirty="0"/>
+              <a:t>High dimension of ICU data</a:t>
+            </a:r>
+          </a:p>
+          <a:p>
+            <a:pPr marL="800100" lvl="1" indent="-342900">
+              <a:buFont typeface="Arial" panose="020B0604020202020204" pitchFamily="34" charset="0"/>
+              <a:buChar char="•"/>
+            </a:pPr>
+            <a:r>
+              <a:rPr lang="en-US" sz="2000" dirty="0"/>
+              <a:t>Non-linear and complex risk factors</a:t>
+            </a:r>
+          </a:p>
+          <a:p>
+            <a:pPr marL="800100" lvl="1" indent="-342900">
+              <a:buFont typeface="Arial" panose="020B0604020202020204" pitchFamily="34" charset="0"/>
+              <a:buChar char="•"/>
+            </a:pPr>
+            <a:r>
+              <a:rPr lang="en-US" sz="2000" dirty="0"/>
+              <a:t>Large dataset for training, and optimize for generalization</a:t>
+            </a:r>
+          </a:p>
+          <a:p>
+            <a:pPr marL="800100" lvl="1" indent="-342900">
+              <a:buFont typeface="Arial" panose="020B0604020202020204" pitchFamily="34" charset="0"/>
+              <a:buChar char="•"/>
+            </a:pPr>
             <a:endParaRPr lang="en-US" sz="2000" dirty="0"/>
           </a:p>
           <a:p>
+            <a:pPr marL="800100" lvl="1" indent="-342900">
+              <a:buFont typeface="Arial" panose="020B0604020202020204" pitchFamily="34" charset="0"/>
+              <a:buChar char="•"/>
+            </a:pPr>
+            <a:endParaRPr lang="en-US" sz="2000" dirty="0"/>
+          </a:p>
+          <a:p>
+            <a:pPr lvl="1"/>
+            <a:endParaRPr lang="en-US" sz="2000" dirty="0"/>
+          </a:p>
+          <a:p>
             <a:pPr marL="285750" indent="-285750">
               <a:buFont typeface="Arial" panose="020B0604020202020204" pitchFamily="34" charset="0"/>
               <a:buChar char="•"/>
@@ -5143,146 +7071,21 @@
             <a:endParaRPr lang="en-US" sz="2000" dirty="0"/>
           </a:p>
           <a:p>
+            <a:pPr marL="742950" lvl="1" indent="-285750">
+              <a:buFont typeface="Arial" panose="020B0604020202020204" pitchFamily="34" charset="0"/>
+              <a:buChar char="•"/>
+            </a:pPr>
+            <a:endParaRPr lang="en-US" sz="2000" dirty="0"/>
+          </a:p>
+          <a:p>
             <a:pPr marL="285750" indent="-285750">
               <a:buFont typeface="Arial" panose="020B0604020202020204" pitchFamily="34" charset="0"/>
               <a:buChar char="•"/>
             </a:pPr>
-            <a:endParaRPr lang="en-US" sz="2000" dirty="0"/>
-          </a:p>
-          <a:p>
-            <a:pPr marL="285750" indent="-285750">
-              <a:buFont typeface="Arial" panose="020B0604020202020204" pitchFamily="34" charset="0"/>
-              <a:buChar char="•"/>
-            </a:pPr>
-            <a:endParaRPr lang="en-US" sz="2000" dirty="0"/>
-          </a:p>
-          <a:p>
-            <a:pPr marL="285750" indent="-285750">
-              <a:buFont typeface="Arial" panose="020B0604020202020204" pitchFamily="34" charset="0"/>
-              <a:buChar char="•"/>
-            </a:pPr>
-            <a:endParaRPr lang="en-US" sz="2000" dirty="0"/>
-          </a:p>
-          <a:p>
-            <a:pPr marL="285750" indent="-285750">
-              <a:buFont typeface="Arial" panose="020B0604020202020204" pitchFamily="34" charset="0"/>
-              <a:buChar char="•"/>
-            </a:pPr>
-            <a:r>
-              <a:rPr lang="en-US" sz="2000" dirty="0"/>
-              <a:t>Locally installed the required library instead of </a:t>
-            </a:r>
-            <a:r>
-              <a:rPr lang="en-US" sz="2000" dirty="0" err="1"/>
-              <a:t>Colab</a:t>
-            </a:r>
-            <a:r>
-              <a:rPr lang="en-US" sz="2000" dirty="0"/>
-              <a:t> due to issues @Colab (slowness, memory, session level installation) to achieve better performance and smooth coding experience</a:t>
-            </a:r>
-          </a:p>
-          <a:p>
-            <a:pPr marL="285750" indent="-285750">
-              <a:buFont typeface="Arial" panose="020B0604020202020204" pitchFamily="34" charset="0"/>
-              <a:buChar char="•"/>
-            </a:pPr>
-            <a:r>
-              <a:rPr lang="en-US" sz="2000" dirty="0"/>
-              <a:t>Analysis covers Spacy, </a:t>
-            </a:r>
-            <a:r>
-              <a:rPr lang="en-US" sz="2000" dirty="0" err="1"/>
-              <a:t>Scispacy</a:t>
-            </a:r>
-            <a:r>
-              <a:rPr lang="en-US" sz="2000" dirty="0"/>
-              <a:t>, </a:t>
-            </a:r>
-            <a:r>
-              <a:rPr lang="en-US" sz="2000" dirty="0" err="1"/>
-              <a:t>medspacy</a:t>
-            </a:r>
-            <a:r>
-              <a:rPr lang="en-US" sz="2000" dirty="0"/>
-              <a:t> and </a:t>
-            </a:r>
-            <a:r>
-              <a:rPr lang="en-US" sz="2000" dirty="0" err="1"/>
-              <a:t>ClinicalBERT</a:t>
-            </a:r>
-            <a:r>
-              <a:rPr lang="en-US" sz="2000" dirty="0"/>
-              <a:t>, and the detail comparison between spacy, </a:t>
-            </a:r>
-            <a:r>
-              <a:rPr lang="en-US" sz="2000" dirty="0" err="1"/>
-              <a:t>scispacy</a:t>
-            </a:r>
-            <a:r>
-              <a:rPr lang="en-US" sz="2000" dirty="0"/>
-              <a:t> and </a:t>
-            </a:r>
-            <a:r>
-              <a:rPr lang="en-US" sz="2000" dirty="0" err="1"/>
-              <a:t>medspacy</a:t>
-            </a:r>
-            <a:r>
-              <a:rPr lang="en-US" sz="2000" dirty="0"/>
-              <a:t> </a:t>
-            </a:r>
-          </a:p>
-          <a:p>
-            <a:pPr marL="285750" indent="-285750">
-              <a:buFont typeface="Arial" panose="020B0604020202020204" pitchFamily="34" charset="0"/>
-              <a:buChar char="•"/>
-            </a:pPr>
-            <a:r>
-              <a:rPr lang="en-US" sz="2000" dirty="0"/>
-              <a:t>Next steps are covered in the conclusion</a:t>
-            </a:r>
-          </a:p>
-          <a:p>
             <a:endParaRPr lang="en-US" dirty="0"/>
           </a:p>
-          <a:p>
-            <a:pPr marL="285750" indent="-285750">
-              <a:buFont typeface="Arial" panose="020B0604020202020204" pitchFamily="34" charset="0"/>
-              <a:buChar char="•"/>
-            </a:pPr>
-            <a:endParaRPr lang="en-US" dirty="0"/>
-          </a:p>
-        </p:txBody>
-      </p:sp>
-      <p:pic>
-        <p:nvPicPr>
-          <p:cNvPr id="8" name="Picture 7">
-            <a:extLst>
-              <a:ext uri="{FF2B5EF4-FFF2-40B4-BE49-F238E27FC236}">
-                <a16:creationId xmlns:a16="http://schemas.microsoft.com/office/drawing/2014/main" id="{36867C9F-B010-D4F9-8CA3-CBB533235BA8}"/>
-              </a:ext>
-            </a:extLst>
-          </p:cNvPr>
-          <p:cNvPicPr>
-            <a:picLocks noChangeAspect="1"/>
-          </p:cNvPicPr>
-          <p:nvPr/>
-        </p:nvPicPr>
-        <p:blipFill>
-          <a:blip r:embed="rId3"/>
-          <a:stretch>
-            <a:fillRect/>
-          </a:stretch>
-        </p:blipFill>
-        <p:spPr>
-          <a:xfrm>
-            <a:off x="718019" y="1796423"/>
-            <a:ext cx="7640843" cy="1233519"/>
-          </a:xfrm>
-          <a:prstGeom prst="rect">
-            <a:avLst/>
-          </a:prstGeom>
-        </p:spPr>
-      </p:pic>
+        </p:txBody>
+      </p:sp>
     </p:spTree>
   </p:cSld>
   <p:clrMapOvr>
@@ -5344,14 +7147,14 @@
           <a:p>
             <a:r>
               <a:rPr lang="en-US" sz="4000" dirty="0"/>
-              <a:t>Spacy</a:t>
+              <a:t>EDA I</a:t>
             </a:r>
             <a:br>
               <a:rPr lang="en-US" sz="4000" dirty="0"/>
             </a:br>
             <a:r>
               <a:rPr lang="en-US" sz="3100" dirty="0"/>
-              <a:t>Model, extracted event label </a:t>
+              <a:t>Exploratory Data Analysis</a:t>
             </a:r>
             <a:endParaRPr sz="3100" dirty="0"/>
           </a:p>
@@ -5359,10 +7162,10 @@
       </p:sp>
       <p:sp>
         <p:nvSpPr>
-          <p:cNvPr id="10" name="TextBox 9">
+          <p:cNvPr id="3" name="TextBox 2">
             <a:extLst>
               <a:ext uri="{FF2B5EF4-FFF2-40B4-BE49-F238E27FC236}">
-                <a16:creationId xmlns:a16="http://schemas.microsoft.com/office/drawing/2014/main" id="{F9F048CD-09E7-914D-F178-501108C3EC83}"/>
+                <a16:creationId xmlns:a16="http://schemas.microsoft.com/office/drawing/2014/main" id="{56B81CC2-C156-93A8-6FF2-CC56967A93E0}"/>
               </a:ext>
             </a:extLst>
           </p:cNvPr>
@@ -5371,8 +7174,8 @@
         </p:nvSpPr>
         <p:spPr>
           <a:xfrm>
-            <a:off x="555334" y="1361997"/>
-            <a:ext cx="8407457" cy="2554545"/>
+            <a:off x="1098507" y="1497407"/>
+            <a:ext cx="7189393" cy="6494085"/>
           </a:xfrm>
           <a:prstGeom prst="rect">
             <a:avLst/>
@@ -5386,101 +7189,175 @@
           <a:lstStyle/>
           <a:p>
             <a:pPr marL="285750" indent="-285750">
-              <a:lnSpc>
-                <a:spcPct val="200000"/>
-              </a:lnSpc>
               <a:buFont typeface="Arial" panose="020B0604020202020204" pitchFamily="34" charset="0"/>
               <a:buChar char="•"/>
             </a:pPr>
             <a:r>
               <a:rPr lang="en-US" sz="2000" dirty="0"/>
-              <a:t>Model: </a:t>
-            </a:r>
-            <a:r>
-              <a:rPr lang="en-US" sz="2000" dirty="0" err="1"/>
-              <a:t>en_core_web_sm</a:t>
-            </a:r>
+              <a:t>Dataset Extraction: </a:t>
+            </a:r>
+          </a:p>
+          <a:p>
+            <a:pPr marL="742950" lvl="1" indent="-285750">
+              <a:buFont typeface="Wingdings" panose="05000000000000000000" pitchFamily="2" charset="2"/>
+              <a:buChar char="Ø"/>
+            </a:pPr>
+            <a:r>
+              <a:rPr lang="en-US" dirty="0"/>
+              <a:t>Use public available ICU data from Kaggle: </a:t>
+            </a:r>
+            <a:r>
+              <a:rPr lang="en-US" dirty="0">
+                <a:hlinkClick r:id="rId2"/>
+              </a:rPr>
+              <a:t>ICU Patient Monitoring &amp; Mortality Prediction</a:t>
+            </a:r>
+            <a:endParaRPr lang="en-US" dirty="0"/>
+          </a:p>
+          <a:p>
+            <a:pPr marL="742950" lvl="1" indent="-285750">
+              <a:buFont typeface="Wingdings" panose="05000000000000000000" pitchFamily="2" charset="2"/>
+              <a:buChar char="Ø"/>
+            </a:pPr>
+            <a:r>
+              <a:rPr lang="en-US" dirty="0"/>
+              <a:t>Contains 15,000 synthetic intensive care unit (ICU) patient records</a:t>
+            </a:r>
+          </a:p>
+          <a:p>
+            <a:pPr marL="742950" lvl="1" indent="-285750">
+              <a:buFont typeface="Wingdings" panose="05000000000000000000" pitchFamily="2" charset="2"/>
+              <a:buChar char="Ø"/>
+            </a:pPr>
+            <a:r>
+              <a:rPr lang="en-US" dirty="0"/>
+              <a:t>Each row represents a single ICU admission with aggregated vital sign statistics, treatment interventions, organ failure severity scores, and outcome labels.</a:t>
+            </a:r>
+          </a:p>
+          <a:p>
+            <a:pPr marL="742950" lvl="1" indent="-285750" fontAlgn="base">
+              <a:buFont typeface="Wingdings" panose="05000000000000000000" pitchFamily="2" charset="2"/>
+              <a:buChar char="Ø"/>
+            </a:pPr>
+            <a:r>
+              <a:rPr lang="en-US" dirty="0"/>
+              <a:t>The </a:t>
+            </a:r>
+            <a:r>
+              <a:rPr lang="en-US" dirty="0" err="1"/>
+              <a:t>mortality_label</a:t>
+            </a:r>
+            <a:r>
+              <a:rPr lang="en-US" dirty="0"/>
+              <a:t> column represents:</a:t>
+            </a:r>
+          </a:p>
+          <a:p>
+            <a:pPr marL="1200150" lvl="2" indent="-285750" fontAlgn="base">
+              <a:buFont typeface="Wingdings" panose="05000000000000000000" pitchFamily="2" charset="2"/>
+              <a:buChar char="ü"/>
+            </a:pPr>
+            <a:r>
+              <a:rPr lang="en-US" dirty="0"/>
+              <a:t>0 = Survived ICU stay</a:t>
+            </a:r>
+          </a:p>
+          <a:p>
+            <a:pPr marL="1200150" lvl="2" indent="-285750" fontAlgn="base">
+              <a:buFont typeface="Wingdings" panose="05000000000000000000" pitchFamily="2" charset="2"/>
+              <a:buChar char="ü"/>
+            </a:pPr>
+            <a:r>
+              <a:rPr lang="en-US" dirty="0"/>
+              <a:t>1 = Deceased during ICU stay</a:t>
+            </a:r>
+          </a:p>
+          <a:p>
+            <a:pPr lvl="2" fontAlgn="base"/>
+            <a:endParaRPr lang="en-US" dirty="0"/>
+          </a:p>
+          <a:p>
+            <a:pPr marL="342900" indent="-342900" fontAlgn="base">
+              <a:buFont typeface="Arial" panose="020B0604020202020204" pitchFamily="34" charset="0"/>
+              <a:buChar char="•"/>
+            </a:pPr>
+            <a:r>
+              <a:rPr lang="en-US" sz="2000" dirty="0"/>
+              <a:t>Dataset Analysis</a:t>
+            </a:r>
+          </a:p>
+          <a:p>
+            <a:pPr marL="742950" lvl="1" indent="-285750" fontAlgn="base">
+              <a:buFont typeface="Wingdings" panose="05000000000000000000" pitchFamily="2" charset="2"/>
+              <a:buChar char="Ø"/>
+            </a:pPr>
+            <a:r>
+              <a:rPr lang="en-US" dirty="0"/>
+              <a:t>The mortality label distribution:</a:t>
+            </a:r>
+          </a:p>
+          <a:p>
+            <a:pPr fontAlgn="base"/>
+            <a:endParaRPr lang="en-US" dirty="0"/>
+          </a:p>
+          <a:p>
+            <a:pPr marL="742950" lvl="1" indent="-285750">
+              <a:buFont typeface="Arial" panose="020B0604020202020204" pitchFamily="34" charset="0"/>
+              <a:buChar char="•"/>
+            </a:pPr>
+            <a:endParaRPr lang="en-US" dirty="0"/>
+          </a:p>
+          <a:p>
+            <a:pPr marL="742950" lvl="1" indent="-285750">
+              <a:buFont typeface="Arial" panose="020B0604020202020204" pitchFamily="34" charset="0"/>
+              <a:buChar char="•"/>
+            </a:pPr>
             <a:endParaRPr lang="en-US" sz="2000" dirty="0"/>
           </a:p>
           <a:p>
+            <a:pPr lvl="1"/>
+            <a:endParaRPr lang="en-US" sz="2000" dirty="0"/>
+          </a:p>
+          <a:p>
+            <a:pPr marL="800100" lvl="1" indent="-342900">
+              <a:buFont typeface="Arial" panose="020B0604020202020204" pitchFamily="34" charset="0"/>
+              <a:buChar char="•"/>
+            </a:pPr>
+            <a:endParaRPr lang="en-US" sz="2000" dirty="0"/>
+          </a:p>
+          <a:p>
+            <a:pPr lvl="1"/>
+            <a:endParaRPr lang="en-US" sz="2000" dirty="0"/>
+          </a:p>
+          <a:p>
             <a:pPr marL="285750" indent="-285750">
-              <a:lnSpc>
-                <a:spcPct val="250000"/>
-              </a:lnSpc>
-              <a:buFont typeface="Arial" panose="020B0604020202020204" pitchFamily="34" charset="0"/>
-              <a:buChar char="•"/>
-            </a:pPr>
-            <a:r>
-              <a:rPr lang="en-US" sz="2000" dirty="0"/>
-              <a:t>Generated </a:t>
-            </a:r>
-            <a:r>
-              <a:rPr lang="en-US" sz="2000" dirty="0" err="1"/>
-              <a:t>Datasize</a:t>
-            </a:r>
-            <a:r>
-              <a:rPr lang="en-US" sz="2000" dirty="0"/>
-              <a:t>: </a:t>
-            </a:r>
+              <a:buFont typeface="Arial" panose="020B0604020202020204" pitchFamily="34" charset="0"/>
+              <a:buChar char="•"/>
+            </a:pPr>
+            <a:endParaRPr lang="en-US" sz="2000" dirty="0"/>
+          </a:p>
+          <a:p>
+            <a:pPr marL="742950" lvl="1" indent="-285750">
+              <a:buFont typeface="Arial" panose="020B0604020202020204" pitchFamily="34" charset="0"/>
+              <a:buChar char="•"/>
+            </a:pPr>
+            <a:endParaRPr lang="en-US" sz="2000" dirty="0"/>
           </a:p>
           <a:p>
             <a:pPr marL="285750" indent="-285750">
-              <a:lnSpc>
-                <a:spcPct val="250000"/>
-              </a:lnSpc>
-              <a:buFont typeface="Arial" panose="020B0604020202020204" pitchFamily="34" charset="0"/>
-              <a:buChar char="•"/>
-            </a:pPr>
-            <a:r>
-              <a:rPr lang="en-US" sz="2000" dirty="0"/>
-              <a:t>Extracted Event (label): </a:t>
-            </a:r>
-          </a:p>
-          <a:p>
-            <a:pPr marL="285750" indent="-285750">
-              <a:buFont typeface="Arial" panose="020B0604020202020204" pitchFamily="34" charset="0"/>
-              <a:buChar char="•"/>
-            </a:pPr>
-            <a:endParaRPr lang="en-US" sz="2000" dirty="0"/>
+              <a:buFont typeface="Arial" panose="020B0604020202020204" pitchFamily="34" charset="0"/>
+              <a:buChar char="•"/>
+            </a:pPr>
+            <a:endParaRPr lang="en-US" dirty="0"/>
           </a:p>
         </p:txBody>
       </p:sp>
       <p:pic>
         <p:nvPicPr>
-          <p:cNvPr id="4" name="Picture 3">
+          <p:cNvPr id="7" name="Picture 6">
             <a:extLst>
               <a:ext uri="{FF2B5EF4-FFF2-40B4-BE49-F238E27FC236}">
-                <a16:creationId xmlns:a16="http://schemas.microsoft.com/office/drawing/2014/main" id="{F40EFD02-3BD7-682D-867E-32F7D97B7586}"/>
-              </a:ext>
-            </a:extLst>
-          </p:cNvPr>
-          <p:cNvPicPr>
-            <a:picLocks noChangeAspect="1"/>
-          </p:cNvPicPr>
-          <p:nvPr/>
-        </p:nvPicPr>
-        <p:blipFill>
-          <a:blip r:embed="rId2"/>
-          <a:stretch>
-            <a:fillRect/>
-          </a:stretch>
-        </p:blipFill>
-        <p:spPr>
-          <a:xfrm>
-            <a:off x="989951" y="2752123"/>
-            <a:ext cx="2228965" cy="330217"/>
-          </a:xfrm>
-          <a:prstGeom prst="rect">
-            <a:avLst/>
-          </a:prstGeom>
-        </p:spPr>
-      </p:pic>
-      <p:pic>
-        <p:nvPicPr>
-          <p:cNvPr id="6" name="Picture 5">
-            <a:extLst>
-              <a:ext uri="{FF2B5EF4-FFF2-40B4-BE49-F238E27FC236}">
-                <a16:creationId xmlns:a16="http://schemas.microsoft.com/office/drawing/2014/main" id="{4C8D1E7C-FCC8-7BDF-D7B5-00128A7DC86D}"/>
+                <a16:creationId xmlns:a16="http://schemas.microsoft.com/office/drawing/2014/main" id="{32A1A7B0-FCCF-EFDE-4CAF-13B19B164AB2}"/>
               </a:ext>
             </a:extLst>
           </p:cNvPr>
@@ -5497,8 +7374,8 @@
         </p:blipFill>
         <p:spPr>
           <a:xfrm>
-            <a:off x="856202" y="3515031"/>
-            <a:ext cx="6302818" cy="2872227"/>
+            <a:off x="4944757" y="4258249"/>
+            <a:ext cx="3674480" cy="2204688"/>
           </a:xfrm>
           <a:prstGeom prst="rect">
             <a:avLst/>
@@ -5526,7 +7403,7 @@
         <p:cNvPr id="1" name="">
           <a:extLst>
             <a:ext uri="{FF2B5EF4-FFF2-40B4-BE49-F238E27FC236}">
-              <a16:creationId xmlns:a16="http://schemas.microsoft.com/office/drawing/2014/main" id="{1628D760-74CE-E64D-BE3D-31EC383B5735}"/>
+              <a16:creationId xmlns:a16="http://schemas.microsoft.com/office/drawing/2014/main" id="{5EDF5EAD-A41A-4153-6A1E-97B6C3EA07A5}"/>
             </a:ext>
           </a:extLst>
         </p:cNvPr>
@@ -5546,7 +7423,7 @@
           <p:cNvPr id="2" name="Title 1">
             <a:extLst>
               <a:ext uri="{FF2B5EF4-FFF2-40B4-BE49-F238E27FC236}">
-                <a16:creationId xmlns:a16="http://schemas.microsoft.com/office/drawing/2014/main" id="{11E0976B-53C1-C01A-09AF-3C98AFF69290}"/>
+                <a16:creationId xmlns:a16="http://schemas.microsoft.com/office/drawing/2014/main" id="{72E05406-3CFC-03AA-9453-5495FEC81794}"/>
               </a:ext>
             </a:extLst>
           </p:cNvPr>
@@ -5559,8 +7436,8 @@
         </p:nvSpPr>
         <p:spPr>
           <a:xfrm>
-            <a:off x="131887" y="327394"/>
-            <a:ext cx="8229600" cy="936810"/>
+            <a:off x="411172" y="46506"/>
+            <a:ext cx="8229600" cy="1099820"/>
           </a:xfrm>
         </p:spPr>
         <p:txBody>
@@ -5571,16 +7448,119 @@
           <a:p>
             <a:r>
               <a:rPr lang="en-US" sz="4000" dirty="0"/>
-              <a:t>Spacy</a:t>
+              <a:t>EDA II</a:t>
             </a:r>
             <a:br>
               <a:rPr lang="en-US" sz="4000" dirty="0"/>
             </a:br>
             <a:r>
               <a:rPr lang="en-US" sz="3100" dirty="0"/>
-              <a:t>t-SNE based on w2V </a:t>
+              <a:t>Exploratory Data Analysis</a:t>
             </a:r>
             <a:endParaRPr sz="3100" dirty="0"/>
+          </a:p>
+        </p:txBody>
+      </p:sp>
+      <p:sp>
+        <p:nvSpPr>
+          <p:cNvPr id="3" name="TextBox 2">
+            <a:extLst>
+              <a:ext uri="{FF2B5EF4-FFF2-40B4-BE49-F238E27FC236}">
+                <a16:creationId xmlns:a16="http://schemas.microsoft.com/office/drawing/2014/main" id="{FE3F9A4F-378D-AE7D-F45F-92B2EAEBD69E}"/>
+              </a:ext>
+            </a:extLst>
+          </p:cNvPr>
+          <p:cNvSpPr txBox="1"/>
+          <p:nvPr/>
+        </p:nvSpPr>
+        <p:spPr>
+          <a:xfrm>
+            <a:off x="1172089" y="1134052"/>
+            <a:ext cx="7189393" cy="3354765"/>
+          </a:xfrm>
+          <a:prstGeom prst="rect">
+            <a:avLst/>
+          </a:prstGeom>
+          <a:noFill/>
+        </p:spPr>
+        <p:txBody>
+          <a:bodyPr wrap="square" rtlCol="0">
+            <a:spAutoFit/>
+          </a:bodyPr>
+          <a:lstStyle/>
+          <a:p>
+            <a:pPr marL="342900" indent="-342900" fontAlgn="base">
+              <a:buFont typeface="Arial" panose="020B0604020202020204" pitchFamily="34" charset="0"/>
+              <a:buChar char="•"/>
+            </a:pPr>
+            <a:r>
+              <a:rPr lang="en-US" sz="2000" dirty="0"/>
+              <a:t>Dataset Analysis</a:t>
+            </a:r>
+          </a:p>
+          <a:p>
+            <a:pPr marL="742950" lvl="1" indent="-285750" fontAlgn="base">
+              <a:buFont typeface="Wingdings" panose="05000000000000000000" pitchFamily="2" charset="2"/>
+              <a:buChar char="Ø"/>
+            </a:pPr>
+            <a:r>
+              <a:rPr lang="en-US" dirty="0"/>
+              <a:t>Number of features distribution:</a:t>
+            </a:r>
+          </a:p>
+          <a:p>
+            <a:pPr fontAlgn="base"/>
+            <a:endParaRPr lang="en-US" dirty="0"/>
+          </a:p>
+          <a:p>
+            <a:pPr marL="742950" lvl="1" indent="-285750">
+              <a:buFont typeface="Arial" panose="020B0604020202020204" pitchFamily="34" charset="0"/>
+              <a:buChar char="•"/>
+            </a:pPr>
+            <a:endParaRPr lang="en-US" dirty="0"/>
+          </a:p>
+          <a:p>
+            <a:pPr marL="742950" lvl="1" indent="-285750">
+              <a:buFont typeface="Arial" panose="020B0604020202020204" pitchFamily="34" charset="0"/>
+              <a:buChar char="•"/>
+            </a:pPr>
+            <a:endParaRPr lang="en-US" sz="2000" dirty="0"/>
+          </a:p>
+          <a:p>
+            <a:pPr lvl="1"/>
+            <a:endParaRPr lang="en-US" sz="2000" dirty="0"/>
+          </a:p>
+          <a:p>
+            <a:pPr marL="800100" lvl="1" indent="-342900">
+              <a:buFont typeface="Arial" panose="020B0604020202020204" pitchFamily="34" charset="0"/>
+              <a:buChar char="•"/>
+            </a:pPr>
+            <a:endParaRPr lang="en-US" sz="2000" dirty="0"/>
+          </a:p>
+          <a:p>
+            <a:pPr lvl="1"/>
+            <a:endParaRPr lang="en-US" sz="2000" dirty="0"/>
+          </a:p>
+          <a:p>
+            <a:pPr marL="285750" indent="-285750">
+              <a:buFont typeface="Arial" panose="020B0604020202020204" pitchFamily="34" charset="0"/>
+              <a:buChar char="•"/>
+            </a:pPr>
+            <a:endParaRPr lang="en-US" sz="2000" dirty="0"/>
+          </a:p>
+          <a:p>
+            <a:pPr marL="742950" lvl="1" indent="-285750">
+              <a:buFont typeface="Arial" panose="020B0604020202020204" pitchFamily="34" charset="0"/>
+              <a:buChar char="•"/>
+            </a:pPr>
+            <a:endParaRPr lang="en-US" sz="2000" dirty="0"/>
+          </a:p>
+          <a:p>
+            <a:pPr marL="285750" indent="-285750">
+              <a:buFont typeface="Arial" panose="020B0604020202020204" pitchFamily="34" charset="0"/>
+              <a:buChar char="•"/>
+            </a:pPr>
+            <a:endParaRPr lang="en-US" dirty="0"/>
           </a:p>
         </p:txBody>
       </p:sp>
@@ -5589,7 +7569,7 @@
           <p:cNvPr id="5" name="Picture 4">
             <a:extLst>
               <a:ext uri="{FF2B5EF4-FFF2-40B4-BE49-F238E27FC236}">
-                <a16:creationId xmlns:a16="http://schemas.microsoft.com/office/drawing/2014/main" id="{94034BEA-A089-3497-A575-881BA114ED89}"/>
+                <a16:creationId xmlns:a16="http://schemas.microsoft.com/office/drawing/2014/main" id="{CB399567-D04A-9F2D-4D47-71B8889B4B4A}"/>
               </a:ext>
             </a:extLst>
           </p:cNvPr>
@@ -5606,132 +7586,18 @@
         </p:blipFill>
         <p:spPr>
           <a:xfrm>
-            <a:off x="372544" y="4028802"/>
-            <a:ext cx="8398912" cy="2501804"/>
+            <a:off x="1246031" y="1787667"/>
+            <a:ext cx="7408410" cy="4778830"/>
           </a:xfrm>
           <a:prstGeom prst="rect">
             <a:avLst/>
           </a:prstGeom>
         </p:spPr>
       </p:pic>
-      <p:sp>
-        <p:nvSpPr>
-          <p:cNvPr id="9" name="TextBox 8">
-            <a:extLst>
-              <a:ext uri="{FF2B5EF4-FFF2-40B4-BE49-F238E27FC236}">
-                <a16:creationId xmlns:a16="http://schemas.microsoft.com/office/drawing/2014/main" id="{C3DA19B5-D2B7-1460-6A4D-2D062FFE1ABB}"/>
-              </a:ext>
-            </a:extLst>
-          </p:cNvPr>
-          <p:cNvSpPr txBox="1"/>
-          <p:nvPr/>
-        </p:nvSpPr>
-        <p:spPr>
-          <a:xfrm>
-            <a:off x="575776" y="1754759"/>
-            <a:ext cx="8407457" cy="3170099"/>
-          </a:xfrm>
-          <a:prstGeom prst="rect">
-            <a:avLst/>
-          </a:prstGeom>
-          <a:noFill/>
-        </p:spPr>
-        <p:txBody>
-          <a:bodyPr wrap="square" rtlCol="0">
-            <a:spAutoFit/>
-          </a:bodyPr>
-          <a:lstStyle/>
-          <a:p>
-            <a:pPr marL="285750" indent="-285750">
-              <a:buFont typeface="Arial" panose="020B0604020202020204" pitchFamily="34" charset="0"/>
-              <a:buChar char="•"/>
-            </a:pPr>
-            <a:r>
-              <a:rPr lang="en-US" sz="2000" dirty="0"/>
-              <a:t>Three t-SNE generated based on perp and </a:t>
-            </a:r>
-            <a:r>
-              <a:rPr lang="en-US" sz="2000" dirty="0" err="1"/>
-              <a:t>lr</a:t>
-            </a:r>
-            <a:r>
-              <a:rPr lang="en-US" sz="2000" dirty="0"/>
-              <a:t> with label as legend, overall, those three set of parameters generates coherent region, with slightly difference: </a:t>
-            </a:r>
-          </a:p>
-          <a:p>
-            <a:pPr marL="742950" lvl="1" indent="-285750">
-              <a:buFont typeface="Arial" panose="020B0604020202020204" pitchFamily="34" charset="0"/>
-              <a:buChar char="•"/>
-            </a:pPr>
-            <a:r>
-              <a:rPr lang="en-US" sz="2000" dirty="0"/>
-              <a:t>Perp =10, </a:t>
-            </a:r>
-            <a:r>
-              <a:rPr lang="en-US" sz="2000" dirty="0" err="1"/>
-              <a:t>lr</a:t>
-            </a:r>
-            <a:r>
-              <a:rPr lang="en-US" sz="2000" dirty="0"/>
-              <a:t>=200 shows small, scattered cluster with high fragmentation</a:t>
-            </a:r>
-          </a:p>
-          <a:p>
-            <a:pPr marL="742950" lvl="1" indent="-285750">
-              <a:buFont typeface="Arial" panose="020B0604020202020204" pitchFamily="34" charset="0"/>
-              <a:buChar char="•"/>
-            </a:pPr>
-            <a:r>
-              <a:rPr lang="en-US" sz="2000" dirty="0"/>
-              <a:t>Perp =30, </a:t>
-            </a:r>
-            <a:r>
-              <a:rPr lang="en-US" sz="2000" dirty="0" err="1"/>
-              <a:t>lr</a:t>
-            </a:r>
-            <a:r>
-              <a:rPr lang="en-US" sz="2000" dirty="0"/>
-              <a:t>=Auto, shows more coherent cluster without over fragmentation</a:t>
-            </a:r>
-          </a:p>
-          <a:p>
-            <a:pPr marL="742950" lvl="1" indent="-285750">
-              <a:buFont typeface="Arial" panose="020B0604020202020204" pitchFamily="34" charset="0"/>
-              <a:buChar char="•"/>
-            </a:pPr>
-            <a:r>
-              <a:rPr lang="en-US" sz="2000" dirty="0"/>
-              <a:t>Perp =50, </a:t>
-            </a:r>
-            <a:r>
-              <a:rPr lang="en-US" sz="2000" dirty="0" err="1"/>
-              <a:t>lr</a:t>
-            </a:r>
-            <a:r>
-              <a:rPr lang="en-US" sz="2000" dirty="0"/>
-              <a:t>=500, shows bit local smooth-out, and broader neighbor. </a:t>
-            </a:r>
-          </a:p>
-          <a:p>
-            <a:endParaRPr lang="en-US" sz="2000" dirty="0"/>
-          </a:p>
-          <a:p>
-            <a:pPr marL="285750" indent="-285750">
-              <a:buFont typeface="Arial" panose="020B0604020202020204" pitchFamily="34" charset="0"/>
-              <a:buChar char="•"/>
-            </a:pPr>
-            <a:endParaRPr lang="en-US" sz="2000" dirty="0"/>
-          </a:p>
-          <a:p>
-            <a:endParaRPr lang="en-US" sz="2000" dirty="0"/>
-          </a:p>
-        </p:txBody>
-      </p:sp>
     </p:spTree>
     <p:extLst>
       <p:ext uri="{BB962C8B-B14F-4D97-AF65-F5344CB8AC3E}">
-        <p14:creationId xmlns:p14="http://schemas.microsoft.com/office/powerpoint/2010/main" val="2712932486"/>
+        <p14:creationId xmlns:p14="http://schemas.microsoft.com/office/powerpoint/2010/main" val="3884236556"/>
       </p:ext>
     </p:extLst>
   </p:cSld>
@@ -5749,7 +7615,7 @@
         <p:cNvPr id="1" name="">
           <a:extLst>
             <a:ext uri="{FF2B5EF4-FFF2-40B4-BE49-F238E27FC236}">
-              <a16:creationId xmlns:a16="http://schemas.microsoft.com/office/drawing/2014/main" id="{A27181A9-78FB-F083-1069-330F02DEB8C3}"/>
+              <a16:creationId xmlns:a16="http://schemas.microsoft.com/office/drawing/2014/main" id="{A46147F0-A12F-A627-E892-6CB73E6E1F0A}"/>
             </a:ext>
           </a:extLst>
         </p:cNvPr>
@@ -5769,7 +7635,7 @@
           <p:cNvPr id="2" name="Title 1">
             <a:extLst>
               <a:ext uri="{FF2B5EF4-FFF2-40B4-BE49-F238E27FC236}">
-                <a16:creationId xmlns:a16="http://schemas.microsoft.com/office/drawing/2014/main" id="{3CD02172-6528-149F-C249-18B441AB0CF4}"/>
+                <a16:creationId xmlns:a16="http://schemas.microsoft.com/office/drawing/2014/main" id="{5E6CF319-5E5D-4458-053F-F5B4389D2901}"/>
               </a:ext>
             </a:extLst>
           </p:cNvPr>
@@ -5782,7 +7648,7 @@
         </p:nvSpPr>
         <p:spPr>
           <a:xfrm>
-            <a:off x="322131" y="327394"/>
+            <a:off x="411172" y="46506"/>
             <a:ext cx="8229600" cy="1099820"/>
           </a:xfrm>
         </p:spPr>
@@ -5793,19 +7659,15 @@
           <a:lstStyle/>
           <a:p>
             <a:r>
-              <a:rPr lang="en-US" sz="4000" dirty="0" err="1"/>
-              <a:t>Scispacy</a:t>
-            </a:r>
-            <a:r>
               <a:rPr lang="en-US" sz="4000" dirty="0"/>
-              <a:t> &amp; bc5cdr</a:t>
+              <a:t>EDA III</a:t>
             </a:r>
             <a:br>
               <a:rPr lang="en-US" sz="4000" dirty="0"/>
             </a:br>
             <a:r>
               <a:rPr lang="en-US" sz="3100" dirty="0"/>
-              <a:t>Model, extracted event label </a:t>
+              <a:t>Exploratory Data Analysis</a:t>
             </a:r>
             <a:endParaRPr sz="3100" dirty="0"/>
           </a:p>
@@ -5813,10 +7675,10 @@
       </p:sp>
       <p:sp>
         <p:nvSpPr>
-          <p:cNvPr id="10" name="TextBox 9">
+          <p:cNvPr id="3" name="TextBox 2">
             <a:extLst>
               <a:ext uri="{FF2B5EF4-FFF2-40B4-BE49-F238E27FC236}">
-                <a16:creationId xmlns:a16="http://schemas.microsoft.com/office/drawing/2014/main" id="{283A89BB-048D-FCF8-DE04-7A2E302FDFBD}"/>
+                <a16:creationId xmlns:a16="http://schemas.microsoft.com/office/drawing/2014/main" id="{02C68B31-AE7B-9CB1-B8D5-E967D96A2D37}"/>
               </a:ext>
             </a:extLst>
           </p:cNvPr>
@@ -5825,8 +7687,8 @@
         </p:nvSpPr>
         <p:spPr>
           <a:xfrm>
-            <a:off x="555334" y="1361997"/>
-            <a:ext cx="8407457" cy="2554545"/>
+            <a:off x="1172089" y="1134052"/>
+            <a:ext cx="7189393" cy="3908762"/>
           </a:xfrm>
           <a:prstGeom prst="rect">
             <a:avLst/>
@@ -5839,75 +7701,111 @@
           </a:bodyPr>
           <a:lstStyle/>
           <a:p>
+            <a:pPr marL="342900" indent="-342900" fontAlgn="base">
+              <a:buFont typeface="Arial" panose="020B0604020202020204" pitchFamily="34" charset="0"/>
+              <a:buChar char="•"/>
+            </a:pPr>
+            <a:r>
+              <a:rPr lang="en-US" sz="2000" dirty="0"/>
+              <a:t>Dataset Analysis</a:t>
+            </a:r>
+          </a:p>
+          <a:p>
+            <a:pPr marL="742950" lvl="1" indent="-285750" fontAlgn="base">
+              <a:buFont typeface="Wingdings" panose="05000000000000000000" pitchFamily="2" charset="2"/>
+              <a:buChar char="Ø"/>
+            </a:pPr>
+            <a:r>
+              <a:rPr lang="en-US" dirty="0"/>
+              <a:t>Features correlation Map: </a:t>
+            </a:r>
+            <a:r>
+              <a:rPr lang="en-US" dirty="0" err="1"/>
+              <a:t>heart_rate_max</a:t>
+            </a:r>
+            <a:r>
+              <a:rPr lang="en-US" dirty="0"/>
+              <a:t>, </a:t>
+            </a:r>
+            <a:r>
+              <a:rPr lang="en-US" dirty="0" err="1"/>
+              <a:t>heart_rate_min</a:t>
+            </a:r>
+            <a:r>
+              <a:rPr lang="en-US" dirty="0"/>
+              <a:t> and </a:t>
+            </a:r>
+            <a:r>
+              <a:rPr lang="en-US" dirty="0" err="1"/>
+              <a:t>heart_rate_mean</a:t>
+            </a:r>
+            <a:r>
+              <a:rPr lang="en-US" dirty="0"/>
+              <a:t> are highly correlated due to same risk factor with different aggregation</a:t>
+            </a:r>
+          </a:p>
+          <a:p>
+            <a:pPr fontAlgn="base"/>
+            <a:endParaRPr lang="en-US" dirty="0"/>
+          </a:p>
+          <a:p>
+            <a:pPr marL="742950" lvl="1" indent="-285750">
+              <a:buFont typeface="Arial" panose="020B0604020202020204" pitchFamily="34" charset="0"/>
+              <a:buChar char="•"/>
+            </a:pPr>
+            <a:endParaRPr lang="en-US" dirty="0"/>
+          </a:p>
+          <a:p>
+            <a:pPr marL="742950" lvl="1" indent="-285750">
+              <a:buFont typeface="Arial" panose="020B0604020202020204" pitchFamily="34" charset="0"/>
+              <a:buChar char="•"/>
+            </a:pPr>
+            <a:endParaRPr lang="en-US" sz="2000" dirty="0"/>
+          </a:p>
+          <a:p>
+            <a:pPr lvl="1"/>
+            <a:endParaRPr lang="en-US" sz="2000" dirty="0"/>
+          </a:p>
+          <a:p>
+            <a:pPr marL="800100" lvl="1" indent="-342900">
+              <a:buFont typeface="Arial" panose="020B0604020202020204" pitchFamily="34" charset="0"/>
+              <a:buChar char="•"/>
+            </a:pPr>
+            <a:endParaRPr lang="en-US" sz="2000" dirty="0"/>
+          </a:p>
+          <a:p>
+            <a:pPr lvl="1"/>
+            <a:endParaRPr lang="en-US" sz="2000" dirty="0"/>
+          </a:p>
+          <a:p>
             <a:pPr marL="285750" indent="-285750">
-              <a:lnSpc>
-                <a:spcPct val="200000"/>
-              </a:lnSpc>
-              <a:buFont typeface="Arial" panose="020B0604020202020204" pitchFamily="34" charset="0"/>
-              <a:buChar char="•"/>
-            </a:pPr>
-            <a:r>
-              <a:rPr lang="en-US" sz="2000" dirty="0"/>
-              <a:t>Model: </a:t>
-            </a:r>
-            <a:r>
-              <a:rPr lang="en-US" dirty="0" err="1"/>
-              <a:t>en_core_sci_sm</a:t>
-            </a:r>
-            <a:r>
-              <a:rPr lang="en-US" dirty="0"/>
-              <a:t> and en_ner_bc5cdr_mdb</a:t>
-            </a:r>
+              <a:buFont typeface="Arial" panose="020B0604020202020204" pitchFamily="34" charset="0"/>
+              <a:buChar char="•"/>
+            </a:pPr>
+            <a:endParaRPr lang="en-US" sz="2000" dirty="0"/>
+          </a:p>
+          <a:p>
+            <a:pPr marL="742950" lvl="1" indent="-285750">
+              <a:buFont typeface="Arial" panose="020B0604020202020204" pitchFamily="34" charset="0"/>
+              <a:buChar char="•"/>
+            </a:pPr>
+            <a:endParaRPr lang="en-US" sz="2000" dirty="0"/>
           </a:p>
           <a:p>
             <a:pPr marL="285750" indent="-285750">
-              <a:lnSpc>
-                <a:spcPct val="250000"/>
-              </a:lnSpc>
-              <a:buFont typeface="Arial" panose="020B0604020202020204" pitchFamily="34" charset="0"/>
-              <a:buChar char="•"/>
-            </a:pPr>
-            <a:r>
-              <a:rPr lang="en-US" sz="2000" dirty="0"/>
-              <a:t>Generated </a:t>
-            </a:r>
-            <a:r>
-              <a:rPr lang="en-US" sz="2000" dirty="0" err="1"/>
-              <a:t>Datasize</a:t>
-            </a:r>
-            <a:r>
-              <a:rPr lang="en-US" sz="2000" dirty="0"/>
-              <a:t>: </a:t>
-            </a:r>
-          </a:p>
-          <a:p>
-            <a:pPr marL="285750" indent="-285750">
-              <a:lnSpc>
-                <a:spcPct val="250000"/>
-              </a:lnSpc>
-              <a:buFont typeface="Arial" panose="020B0604020202020204" pitchFamily="34" charset="0"/>
-              <a:buChar char="•"/>
-            </a:pPr>
-            <a:r>
-              <a:rPr lang="en-US" sz="2000" dirty="0"/>
-              <a:t>Extracted Event (label): </a:t>
-            </a:r>
-          </a:p>
-          <a:p>
-            <a:pPr marL="285750" indent="-285750">
-              <a:buFont typeface="Arial" panose="020B0604020202020204" pitchFamily="34" charset="0"/>
-              <a:buChar char="•"/>
-            </a:pPr>
-            <a:endParaRPr lang="en-US" sz="2000" dirty="0"/>
+              <a:buFont typeface="Arial" panose="020B0604020202020204" pitchFamily="34" charset="0"/>
+              <a:buChar char="•"/>
+            </a:pPr>
+            <a:endParaRPr lang="en-US" dirty="0"/>
           </a:p>
         </p:txBody>
       </p:sp>
       <p:pic>
         <p:nvPicPr>
-          <p:cNvPr id="5" name="Picture 4">
+          <p:cNvPr id="8" name="Picture 7">
             <a:extLst>
               <a:ext uri="{FF2B5EF4-FFF2-40B4-BE49-F238E27FC236}">
-                <a16:creationId xmlns:a16="http://schemas.microsoft.com/office/drawing/2014/main" id="{9A35E037-0968-30CD-6947-21390BF1E499}"/>
+                <a16:creationId xmlns:a16="http://schemas.microsoft.com/office/drawing/2014/main" id="{E1AEB19E-78E4-3B33-EA46-601797A06D1D}"/>
               </a:ext>
             </a:extLst>
           </p:cNvPr>
@@ -5924,68 +7822,8 @@
         </p:blipFill>
         <p:spPr>
           <a:xfrm>
-            <a:off x="3129273" y="2268405"/>
-            <a:ext cx="2406774" cy="590580"/>
-          </a:xfrm>
-          <a:prstGeom prst="rect">
-            <a:avLst/>
-          </a:prstGeom>
-        </p:spPr>
-      </p:pic>
-      <p:pic>
-        <p:nvPicPr>
-          <p:cNvPr id="8" name="Picture 7">
-            <a:extLst>
-              <a:ext uri="{FF2B5EF4-FFF2-40B4-BE49-F238E27FC236}">
-                <a16:creationId xmlns:a16="http://schemas.microsoft.com/office/drawing/2014/main" id="{4B54A883-0C81-A94E-0855-3075F6BEB236}"/>
-              </a:ext>
-            </a:extLst>
-          </p:cNvPr>
-          <p:cNvPicPr>
-            <a:picLocks noChangeAspect="1"/>
-          </p:cNvPicPr>
-          <p:nvPr/>
-        </p:nvPicPr>
-        <p:blipFill>
-          <a:blip r:embed="rId3"/>
-          <a:stretch>
-            <a:fillRect/>
-          </a:stretch>
-        </p:blipFill>
-        <p:spPr>
-          <a:xfrm>
-            <a:off x="457145" y="3514916"/>
-            <a:ext cx="4839011" cy="2872457"/>
-          </a:xfrm>
-          <a:prstGeom prst="rect">
-            <a:avLst/>
-          </a:prstGeom>
-        </p:spPr>
-      </p:pic>
-      <p:pic>
-        <p:nvPicPr>
-          <p:cNvPr id="11" name="Picture 10">
-            <a:extLst>
-              <a:ext uri="{FF2B5EF4-FFF2-40B4-BE49-F238E27FC236}">
-                <a16:creationId xmlns:a16="http://schemas.microsoft.com/office/drawing/2014/main" id="{3A10E8B2-C82E-47EB-14FF-2AC26ED98ED5}"/>
-              </a:ext>
-            </a:extLst>
-          </p:cNvPr>
-          <p:cNvPicPr>
-            <a:picLocks noChangeAspect="1"/>
-          </p:cNvPicPr>
-          <p:nvPr/>
-        </p:nvPicPr>
-        <p:blipFill>
-          <a:blip r:embed="rId4"/>
-          <a:stretch>
-            <a:fillRect/>
-          </a:stretch>
-        </p:blipFill>
-        <p:spPr>
-          <a:xfrm>
-            <a:off x="5148982" y="3514916"/>
-            <a:ext cx="3960984" cy="2872457"/>
+            <a:off x="1822664" y="2364313"/>
+            <a:ext cx="6363978" cy="3996329"/>
           </a:xfrm>
           <a:prstGeom prst="rect">
             <a:avLst/>
@@ -5995,7 +7833,7 @@
     </p:spTree>
     <p:extLst>
       <p:ext uri="{BB962C8B-B14F-4D97-AF65-F5344CB8AC3E}">
-        <p14:creationId xmlns:p14="http://schemas.microsoft.com/office/powerpoint/2010/main" val="921624165"/>
+        <p14:creationId xmlns:p14="http://schemas.microsoft.com/office/powerpoint/2010/main" val="1266508332"/>
       </p:ext>
     </p:extLst>
   </p:cSld>
@@ -6013,7 +7851,7 @@
         <p:cNvPr id="1" name="">
           <a:extLst>
             <a:ext uri="{FF2B5EF4-FFF2-40B4-BE49-F238E27FC236}">
-              <a16:creationId xmlns:a16="http://schemas.microsoft.com/office/drawing/2014/main" id="{39A04C9C-7DE3-4FE3-6D70-CAD48946E0C9}"/>
+              <a16:creationId xmlns:a16="http://schemas.microsoft.com/office/drawing/2014/main" id="{83FE4047-BFBB-2ACB-5BEA-B083D690C73C}"/>
             </a:ext>
           </a:extLst>
         </p:cNvPr>
@@ -6033,7 +7871,7 @@
           <p:cNvPr id="2" name="Title 1">
             <a:extLst>
               <a:ext uri="{FF2B5EF4-FFF2-40B4-BE49-F238E27FC236}">
-                <a16:creationId xmlns:a16="http://schemas.microsoft.com/office/drawing/2014/main" id="{02BAE8EC-0F83-828A-C906-BCF560249B74}"/>
+                <a16:creationId xmlns:a16="http://schemas.microsoft.com/office/drawing/2014/main" id="{C7406422-01D2-5C35-EBBC-33273EDE2B92}"/>
               </a:ext>
             </a:extLst>
           </p:cNvPr>
@@ -6046,8 +7884,8 @@
         </p:nvSpPr>
         <p:spPr>
           <a:xfrm>
-            <a:off x="131887" y="327394"/>
-            <a:ext cx="8229600" cy="936810"/>
+            <a:off x="411172" y="46506"/>
+            <a:ext cx="8229600" cy="1099820"/>
           </a:xfrm>
         </p:spPr>
         <p:txBody>
@@ -6057,26 +7895,136 @@
           <a:lstStyle/>
           <a:p>
             <a:r>
-              <a:rPr lang="en-US" sz="4000" dirty="0" err="1"/>
-              <a:t>Scispacy</a:t>
+              <a:rPr lang="en-US" sz="4000" dirty="0"/>
+              <a:t>EDA IV</a:t>
             </a:r>
             <a:br>
               <a:rPr lang="en-US" sz="4000" dirty="0"/>
             </a:br>
             <a:r>
               <a:rPr lang="en-US" sz="3100" dirty="0"/>
-              <a:t>t-SNE based on w2V </a:t>
+              <a:t>Exploratory Data Analysis</a:t>
             </a:r>
             <a:endParaRPr sz="3100" dirty="0"/>
+          </a:p>
+        </p:txBody>
+      </p:sp>
+      <p:sp>
+        <p:nvSpPr>
+          <p:cNvPr id="3" name="TextBox 2">
+            <a:extLst>
+              <a:ext uri="{FF2B5EF4-FFF2-40B4-BE49-F238E27FC236}">
+                <a16:creationId xmlns:a16="http://schemas.microsoft.com/office/drawing/2014/main" id="{F8BB95AE-8758-2F3A-E9DE-F9375DAE82E1}"/>
+              </a:ext>
+            </a:extLst>
+          </p:cNvPr>
+          <p:cNvSpPr txBox="1"/>
+          <p:nvPr/>
+        </p:nvSpPr>
+        <p:spPr>
+          <a:xfrm>
+            <a:off x="1172089" y="1134052"/>
+            <a:ext cx="7189393" cy="3970318"/>
+          </a:xfrm>
+          <a:prstGeom prst="rect">
+            <a:avLst/>
+          </a:prstGeom>
+          <a:noFill/>
+        </p:spPr>
+        <p:txBody>
+          <a:bodyPr wrap="square" rtlCol="0">
+            <a:spAutoFit/>
+          </a:bodyPr>
+          <a:lstStyle/>
+          <a:p>
+            <a:pPr marL="342900" indent="-342900" fontAlgn="base">
+              <a:buFont typeface="Arial" panose="020B0604020202020204" pitchFamily="34" charset="0"/>
+              <a:buChar char="•"/>
+            </a:pPr>
+            <a:r>
+              <a:rPr lang="en-US" sz="2000" dirty="0"/>
+              <a:t>Dataset Analysis</a:t>
+            </a:r>
+          </a:p>
+          <a:p>
+            <a:pPr fontAlgn="base"/>
+            <a:r>
+              <a:rPr lang="en-US" sz="2000" dirty="0"/>
+              <a:t>The next two charts show the potential high-risk factors based on correlations and mean differences</a:t>
+            </a:r>
+          </a:p>
+          <a:p>
+            <a:pPr marL="742950" lvl="1" indent="-285750" fontAlgn="base">
+              <a:buFont typeface="Wingdings" panose="05000000000000000000" pitchFamily="2" charset="2"/>
+              <a:buChar char="Ø"/>
+            </a:pPr>
+            <a:r>
+              <a:rPr lang="en-US" dirty="0"/>
+              <a:t>Top 10 features correlated with the mortality label</a:t>
+            </a:r>
+          </a:p>
+          <a:p>
+            <a:pPr fontAlgn="base"/>
+            <a:endParaRPr lang="en-US" dirty="0"/>
+          </a:p>
+          <a:p>
+            <a:pPr marL="742950" lvl="1" indent="-285750">
+              <a:buFont typeface="Arial" panose="020B0604020202020204" pitchFamily="34" charset="0"/>
+              <a:buChar char="•"/>
+            </a:pPr>
+            <a:endParaRPr lang="en-US" dirty="0"/>
+          </a:p>
+          <a:p>
+            <a:pPr marL="742950" lvl="1" indent="-285750">
+              <a:buFont typeface="Arial" panose="020B0604020202020204" pitchFamily="34" charset="0"/>
+              <a:buChar char="•"/>
+            </a:pPr>
+            <a:endParaRPr lang="en-US" sz="2000" dirty="0"/>
+          </a:p>
+          <a:p>
+            <a:pPr lvl="1"/>
+            <a:endParaRPr lang="en-US" sz="2000" dirty="0"/>
+          </a:p>
+          <a:p>
+            <a:pPr marL="800100" lvl="1" indent="-342900">
+              <a:buFont typeface="Arial" panose="020B0604020202020204" pitchFamily="34" charset="0"/>
+              <a:buChar char="•"/>
+            </a:pPr>
+            <a:endParaRPr lang="en-US" sz="2000" dirty="0"/>
+          </a:p>
+          <a:p>
+            <a:pPr lvl="1"/>
+            <a:endParaRPr lang="en-US" sz="2000" dirty="0"/>
+          </a:p>
+          <a:p>
+            <a:pPr marL="285750" indent="-285750">
+              <a:buFont typeface="Arial" panose="020B0604020202020204" pitchFamily="34" charset="0"/>
+              <a:buChar char="•"/>
+            </a:pPr>
+            <a:endParaRPr lang="en-US" sz="2000" dirty="0"/>
+          </a:p>
+          <a:p>
+            <a:pPr marL="742950" lvl="1" indent="-285750">
+              <a:buFont typeface="Arial" panose="020B0604020202020204" pitchFamily="34" charset="0"/>
+              <a:buChar char="•"/>
+            </a:pPr>
+            <a:endParaRPr lang="en-US" sz="2000" dirty="0"/>
+          </a:p>
+          <a:p>
+            <a:pPr marL="285750" indent="-285750">
+              <a:buFont typeface="Arial" panose="020B0604020202020204" pitchFamily="34" charset="0"/>
+              <a:buChar char="•"/>
+            </a:pPr>
+            <a:endParaRPr lang="en-US" dirty="0"/>
           </a:p>
         </p:txBody>
       </p:sp>
       <p:pic>
         <p:nvPicPr>
-          <p:cNvPr id="5" name="Picture 4">
+          <p:cNvPr id="7" name="Picture 6">
             <a:extLst>
               <a:ext uri="{FF2B5EF4-FFF2-40B4-BE49-F238E27FC236}">
-                <a16:creationId xmlns:a16="http://schemas.microsoft.com/office/drawing/2014/main" id="{C9AE8175-9762-611B-BECA-CF6BE2BD358B}"/>
+                <a16:creationId xmlns:a16="http://schemas.microsoft.com/office/drawing/2014/main" id="{A1A927B8-4835-7991-D440-69BD05EA7F65}"/>
               </a:ext>
             </a:extLst>
           </p:cNvPr>
@@ -6093,134 +8041,18 @@
         </p:blipFill>
         <p:spPr>
           <a:xfrm>
-            <a:off x="681309" y="3312840"/>
-            <a:ext cx="8407457" cy="2487714"/>
+            <a:off x="1294889" y="2683022"/>
+            <a:ext cx="6726056" cy="3040926"/>
           </a:xfrm>
           <a:prstGeom prst="rect">
             <a:avLst/>
           </a:prstGeom>
         </p:spPr>
       </p:pic>
-      <p:sp>
-        <p:nvSpPr>
-          <p:cNvPr id="8" name="TextBox 7">
-            <a:extLst>
-              <a:ext uri="{FF2B5EF4-FFF2-40B4-BE49-F238E27FC236}">
-                <a16:creationId xmlns:a16="http://schemas.microsoft.com/office/drawing/2014/main" id="{A0C94AE2-9DE7-3A56-5C99-F69FC9FA1C04}"/>
-              </a:ext>
-            </a:extLst>
-          </p:cNvPr>
-          <p:cNvSpPr txBox="1"/>
-          <p:nvPr/>
-        </p:nvSpPr>
-        <p:spPr>
-          <a:xfrm>
-            <a:off x="368271" y="1411092"/>
-            <a:ext cx="8407457" cy="2554545"/>
-          </a:xfrm>
-          <a:prstGeom prst="rect">
-            <a:avLst/>
-          </a:prstGeom>
-          <a:noFill/>
-        </p:spPr>
-        <p:txBody>
-          <a:bodyPr wrap="square" rtlCol="0">
-            <a:spAutoFit/>
-          </a:bodyPr>
-          <a:lstStyle/>
-          <a:p>
-            <a:pPr marL="285750" indent="-285750">
-              <a:buFont typeface="Arial" panose="020B0604020202020204" pitchFamily="34" charset="0"/>
-              <a:buChar char="•"/>
-            </a:pPr>
-            <a:r>
-              <a:rPr lang="en-US" sz="2000" dirty="0"/>
-              <a:t>The default biomedical model only generate one entity type</a:t>
-            </a:r>
-          </a:p>
-          <a:p>
-            <a:pPr marL="285750" indent="-285750">
-              <a:buFont typeface="Arial" panose="020B0604020202020204" pitchFamily="34" charset="0"/>
-              <a:buChar char="•"/>
-            </a:pPr>
-            <a:r>
-              <a:rPr lang="en-US" sz="2000" dirty="0"/>
-              <a:t>w2V still generate semantic information</a:t>
-            </a:r>
-          </a:p>
-          <a:p>
-            <a:pPr marL="285750" indent="-285750">
-              <a:buFont typeface="Arial" panose="020B0604020202020204" pitchFamily="34" charset="0"/>
-              <a:buChar char="•"/>
-            </a:pPr>
-            <a:r>
-              <a:rPr lang="en-US" sz="2000" dirty="0"/>
-              <a:t>Perp =10, </a:t>
-            </a:r>
-            <a:r>
-              <a:rPr lang="en-US" sz="2000" dirty="0" err="1"/>
-              <a:t>lr</a:t>
-            </a:r>
-            <a:r>
-              <a:rPr lang="en-US" sz="2000" dirty="0"/>
-              <a:t>=200 shows strong local structure</a:t>
-            </a:r>
-          </a:p>
-          <a:p>
-            <a:pPr marL="285750" indent="-285750">
-              <a:buFont typeface="Arial" panose="020B0604020202020204" pitchFamily="34" charset="0"/>
-              <a:buChar char="•"/>
-            </a:pPr>
-            <a:r>
-              <a:rPr lang="en-US" sz="2000" dirty="0"/>
-              <a:t>Perp =30, </a:t>
-            </a:r>
-            <a:r>
-              <a:rPr lang="en-US" sz="2000" dirty="0" err="1"/>
-              <a:t>lr</a:t>
-            </a:r>
-            <a:r>
-              <a:rPr lang="en-US" sz="2000" dirty="0"/>
-              <a:t>=Auto, shows more balanced with broader neighborhood</a:t>
-            </a:r>
-          </a:p>
-          <a:p>
-            <a:pPr marL="285750" indent="-285750">
-              <a:buFont typeface="Arial" panose="020B0604020202020204" pitchFamily="34" charset="0"/>
-              <a:buChar char="•"/>
-            </a:pPr>
-            <a:r>
-              <a:rPr lang="en-US" sz="2000" dirty="0"/>
-              <a:t>Perp =50, </a:t>
-            </a:r>
-            <a:r>
-              <a:rPr lang="en-US" sz="2000" dirty="0" err="1"/>
-              <a:t>lr</a:t>
-            </a:r>
-            <a:r>
-              <a:rPr lang="en-US" sz="2000" dirty="0"/>
-              <a:t>=500, shows more disperse peripheral points</a:t>
-            </a:r>
-          </a:p>
-          <a:p>
-            <a:endParaRPr lang="en-US" sz="2000" dirty="0"/>
-          </a:p>
-          <a:p>
-            <a:pPr marL="285750" indent="-285750">
-              <a:buFont typeface="Arial" panose="020B0604020202020204" pitchFamily="34" charset="0"/>
-              <a:buChar char="•"/>
-            </a:pPr>
-            <a:endParaRPr lang="en-US" sz="2000" dirty="0"/>
-          </a:p>
-          <a:p>
-            <a:endParaRPr lang="en-US" sz="2000" dirty="0"/>
-          </a:p>
-        </p:txBody>
-      </p:sp>
     </p:spTree>
     <p:extLst>
       <p:ext uri="{BB962C8B-B14F-4D97-AF65-F5344CB8AC3E}">
-        <p14:creationId xmlns:p14="http://schemas.microsoft.com/office/powerpoint/2010/main" val="3012586690"/>
+        <p14:creationId xmlns:p14="http://schemas.microsoft.com/office/powerpoint/2010/main" val="2750265026"/>
       </p:ext>
     </p:extLst>
   </p:cSld>
@@ -6238,7 +8070,7 @@
         <p:cNvPr id="1" name="">
           <a:extLst>
             <a:ext uri="{FF2B5EF4-FFF2-40B4-BE49-F238E27FC236}">
-              <a16:creationId xmlns:a16="http://schemas.microsoft.com/office/drawing/2014/main" id="{77EB4597-EB6F-C6C9-A111-7A8D6EE9C2C1}"/>
+              <a16:creationId xmlns:a16="http://schemas.microsoft.com/office/drawing/2014/main" id="{00C69ADC-CC4B-5996-87B7-B9DAFDEB524F}"/>
             </a:ext>
           </a:extLst>
         </p:cNvPr>
@@ -6258,7 +8090,7 @@
           <p:cNvPr id="2" name="Title 1">
             <a:extLst>
               <a:ext uri="{FF2B5EF4-FFF2-40B4-BE49-F238E27FC236}">
-                <a16:creationId xmlns:a16="http://schemas.microsoft.com/office/drawing/2014/main" id="{99A8979D-120A-0357-C84A-24E263C3A45E}"/>
+                <a16:creationId xmlns:a16="http://schemas.microsoft.com/office/drawing/2014/main" id="{2F398264-EDF5-F546-AE1C-A54F9CD7DA54}"/>
               </a:ext>
             </a:extLst>
           </p:cNvPr>
@@ -6271,8 +8103,8 @@
         </p:nvSpPr>
         <p:spPr>
           <a:xfrm>
-            <a:off x="131887" y="327394"/>
-            <a:ext cx="8229600" cy="936810"/>
+            <a:off x="411172" y="46506"/>
+            <a:ext cx="8229600" cy="1099820"/>
           </a:xfrm>
         </p:spPr>
         <p:txBody>
@@ -6283,14 +8115,14 @@
           <a:p>
             <a:r>
               <a:rPr lang="en-US" sz="4000" dirty="0"/>
-              <a:t>bc5cdr</a:t>
+              <a:t>EDA V</a:t>
             </a:r>
             <a:br>
               <a:rPr lang="en-US" sz="4000" dirty="0"/>
             </a:br>
             <a:r>
               <a:rPr lang="en-US" sz="3100" dirty="0"/>
-              <a:t>t-SNE based on w2V </a:t>
+              <a:t>Exploratory Data Analysis</a:t>
             </a:r>
             <a:endParaRPr sz="3100" dirty="0"/>
           </a:p>
@@ -6298,10 +8130,10 @@
       </p:sp>
       <p:sp>
         <p:nvSpPr>
-          <p:cNvPr id="9" name="TextBox 8">
+          <p:cNvPr id="3" name="TextBox 2">
             <a:extLst>
               <a:ext uri="{FF2B5EF4-FFF2-40B4-BE49-F238E27FC236}">
-                <a16:creationId xmlns:a16="http://schemas.microsoft.com/office/drawing/2014/main" id="{B210D4FD-570E-132B-2C24-790A5E0112BB}"/>
+                <a16:creationId xmlns:a16="http://schemas.microsoft.com/office/drawing/2014/main" id="{6D8217AC-2819-AAD6-C998-54F22041D8B9}"/>
               </a:ext>
             </a:extLst>
           </p:cNvPr>
@@ -6310,8 +8142,8 @@
         </p:nvSpPr>
         <p:spPr>
           <a:xfrm>
-            <a:off x="-737523" y="1214711"/>
-            <a:ext cx="8407457" cy="1631216"/>
+            <a:off x="1172089" y="1134052"/>
+            <a:ext cx="7189393" cy="3354765"/>
           </a:xfrm>
           <a:prstGeom prst="rect">
             <a:avLst/>
@@ -6324,6 +8156,59 @@
           </a:bodyPr>
           <a:lstStyle/>
           <a:p>
+            <a:pPr marL="342900" indent="-342900" fontAlgn="base">
+              <a:buFont typeface="Arial" panose="020B0604020202020204" pitchFamily="34" charset="0"/>
+              <a:buChar char="•"/>
+            </a:pPr>
+            <a:r>
+              <a:rPr lang="en-US" sz="2000" dirty="0"/>
+              <a:t>Dataset Analysis</a:t>
+            </a:r>
+          </a:p>
+          <a:p>
+            <a:pPr marL="742950" lvl="1" indent="-285750" fontAlgn="base">
+              <a:buFont typeface="Wingdings" panose="05000000000000000000" pitchFamily="2" charset="2"/>
+              <a:buChar char="Ø"/>
+            </a:pPr>
+            <a:r>
+              <a:rPr lang="en-US" dirty="0"/>
+              <a:t>Top 10 features with largest mean differences</a:t>
+            </a:r>
+          </a:p>
+          <a:p>
+            <a:pPr fontAlgn="base"/>
+            <a:endParaRPr lang="en-US" dirty="0"/>
+          </a:p>
+          <a:p>
+            <a:pPr marL="742950" lvl="1" indent="-285750">
+              <a:buFont typeface="Arial" panose="020B0604020202020204" pitchFamily="34" charset="0"/>
+              <a:buChar char="•"/>
+            </a:pPr>
+            <a:endParaRPr lang="en-US" dirty="0"/>
+          </a:p>
+          <a:p>
+            <a:pPr marL="742950" lvl="1" indent="-285750">
+              <a:buFont typeface="Arial" panose="020B0604020202020204" pitchFamily="34" charset="0"/>
+              <a:buChar char="•"/>
+            </a:pPr>
+            <a:endParaRPr lang="en-US" sz="2000" dirty="0"/>
+          </a:p>
+          <a:p>
+            <a:pPr lvl="1"/>
+            <a:endParaRPr lang="en-US" sz="2000" dirty="0"/>
+          </a:p>
+          <a:p>
+            <a:pPr marL="800100" lvl="1" indent="-342900">
+              <a:buFont typeface="Arial" panose="020B0604020202020204" pitchFamily="34" charset="0"/>
+              <a:buChar char="•"/>
+            </a:pPr>
+            <a:endParaRPr lang="en-US" sz="2000" dirty="0"/>
+          </a:p>
+          <a:p>
+            <a:pPr lvl="1"/>
+            <a:endParaRPr lang="en-US" sz="2000" dirty="0"/>
+          </a:p>
+          <a:p>
             <a:pPr marL="285750" indent="-285750">
               <a:buFont typeface="Arial" panose="020B0604020202020204" pitchFamily="34" charset="0"/>
               <a:buChar char="•"/>
@@ -6331,12 +8216,10 @@
             <a:endParaRPr lang="en-US" sz="2000" dirty="0"/>
           </a:p>
           <a:p>
-            <a:r>
-              <a:rPr lang="en-US" sz="2000" dirty="0"/>
-              <a:t> </a:t>
-            </a:r>
-          </a:p>
-          <a:p>
+            <a:pPr marL="742950" lvl="1" indent="-285750">
+              <a:buFont typeface="Arial" panose="020B0604020202020204" pitchFamily="34" charset="0"/>
+              <a:buChar char="•"/>
+            </a:pPr>
             <a:endParaRPr lang="en-US" sz="2000" dirty="0"/>
           </a:p>
           <a:p>
@@ -6344,19 +8227,16 @@
               <a:buFont typeface="Arial" panose="020B0604020202020204" pitchFamily="34" charset="0"/>
               <a:buChar char="•"/>
             </a:pPr>
-            <a:endParaRPr lang="en-US" sz="2000" dirty="0"/>
-          </a:p>
-          <a:p>
-            <a:endParaRPr lang="en-US" sz="2000" dirty="0"/>
+            <a:endParaRPr lang="en-US" dirty="0"/>
           </a:p>
         </p:txBody>
       </p:sp>
       <p:pic>
         <p:nvPicPr>
-          <p:cNvPr id="4" name="Picture 3">
+          <p:cNvPr id="5" name="Picture 4">
             <a:extLst>
               <a:ext uri="{FF2B5EF4-FFF2-40B4-BE49-F238E27FC236}">
-                <a16:creationId xmlns:a16="http://schemas.microsoft.com/office/drawing/2014/main" id="{50418DCF-E92D-410D-B62D-32C2ECA99FEE}"/>
+                <a16:creationId xmlns:a16="http://schemas.microsoft.com/office/drawing/2014/main" id="{27353799-B60A-4835-A17E-7A39CE58339A}"/>
               </a:ext>
             </a:extLst>
           </p:cNvPr>
@@ -6366,152 +8246,25 @@
           <p:nvPr/>
         </p:nvPicPr>
         <p:blipFill>
-          <a:blip r:embed="rId3"/>
+          <a:blip r:embed="rId2"/>
           <a:stretch>
             <a:fillRect/>
           </a:stretch>
         </p:blipFill>
         <p:spPr>
           <a:xfrm>
-            <a:off x="506884" y="3291386"/>
-            <a:ext cx="8557336" cy="2491737"/>
+            <a:off x="782518" y="1855225"/>
+            <a:ext cx="7842974" cy="3670512"/>
           </a:xfrm>
           <a:prstGeom prst="rect">
             <a:avLst/>
           </a:prstGeom>
         </p:spPr>
       </p:pic>
-      <p:sp>
-        <p:nvSpPr>
-          <p:cNvPr id="6" name="TextBox 5">
-            <a:extLst>
-              <a:ext uri="{FF2B5EF4-FFF2-40B4-BE49-F238E27FC236}">
-                <a16:creationId xmlns:a16="http://schemas.microsoft.com/office/drawing/2014/main" id="{0ADFDE9B-6F11-05A0-61A1-B055E788F353}"/>
-              </a:ext>
-            </a:extLst>
-          </p:cNvPr>
-          <p:cNvSpPr txBox="1"/>
-          <p:nvPr/>
-        </p:nvSpPr>
-        <p:spPr>
-          <a:xfrm>
-            <a:off x="497203" y="1446597"/>
-            <a:ext cx="8407457" cy="2554545"/>
-          </a:xfrm>
-          <a:prstGeom prst="rect">
-            <a:avLst/>
-          </a:prstGeom>
-          <a:noFill/>
-        </p:spPr>
-        <p:txBody>
-          <a:bodyPr wrap="square" rtlCol="0">
-            <a:spAutoFit/>
-          </a:bodyPr>
-          <a:lstStyle/>
-          <a:p>
-            <a:pPr marL="285750" indent="-285750">
-              <a:buFont typeface="Arial" panose="020B0604020202020204" pitchFamily="34" charset="0"/>
-              <a:buChar char="•"/>
-            </a:pPr>
-            <a:r>
-              <a:rPr lang="en-US" sz="2000" dirty="0"/>
-              <a:t>The bc5cdr model generate two entity type</a:t>
-            </a:r>
-          </a:p>
-          <a:p>
-            <a:pPr marL="342900" indent="-342900">
-              <a:buFont typeface="Arial" panose="020B0604020202020204" pitchFamily="34" charset="0"/>
-              <a:buChar char="•"/>
-            </a:pPr>
-            <a:r>
-              <a:rPr lang="en-US" sz="2000" dirty="0"/>
-              <a:t>Perp =10, </a:t>
-            </a:r>
-            <a:r>
-              <a:rPr lang="en-US" sz="2000" dirty="0" err="1"/>
-              <a:t>lr</a:t>
-            </a:r>
-            <a:r>
-              <a:rPr lang="en-US" sz="2000" dirty="0"/>
-              <a:t>=200 shows two local blobs, with disease is more </a:t>
-            </a:r>
-            <a:r>
-              <a:rPr lang="en-US" sz="2000" dirty="0" err="1"/>
-              <a:t>spreadout</a:t>
-            </a:r>
-            <a:endParaRPr lang="en-US" sz="2000" dirty="0"/>
-          </a:p>
-          <a:p>
-            <a:pPr marL="285750" indent="-285750">
-              <a:buFont typeface="Arial" panose="020B0604020202020204" pitchFamily="34" charset="0"/>
-              <a:buChar char="•"/>
-            </a:pPr>
-            <a:r>
-              <a:rPr lang="en-US" sz="2000" dirty="0"/>
-              <a:t>Perp =30, </a:t>
-            </a:r>
-            <a:r>
-              <a:rPr lang="en-US" sz="2000" dirty="0" err="1"/>
-              <a:t>lr</a:t>
-            </a:r>
-            <a:r>
-              <a:rPr lang="en-US" sz="2000" dirty="0"/>
-              <a:t>=Auto, shows less noise and more clearly defined two blobs</a:t>
-            </a:r>
-          </a:p>
-          <a:p>
-            <a:pPr marL="285750" indent="-285750">
-              <a:buFont typeface="Arial" panose="020B0604020202020204" pitchFamily="34" charset="0"/>
-              <a:buChar char="•"/>
-            </a:pPr>
-            <a:r>
-              <a:rPr lang="en-US" sz="2000" dirty="0"/>
-              <a:t>Perp =50, </a:t>
-            </a:r>
-            <a:r>
-              <a:rPr lang="en-US" sz="2000" dirty="0" err="1"/>
-              <a:t>lr</a:t>
-            </a:r>
-            <a:r>
-              <a:rPr lang="en-US" sz="2000" dirty="0"/>
-              <a:t>=500, shows disease is more </a:t>
-            </a:r>
-            <a:r>
-              <a:rPr lang="en-US" sz="2000" dirty="0" err="1"/>
-              <a:t>broaderly</a:t>
-            </a:r>
-            <a:r>
-              <a:rPr lang="en-US" sz="2000" dirty="0"/>
-              <a:t> </a:t>
-            </a:r>
-            <a:r>
-              <a:rPr lang="en-US" sz="2000" dirty="0" err="1"/>
-              <a:t>spreadout</a:t>
-            </a:r>
-            <a:r>
-              <a:rPr lang="en-US" sz="2000" dirty="0"/>
-              <a:t>, but two blobs still hold</a:t>
-            </a:r>
-          </a:p>
-          <a:p>
-            <a:endParaRPr lang="en-US" sz="2000" dirty="0"/>
-          </a:p>
-          <a:p>
-            <a:pPr marL="285750" indent="-285750">
-              <a:buFont typeface="Arial" panose="020B0604020202020204" pitchFamily="34" charset="0"/>
-              <a:buChar char="•"/>
-            </a:pPr>
-            <a:endParaRPr lang="en-US" sz="2000" dirty="0"/>
-          </a:p>
-          <a:p>
-            <a:endParaRPr lang="en-US" sz="2000" dirty="0"/>
-          </a:p>
-        </p:txBody>
-      </p:sp>
     </p:spTree>
     <p:extLst>
       <p:ext uri="{BB962C8B-B14F-4D97-AF65-F5344CB8AC3E}">
-        <p14:creationId xmlns:p14="http://schemas.microsoft.com/office/powerpoint/2010/main" val="1023601932"/>
+        <p14:creationId xmlns:p14="http://schemas.microsoft.com/office/powerpoint/2010/main" val="1012904048"/>
       </p:ext>
     </p:extLst>
   </p:cSld>
@@ -6529,7 +8282,7 @@
         <p:cNvPr id="1" name="">
           <a:extLst>
             <a:ext uri="{FF2B5EF4-FFF2-40B4-BE49-F238E27FC236}">
-              <a16:creationId xmlns:a16="http://schemas.microsoft.com/office/drawing/2014/main" id="{46A6B36A-7AAF-C4CE-226E-BB05079C3921}"/>
+              <a16:creationId xmlns:a16="http://schemas.microsoft.com/office/drawing/2014/main" id="{47BD8BEE-9F58-0633-2A75-FDF785D35C2D}"/>
             </a:ext>
           </a:extLst>
         </p:cNvPr>
@@ -6549,7 +8302,7 @@
           <p:cNvPr id="2" name="Title 1">
             <a:extLst>
               <a:ext uri="{FF2B5EF4-FFF2-40B4-BE49-F238E27FC236}">
-                <a16:creationId xmlns:a16="http://schemas.microsoft.com/office/drawing/2014/main" id="{3463F09E-7159-372D-6B9F-18AD693A0AFD}"/>
+                <a16:creationId xmlns:a16="http://schemas.microsoft.com/office/drawing/2014/main" id="{94C18B1D-1733-29C7-2A22-2F16E1EEBFB3}"/>
               </a:ext>
             </a:extLst>
           </p:cNvPr>
@@ -6562,7 +8315,7 @@
         </p:nvSpPr>
         <p:spPr>
           <a:xfrm>
-            <a:off x="322131" y="327394"/>
+            <a:off x="411172" y="46506"/>
             <a:ext cx="8229600" cy="1099820"/>
           </a:xfrm>
         </p:spPr>
@@ -6573,26 +8326,22 @@
           <a:lstStyle/>
           <a:p>
             <a:r>
-              <a:rPr lang="en-US" sz="4000" dirty="0" err="1"/>
-              <a:t>Medspacy</a:t>
+              <a:rPr lang="en-US" sz="4000" dirty="0"/>
+              <a:t>Machine Learning Models</a:t>
             </a:r>
             <a:br>
               <a:rPr lang="en-US" sz="4000" dirty="0"/>
             </a:br>
-            <a:r>
-              <a:rPr lang="en-US" sz="3100" dirty="0"/>
-              <a:t>Model, extracted event label </a:t>
-            </a:r>
             <a:endParaRPr sz="3100" dirty="0"/>
           </a:p>
         </p:txBody>
       </p:sp>
       <p:sp>
         <p:nvSpPr>
-          <p:cNvPr id="10" name="TextBox 9">
+          <p:cNvPr id="3" name="TextBox 2">
             <a:extLst>
               <a:ext uri="{FF2B5EF4-FFF2-40B4-BE49-F238E27FC236}">
-                <a16:creationId xmlns:a16="http://schemas.microsoft.com/office/drawing/2014/main" id="{BF5B6A6C-BF6E-D1DB-C26E-183FCDDE5A32}"/>
+                <a16:creationId xmlns:a16="http://schemas.microsoft.com/office/drawing/2014/main" id="{69A87848-546A-6887-FD32-2DB74561E415}"/>
               </a:ext>
             </a:extLst>
           </p:cNvPr>
@@ -6601,8 +8350,8 @@
         </p:nvSpPr>
         <p:spPr>
           <a:xfrm>
-            <a:off x="555334" y="1361997"/>
-            <a:ext cx="8407457" cy="3323987"/>
+            <a:off x="1172089" y="1134052"/>
+            <a:ext cx="7189393" cy="6401753"/>
           </a:xfrm>
           <a:prstGeom prst="rect">
             <a:avLst/>
@@ -6615,169 +8364,162 @@
           </a:bodyPr>
           <a:lstStyle/>
           <a:p>
+            <a:pPr marL="342900" indent="-342900" fontAlgn="base">
+              <a:buFont typeface="Arial" panose="020B0604020202020204" pitchFamily="34" charset="0"/>
+              <a:buChar char="•"/>
+            </a:pPr>
+            <a:r>
+              <a:rPr lang="en-US" sz="2000" dirty="0"/>
+              <a:t>Models used in ICU mortality prediction</a:t>
+            </a:r>
+          </a:p>
+          <a:p>
+            <a:pPr marL="742950" lvl="1" indent="-285750" fontAlgn="base">
+              <a:buFont typeface="Wingdings" panose="05000000000000000000" pitchFamily="2" charset="2"/>
+              <a:buChar char="Ø"/>
+            </a:pPr>
+            <a:r>
+              <a:rPr lang="en-US" dirty="0"/>
+              <a:t>Logical regression model</a:t>
+            </a:r>
+          </a:p>
+          <a:p>
+            <a:pPr marL="1200150" lvl="2" indent="-285750" fontAlgn="base">
+              <a:buFont typeface="Wingdings" panose="05000000000000000000" pitchFamily="2" charset="2"/>
+              <a:buChar char="ü"/>
+            </a:pPr>
+            <a:r>
+              <a:rPr lang="en-US" dirty="0"/>
+              <a:t>Classic machine learning model used for binary classification problems</a:t>
+            </a:r>
+          </a:p>
+          <a:p>
+            <a:pPr marL="1200150" lvl="2" indent="-285750" fontAlgn="base">
+              <a:buFont typeface="Wingdings" panose="05000000000000000000" pitchFamily="2" charset="2"/>
+              <a:buChar char="ü"/>
+            </a:pPr>
+            <a:r>
+              <a:rPr lang="en-US" dirty="0"/>
+              <a:t>Works well for linear and approximate linear relationship</a:t>
+            </a:r>
+          </a:p>
+          <a:p>
+            <a:pPr marL="1200150" lvl="2" indent="-285750" fontAlgn="base">
+              <a:buFont typeface="Wingdings" panose="05000000000000000000" pitchFamily="2" charset="2"/>
+              <a:buChar char="ü"/>
+            </a:pPr>
+            <a:r>
+              <a:rPr lang="en-US" dirty="0"/>
+              <a:t>Easy to understand and computationally efficient</a:t>
+            </a:r>
+          </a:p>
+          <a:p>
+            <a:pPr marL="742950" lvl="1" indent="-285750" fontAlgn="base">
+              <a:buFont typeface="Wingdings" panose="05000000000000000000" pitchFamily="2" charset="2"/>
+              <a:buChar char="Ø"/>
+            </a:pPr>
+            <a:endParaRPr lang="en-US" dirty="0"/>
+          </a:p>
+          <a:p>
+            <a:pPr marL="742950" lvl="1" indent="-285750" fontAlgn="base">
+              <a:buFont typeface="Wingdings" panose="05000000000000000000" pitchFamily="2" charset="2"/>
+              <a:buChar char="Ø"/>
+            </a:pPr>
+            <a:r>
+              <a:rPr lang="en-US" dirty="0"/>
+              <a:t>Random Forest Model</a:t>
+            </a:r>
+          </a:p>
+          <a:p>
+            <a:pPr marL="1200150" lvl="2" indent="-285750" fontAlgn="base">
+              <a:buFont typeface="Wingdings" panose="05000000000000000000" pitchFamily="2" charset="2"/>
+              <a:buChar char="ü"/>
+            </a:pPr>
+            <a:r>
+              <a:rPr lang="en-US" dirty="0"/>
+              <a:t>An ensemble machine-learning method, builds many decision trees and averages predictions to improve accuracy and reduce overfitting</a:t>
+            </a:r>
+          </a:p>
+          <a:p>
+            <a:pPr marL="1200150" lvl="2" indent="-285750" fontAlgn="base">
+              <a:buFont typeface="Wingdings" panose="05000000000000000000" pitchFamily="2" charset="2"/>
+              <a:buChar char="ü"/>
+            </a:pPr>
+            <a:r>
+              <a:rPr lang="en-US" dirty="0"/>
+              <a:t>Capture non-linear relationship</a:t>
+            </a:r>
+          </a:p>
+          <a:p>
+            <a:pPr marL="1200150" lvl="2" indent="-285750" fontAlgn="base">
+              <a:buFont typeface="Wingdings" panose="05000000000000000000" pitchFamily="2" charset="2"/>
+              <a:buChar char="ü"/>
+            </a:pPr>
+            <a:r>
+              <a:rPr lang="en-US" dirty="0"/>
+              <a:t>Robust to noise and missing data</a:t>
+            </a:r>
+          </a:p>
+          <a:p>
+            <a:pPr fontAlgn="base"/>
+            <a:endParaRPr lang="en-US" dirty="0"/>
+          </a:p>
+          <a:p>
+            <a:pPr marL="742950" lvl="1" indent="-285750">
+              <a:buFont typeface="Arial" panose="020B0604020202020204" pitchFamily="34" charset="0"/>
+              <a:buChar char="•"/>
+            </a:pPr>
+            <a:endParaRPr lang="en-US" dirty="0"/>
+          </a:p>
+          <a:p>
+            <a:pPr marL="742950" lvl="1" indent="-285750">
+              <a:buFont typeface="Arial" panose="020B0604020202020204" pitchFamily="34" charset="0"/>
+              <a:buChar char="•"/>
+            </a:pPr>
+            <a:endParaRPr lang="en-US" sz="2000" dirty="0"/>
+          </a:p>
+          <a:p>
+            <a:pPr lvl="1"/>
+            <a:endParaRPr lang="en-US" sz="2000" dirty="0"/>
+          </a:p>
+          <a:p>
+            <a:pPr marL="800100" lvl="1" indent="-342900">
+              <a:buFont typeface="Arial" panose="020B0604020202020204" pitchFamily="34" charset="0"/>
+              <a:buChar char="•"/>
+            </a:pPr>
+            <a:endParaRPr lang="en-US" sz="2000" dirty="0"/>
+          </a:p>
+          <a:p>
+            <a:pPr lvl="1"/>
+            <a:endParaRPr lang="en-US" sz="2000" dirty="0"/>
+          </a:p>
+          <a:p>
             <a:pPr marL="285750" indent="-285750">
-              <a:lnSpc>
-                <a:spcPct val="200000"/>
-              </a:lnSpc>
-              <a:buFont typeface="Arial" panose="020B0604020202020204" pitchFamily="34" charset="0"/>
-              <a:buChar char="•"/>
-            </a:pPr>
-            <a:r>
-              <a:rPr lang="en-US" sz="2000" dirty="0"/>
-              <a:t>Model: </a:t>
-            </a:r>
-            <a:r>
-              <a:rPr lang="en-US" dirty="0"/>
-              <a:t>add target rules</a:t>
-            </a:r>
+              <a:buFont typeface="Arial" panose="020B0604020202020204" pitchFamily="34" charset="0"/>
+              <a:buChar char="•"/>
+            </a:pPr>
+            <a:endParaRPr lang="en-US" sz="2000" dirty="0"/>
+          </a:p>
+          <a:p>
+            <a:pPr marL="742950" lvl="1" indent="-285750">
+              <a:buFont typeface="Arial" panose="020B0604020202020204" pitchFamily="34" charset="0"/>
+              <a:buChar char="•"/>
+            </a:pPr>
+            <a:endParaRPr lang="en-US" sz="2000" dirty="0"/>
           </a:p>
           <a:p>
             <a:pPr marL="285750" indent="-285750">
-              <a:lnSpc>
-                <a:spcPct val="250000"/>
-              </a:lnSpc>
-              <a:buFont typeface="Arial" panose="020B0604020202020204" pitchFamily="34" charset="0"/>
-              <a:buChar char="•"/>
-            </a:pPr>
-            <a:endParaRPr lang="en-US" sz="2000" dirty="0"/>
-          </a:p>
-          <a:p>
-            <a:pPr marL="285750" indent="-285750">
-              <a:lnSpc>
-                <a:spcPct val="250000"/>
-              </a:lnSpc>
-              <a:buFont typeface="Arial" panose="020B0604020202020204" pitchFamily="34" charset="0"/>
-              <a:buChar char="•"/>
-            </a:pPr>
-            <a:r>
-              <a:rPr lang="en-US" sz="2000" dirty="0"/>
-              <a:t>Generated </a:t>
-            </a:r>
-            <a:r>
-              <a:rPr lang="en-US" sz="2000" dirty="0" err="1"/>
-              <a:t>Datasize</a:t>
-            </a:r>
-            <a:r>
-              <a:rPr lang="en-US" sz="2000" dirty="0"/>
-              <a:t>: </a:t>
-            </a:r>
-          </a:p>
-          <a:p>
-            <a:pPr marL="285750" indent="-285750">
-              <a:lnSpc>
-                <a:spcPct val="250000"/>
-              </a:lnSpc>
-              <a:buFont typeface="Arial" panose="020B0604020202020204" pitchFamily="34" charset="0"/>
-              <a:buChar char="•"/>
-            </a:pPr>
-            <a:r>
-              <a:rPr lang="en-US" sz="2000" dirty="0"/>
-              <a:t>Extracted Event (label): </a:t>
-            </a:r>
-          </a:p>
-          <a:p>
-            <a:pPr marL="285750" indent="-285750">
-              <a:buFont typeface="Arial" panose="020B0604020202020204" pitchFamily="34" charset="0"/>
-              <a:buChar char="•"/>
-            </a:pPr>
-            <a:endParaRPr lang="en-US" sz="2000" dirty="0"/>
-          </a:p>
-        </p:txBody>
-      </p:sp>
-      <p:pic>
-        <p:nvPicPr>
-          <p:cNvPr id="7" name="Picture 6">
-            <a:extLst>
-              <a:ext uri="{FF2B5EF4-FFF2-40B4-BE49-F238E27FC236}">
-                <a16:creationId xmlns:a16="http://schemas.microsoft.com/office/drawing/2014/main" id="{41EC9662-5B66-4CEF-299C-14AF1A40E00A}"/>
-              </a:ext>
-            </a:extLst>
-          </p:cNvPr>
-          <p:cNvPicPr>
-            <a:picLocks noChangeAspect="1"/>
-          </p:cNvPicPr>
-          <p:nvPr/>
-        </p:nvPicPr>
-        <p:blipFill>
-          <a:blip r:embed="rId2"/>
-          <a:stretch>
-            <a:fillRect/>
-          </a:stretch>
-        </p:blipFill>
-        <p:spPr>
-          <a:xfrm>
-            <a:off x="938947" y="1998398"/>
-            <a:ext cx="4544438" cy="1099820"/>
-          </a:xfrm>
-          <a:prstGeom prst="rect">
-            <a:avLst/>
-          </a:prstGeom>
-        </p:spPr>
-      </p:pic>
-      <p:pic>
-        <p:nvPicPr>
-          <p:cNvPr id="12" name="Picture 11">
-            <a:extLst>
-              <a:ext uri="{FF2B5EF4-FFF2-40B4-BE49-F238E27FC236}">
-                <a16:creationId xmlns:a16="http://schemas.microsoft.com/office/drawing/2014/main" id="{D54CDF63-A032-9FC3-FB41-17EB9009928C}"/>
-              </a:ext>
-            </a:extLst>
-          </p:cNvPr>
-          <p:cNvPicPr>
-            <a:picLocks noChangeAspect="1"/>
-          </p:cNvPicPr>
-          <p:nvPr/>
-        </p:nvPicPr>
-        <p:blipFill>
-          <a:blip r:embed="rId3"/>
-          <a:stretch>
-            <a:fillRect/>
-          </a:stretch>
-        </p:blipFill>
-        <p:spPr>
-          <a:xfrm>
-            <a:off x="1029034" y="3533780"/>
-            <a:ext cx="1943200" cy="209561"/>
-          </a:xfrm>
-          <a:prstGeom prst="rect">
-            <a:avLst/>
-          </a:prstGeom>
-        </p:spPr>
-      </p:pic>
-      <p:pic>
-        <p:nvPicPr>
-          <p:cNvPr id="14" name="Picture 13">
-            <a:extLst>
-              <a:ext uri="{FF2B5EF4-FFF2-40B4-BE49-F238E27FC236}">
-                <a16:creationId xmlns:a16="http://schemas.microsoft.com/office/drawing/2014/main" id="{D392A3ED-5C61-2191-4EBE-7DA99DD11BBA}"/>
-              </a:ext>
-            </a:extLst>
-          </p:cNvPr>
-          <p:cNvPicPr>
-            <a:picLocks noChangeAspect="1"/>
-          </p:cNvPicPr>
-          <p:nvPr/>
-        </p:nvPicPr>
-        <p:blipFill>
-          <a:blip r:embed="rId4"/>
-          <a:stretch>
-            <a:fillRect/>
-          </a:stretch>
-        </p:blipFill>
-        <p:spPr>
-          <a:xfrm>
-            <a:off x="938947" y="4351071"/>
-            <a:ext cx="7074264" cy="2317006"/>
-          </a:xfrm>
-          <a:prstGeom prst="rect">
-            <a:avLst/>
-          </a:prstGeom>
-        </p:spPr>
-      </p:pic>
+              <a:buFont typeface="Arial" panose="020B0604020202020204" pitchFamily="34" charset="0"/>
+              <a:buChar char="•"/>
+            </a:pPr>
+            <a:endParaRPr lang="en-US" dirty="0"/>
+          </a:p>
+        </p:txBody>
+      </p:sp>
     </p:spTree>
     <p:extLst>
       <p:ext uri="{BB962C8B-B14F-4D97-AF65-F5344CB8AC3E}">
-        <p14:creationId xmlns:p14="http://schemas.microsoft.com/office/powerpoint/2010/main" val="1683274661"/>
+        <p14:creationId xmlns:p14="http://schemas.microsoft.com/office/powerpoint/2010/main" val="1377575251"/>
       </p:ext>
     </p:extLst>
   </p:cSld>
